--- a/figs/figures.pptx
+++ b/figs/figures.pptx
@@ -198,7 +198,7 @@
           <a:p>
             <a:fld id="{9088784E-7603-884D-8785-F98637566DBB}" type="datetimeFigureOut">
               <a:rPr lang="en-US" smtClean="0"/>
-              <a:t>8/13/25</a:t>
+              <a:t>9/11/25</a:t>
             </a:fld>
             <a:endParaRPr lang="en-US"/>
           </a:p>
@@ -780,7 +780,7 @@
           <a:p>
             <a:fld id="{D8914414-2A77-FC4C-88A1-A9A8211F05BC}" type="datetimeFigureOut">
               <a:rPr lang="en-US" smtClean="0"/>
-              <a:t>8/13/25</a:t>
+              <a:t>9/11/25</a:t>
             </a:fld>
             <a:endParaRPr lang="en-US"/>
           </a:p>
@@ -978,7 +978,7 @@
           <a:p>
             <a:fld id="{D8914414-2A77-FC4C-88A1-A9A8211F05BC}" type="datetimeFigureOut">
               <a:rPr lang="en-US" smtClean="0"/>
-              <a:t>8/13/25</a:t>
+              <a:t>9/11/25</a:t>
             </a:fld>
             <a:endParaRPr lang="en-US"/>
           </a:p>
@@ -1186,7 +1186,7 @@
           <a:p>
             <a:fld id="{D8914414-2A77-FC4C-88A1-A9A8211F05BC}" type="datetimeFigureOut">
               <a:rPr lang="en-US" smtClean="0"/>
-              <a:t>8/13/25</a:t>
+              <a:t>9/11/25</a:t>
             </a:fld>
             <a:endParaRPr lang="en-US"/>
           </a:p>
@@ -1384,7 +1384,7 @@
           <a:p>
             <a:fld id="{D8914414-2A77-FC4C-88A1-A9A8211F05BC}" type="datetimeFigureOut">
               <a:rPr lang="en-US" smtClean="0"/>
-              <a:t>8/13/25</a:t>
+              <a:t>9/11/25</a:t>
             </a:fld>
             <a:endParaRPr lang="en-US"/>
           </a:p>
@@ -1659,7 +1659,7 @@
           <a:p>
             <a:fld id="{D8914414-2A77-FC4C-88A1-A9A8211F05BC}" type="datetimeFigureOut">
               <a:rPr lang="en-US" smtClean="0"/>
-              <a:t>8/13/25</a:t>
+              <a:t>9/11/25</a:t>
             </a:fld>
             <a:endParaRPr lang="en-US"/>
           </a:p>
@@ -1924,7 +1924,7 @@
           <a:p>
             <a:fld id="{D8914414-2A77-FC4C-88A1-A9A8211F05BC}" type="datetimeFigureOut">
               <a:rPr lang="en-US" smtClean="0"/>
-              <a:t>8/13/25</a:t>
+              <a:t>9/11/25</a:t>
             </a:fld>
             <a:endParaRPr lang="en-US"/>
           </a:p>
@@ -2336,7 +2336,7 @@
           <a:p>
             <a:fld id="{D8914414-2A77-FC4C-88A1-A9A8211F05BC}" type="datetimeFigureOut">
               <a:rPr lang="en-US" smtClean="0"/>
-              <a:t>8/13/25</a:t>
+              <a:t>9/11/25</a:t>
             </a:fld>
             <a:endParaRPr lang="en-US"/>
           </a:p>
@@ -2477,7 +2477,7 @@
           <a:p>
             <a:fld id="{D8914414-2A77-FC4C-88A1-A9A8211F05BC}" type="datetimeFigureOut">
               <a:rPr lang="en-US" smtClean="0"/>
-              <a:t>8/13/25</a:t>
+              <a:t>9/11/25</a:t>
             </a:fld>
             <a:endParaRPr lang="en-US"/>
           </a:p>
@@ -2590,7 +2590,7 @@
           <a:p>
             <a:fld id="{D8914414-2A77-FC4C-88A1-A9A8211F05BC}" type="datetimeFigureOut">
               <a:rPr lang="en-US" smtClean="0"/>
-              <a:t>8/13/25</a:t>
+              <a:t>9/11/25</a:t>
             </a:fld>
             <a:endParaRPr lang="en-US"/>
           </a:p>
@@ -2901,7 +2901,7 @@
           <a:p>
             <a:fld id="{D8914414-2A77-FC4C-88A1-A9A8211F05BC}" type="datetimeFigureOut">
               <a:rPr lang="en-US" smtClean="0"/>
-              <a:t>8/13/25</a:t>
+              <a:t>9/11/25</a:t>
             </a:fld>
             <a:endParaRPr lang="en-US"/>
           </a:p>
@@ -3189,7 +3189,7 @@
           <a:p>
             <a:fld id="{D8914414-2A77-FC4C-88A1-A9A8211F05BC}" type="datetimeFigureOut">
               <a:rPr lang="en-US" smtClean="0"/>
-              <a:t>8/13/25</a:t>
+              <a:t>9/11/25</a:t>
             </a:fld>
             <a:endParaRPr lang="en-US"/>
           </a:p>
@@ -3430,7 +3430,7 @@
           <a:p>
             <a:fld id="{D8914414-2A77-FC4C-88A1-A9A8211F05BC}" type="datetimeFigureOut">
               <a:rPr lang="en-US" smtClean="0"/>
-              <a:t>8/13/25</a:t>
+              <a:t>9/11/25</a:t>
             </a:fld>
             <a:endParaRPr lang="en-US"/>
           </a:p>
@@ -25058,12 +25058,311 @@
           </a:p>
         </p:txBody>
       </p:sp>
+      <p:pic>
+        <p:nvPicPr>
+          <p:cNvPr id="51" name="Picture 2">
+            <a:extLst>
+              <a:ext uri="{FF2B5EF4-FFF2-40B4-BE49-F238E27FC236}">
+                <a16:creationId xmlns:a16="http://schemas.microsoft.com/office/drawing/2014/main" id="{090AD3AA-827F-5E3B-35F4-C40CA89B0998}"/>
+              </a:ext>
+            </a:extLst>
+          </p:cNvPr>
+          <p:cNvPicPr>
+            <a:picLocks noChangeAspect="1" noChangeArrowheads="1"/>
+          </p:cNvPicPr>
+          <p:nvPr/>
+        </p:nvPicPr>
+        <p:blipFill rotWithShape="1">
+          <a:blip r:embed="rId6">
+            <a:grayscl/>
+            <a:alphaModFix/>
+            <a:extLst>
+              <a:ext uri="{BEBA8EAE-BF5A-486C-A8C5-ECC9F3942E4B}">
+                <a14:imgProps xmlns:a14="http://schemas.microsoft.com/office/drawing/2010/main">
+                  <a14:imgLayer r:embed="rId7">
+                    <a14:imgEffect>
+                      <a14:colorTemperature colorTemp="4700"/>
+                    </a14:imgEffect>
+                    <a14:imgEffect>
+                      <a14:saturation sat="0"/>
+                    </a14:imgEffect>
+                  </a14:imgLayer>
+                </a14:imgProps>
+              </a:ext>
+              <a:ext uri="{28A0092B-C50C-407E-A947-70E740481C1C}">
+                <a14:useLocalDpi xmlns:a14="http://schemas.microsoft.com/office/drawing/2010/main" val="0"/>
+              </a:ext>
+            </a:extLst>
+          </a:blip>
+          <a:srcRect t="5365"/>
+          <a:stretch>
+            <a:fillRect/>
+          </a:stretch>
+        </p:blipFill>
+        <p:spPr bwMode="auto">
+          <a:xfrm>
+            <a:off x="689927" y="2868826"/>
+            <a:ext cx="5294259" cy="3763536"/>
+          </a:xfrm>
+          <a:prstGeom prst="rect">
+            <a:avLst/>
+          </a:prstGeom>
+          <a:noFill/>
+          <a:extLst>
+            <a:ext uri="{909E8E84-426E-40DD-AFC4-6F175D3DCCD1}">
+              <a14:hiddenFill xmlns:a14="http://schemas.microsoft.com/office/drawing/2010/main">
+                <a:solidFill>
+                  <a:srgbClr val="FFFFFF"/>
+                </a:solidFill>
+              </a14:hiddenFill>
+            </a:ext>
+          </a:extLst>
+        </p:spPr>
+      </p:pic>
+      <p:pic>
+        <p:nvPicPr>
+          <p:cNvPr id="52" name="Picture 4">
+            <a:extLst>
+              <a:ext uri="{FF2B5EF4-FFF2-40B4-BE49-F238E27FC236}">
+                <a16:creationId xmlns:a16="http://schemas.microsoft.com/office/drawing/2014/main" id="{486C646E-5E27-B5CD-8934-94ED5B3DEA12}"/>
+              </a:ext>
+            </a:extLst>
+          </p:cNvPr>
+          <p:cNvPicPr>
+            <a:picLocks noChangeAspect="1" noChangeArrowheads="1"/>
+          </p:cNvPicPr>
+          <p:nvPr/>
+        </p:nvPicPr>
+        <p:blipFill rotWithShape="1">
+          <a:blip r:embed="rId8">
+            <a:duotone>
+              <a:prstClr val="black"/>
+              <a:schemeClr val="accent6">
+                <a:lumMod val="40000"/>
+                <a:lumOff val="60000"/>
+                <a:tint val="45000"/>
+                <a:satMod val="400000"/>
+              </a:schemeClr>
+            </a:duotone>
+            <a:extLst>
+              <a:ext uri="{BEBA8EAE-BF5A-486C-A8C5-ECC9F3942E4B}">
+                <a14:imgProps xmlns:a14="http://schemas.microsoft.com/office/drawing/2010/main">
+                  <a14:imgLayer r:embed="rId9">
+                    <a14:imgEffect>
+                      <a14:backgroundRemoval t="32813" b="65938" l="1526" r="16315">
+                        <a14:foregroundMark x1="2347" y1="35313" x2="4930" y2="34688"/>
+                        <a14:foregroundMark x1="9038" y1="63438" x2="13850" y2="67188"/>
+                        <a14:foregroundMark x1="13850" y1="67188" x2="16315" y2="60625"/>
+                        <a14:foregroundMark x1="16315" y1="60625" x2="15258" y2="57969"/>
+                        <a14:foregroundMark x1="9859" y1="65781" x2="15141" y2="65938"/>
+                        <a14:foregroundMark x1="3052" y1="33125" x2="4108" y2="32813"/>
+                      </a14:backgroundRemoval>
+                    </a14:imgEffect>
+                    <a14:imgEffect>
+                      <a14:brightnessContrast bright="20000"/>
+                    </a14:imgEffect>
+                  </a14:imgLayer>
+                </a14:imgProps>
+              </a:ext>
+              <a:ext uri="{28A0092B-C50C-407E-A947-70E740481C1C}">
+                <a14:useLocalDpi xmlns:a14="http://schemas.microsoft.com/office/drawing/2010/main" val="0"/>
+              </a:ext>
+            </a:extLst>
+          </a:blip>
+          <a:srcRect t="30786" r="83068" b="31542"/>
+          <a:stretch>
+            <a:fillRect/>
+          </a:stretch>
+        </p:blipFill>
+        <p:spPr bwMode="auto">
+          <a:xfrm>
+            <a:off x="689927" y="3876614"/>
+            <a:ext cx="896453" cy="1498208"/>
+          </a:xfrm>
+          <a:prstGeom prst="rect">
+            <a:avLst/>
+          </a:prstGeom>
+          <a:noFill/>
+          <a:extLst>
+            <a:ext uri="{909E8E84-426E-40DD-AFC4-6F175D3DCCD1}">
+              <a14:hiddenFill xmlns:a14="http://schemas.microsoft.com/office/drawing/2010/main">
+                <a:solidFill>
+                  <a:srgbClr val="FFFFFF"/>
+                </a:solidFill>
+              </a14:hiddenFill>
+            </a:ext>
+          </a:extLst>
+        </p:spPr>
+      </p:pic>
+      <p:pic>
+        <p:nvPicPr>
+          <p:cNvPr id="53" name="Picture 4">
+            <a:extLst>
+              <a:ext uri="{FF2B5EF4-FFF2-40B4-BE49-F238E27FC236}">
+                <a16:creationId xmlns:a16="http://schemas.microsoft.com/office/drawing/2014/main" id="{C4AC6C9D-920D-BEA8-F549-FF5A9F8A070B}"/>
+              </a:ext>
+            </a:extLst>
+          </p:cNvPr>
+          <p:cNvPicPr>
+            <a:picLocks noChangeAspect="1" noChangeArrowheads="1"/>
+          </p:cNvPicPr>
+          <p:nvPr/>
+        </p:nvPicPr>
+        <p:blipFill rotWithShape="1">
+          <a:blip r:embed="rId10">
+            <a:alphaModFix/>
+            <a:duotone>
+              <a:prstClr val="black"/>
+              <a:schemeClr val="accent6">
+                <a:lumMod val="40000"/>
+                <a:lumOff val="60000"/>
+                <a:tint val="45000"/>
+                <a:satMod val="400000"/>
+              </a:schemeClr>
+            </a:duotone>
+            <a:extLst>
+              <a:ext uri="{BEBA8EAE-BF5A-486C-A8C5-ECC9F3942E4B}">
+                <a14:imgProps xmlns:a14="http://schemas.microsoft.com/office/drawing/2010/main">
+                  <a14:imgLayer r:embed="rId11">
+                    <a14:imgEffect>
+                      <a14:backgroundRemoval t="36094" b="56875" l="70775" r="89789">
+                        <a14:foregroundMark x1="83398" y1="36518" x2="84390" y2="36406"/>
+                        <a14:foregroundMark x1="78873" y1="37031" x2="79385" y2="36973"/>
+                        <a14:foregroundMark x1="84390" y1="36406" x2="90023" y2="37500"/>
+                        <a14:foregroundMark x1="90023" y1="37500" x2="88732" y2="52344"/>
+                        <a14:foregroundMark x1="88732" y1="52344" x2="78987" y2="56524"/>
+                        <a14:foregroundMark x1="77013" y1="56515" x2="72653" y2="55156"/>
+                        <a14:foregroundMark x1="72653" y1="55156" x2="71831" y2="49375"/>
+                        <a14:foregroundMark x1="83685" y1="36094" x2="87559" y2="36250"/>
+                        <a14:foregroundMark x1="87911" y1="36719" x2="89789" y2="43906"/>
+                        <a14:foregroundMark x1="89789" y1="43906" x2="88732" y2="43906"/>
+                        <a14:backgroundMark x1="79577" y1="36563" x2="83451" y2="36406"/>
+                        <a14:backgroundMark x1="77934" y1="57813" x2="77934" y2="57813"/>
+                        <a14:backgroundMark x1="78052" y1="57500" x2="78638" y2="57344"/>
+                        <a14:backgroundMark x1="78052" y1="57500" x2="78052" y2="57500"/>
+                        <a14:backgroundMark x1="78052" y1="57500" x2="77700" y2="57656"/>
+                        <a14:backgroundMark x1="78169" y1="57813" x2="78052" y2="57500"/>
+                        <a14:backgroundMark x1="78052" y1="57344" x2="78052" y2="57344"/>
+                        <a14:backgroundMark x1="78286" y1="57813" x2="77934" y2="57656"/>
+                        <a14:backgroundMark x1="78169" y1="57188" x2="77700" y2="57344"/>
+                      </a14:backgroundRemoval>
+                    </a14:imgEffect>
+                    <a14:imgEffect>
+                      <a14:brightnessContrast bright="20000"/>
+                    </a14:imgEffect>
+                  </a14:imgLayer>
+                </a14:imgProps>
+              </a:ext>
+              <a:ext uri="{28A0092B-C50C-407E-A947-70E740481C1C}">
+                <a14:useLocalDpi xmlns:a14="http://schemas.microsoft.com/office/drawing/2010/main" val="0"/>
+              </a:ext>
+            </a:extLst>
+          </a:blip>
+          <a:srcRect l="68759" t="35021" r="9163" b="41374"/>
+          <a:stretch>
+            <a:fillRect/>
+          </a:stretch>
+        </p:blipFill>
+        <p:spPr bwMode="auto">
+          <a:xfrm>
+            <a:off x="4333577" y="4049467"/>
+            <a:ext cx="1168867" cy="938727"/>
+          </a:xfrm>
+          <a:prstGeom prst="rect">
+            <a:avLst/>
+          </a:prstGeom>
+          <a:noFill/>
+          <a:extLst>
+            <a:ext uri="{909E8E84-426E-40DD-AFC4-6F175D3DCCD1}">
+              <a14:hiddenFill xmlns:a14="http://schemas.microsoft.com/office/drawing/2010/main">
+                <a:solidFill>
+                  <a:srgbClr val="FFFFFF"/>
+                </a:solidFill>
+              </a14:hiddenFill>
+            </a:ext>
+          </a:extLst>
+        </p:spPr>
+      </p:pic>
+      <p:pic>
+        <p:nvPicPr>
+          <p:cNvPr id="54" name="Picture 4">
+            <a:extLst>
+              <a:ext uri="{FF2B5EF4-FFF2-40B4-BE49-F238E27FC236}">
+                <a16:creationId xmlns:a16="http://schemas.microsoft.com/office/drawing/2014/main" id="{559C3ED2-9BF4-8384-0090-FED13B4EC30B}"/>
+              </a:ext>
+            </a:extLst>
+          </p:cNvPr>
+          <p:cNvPicPr>
+            <a:picLocks noChangeAspect="1" noChangeArrowheads="1"/>
+          </p:cNvPicPr>
+          <p:nvPr/>
+        </p:nvPicPr>
+        <p:blipFill rotWithShape="1">
+          <a:blip r:embed="rId12">
+            <a:duotone>
+              <a:prstClr val="black"/>
+              <a:schemeClr val="accent6">
+                <a:lumMod val="40000"/>
+                <a:lumOff val="60000"/>
+                <a:tint val="45000"/>
+                <a:satMod val="400000"/>
+              </a:schemeClr>
+            </a:duotone>
+            <a:extLst>
+              <a:ext uri="{BEBA8EAE-BF5A-486C-A8C5-ECC9F3942E4B}">
+                <a14:imgProps xmlns:a14="http://schemas.microsoft.com/office/drawing/2010/main">
+                  <a14:imgLayer r:embed="rId13">
+                    <a14:imgEffect>
+                      <a14:backgroundRemoval t="65625" b="96250" l="32512" r="54343">
+                        <a14:foregroundMark x1="32512" y1="77813" x2="33216" y2="74063"/>
+                        <a14:foregroundMark x1="41784" y1="68594" x2="47066" y2="67969"/>
+                        <a14:foregroundMark x1="41315" y1="65781" x2="43192" y2="66250"/>
+                        <a14:foregroundMark x1="54343" y1="78125" x2="54343" y2="78125"/>
+                        <a14:backgroundMark x1="54577" y1="72344" x2="54108" y2="71719"/>
+                      </a14:backgroundRemoval>
+                    </a14:imgEffect>
+                    <a14:imgEffect>
+                      <a14:brightnessContrast bright="20000"/>
+                    </a14:imgEffect>
+                  </a14:imgLayer>
+                </a14:imgProps>
+              </a:ext>
+              <a:ext uri="{28A0092B-C50C-407E-A947-70E740481C1C}">
+                <a14:useLocalDpi xmlns:a14="http://schemas.microsoft.com/office/drawing/2010/main" val="0"/>
+              </a:ext>
+            </a:extLst>
+          </a:blip>
+          <a:srcRect l="30337" t="64817" r="43811"/>
+          <a:stretch>
+            <a:fillRect/>
+          </a:stretch>
+        </p:blipFill>
+        <p:spPr bwMode="auto">
+          <a:xfrm>
+            <a:off x="2295197" y="5228572"/>
+            <a:ext cx="1368664" cy="1399173"/>
+          </a:xfrm>
+          <a:prstGeom prst="rect">
+            <a:avLst/>
+          </a:prstGeom>
+          <a:noFill/>
+          <a:extLst>
+            <a:ext uri="{909E8E84-426E-40DD-AFC4-6F175D3DCCD1}">
+              <a14:hiddenFill xmlns:a14="http://schemas.microsoft.com/office/drawing/2010/main">
+                <a:solidFill>
+                  <a:srgbClr val="FFFFFF"/>
+                </a:solidFill>
+              </a14:hiddenFill>
+            </a:ext>
+          </a:extLst>
+        </p:spPr>
+      </p:pic>
       <p:grpSp>
         <p:nvGrpSpPr>
-          <p:cNvPr id="31" name="Group 30">
+          <p:cNvPr id="33" name="Group 32">
             <a:extLst>
               <a:ext uri="{FF2B5EF4-FFF2-40B4-BE49-F238E27FC236}">
-                <a16:creationId xmlns:a16="http://schemas.microsoft.com/office/drawing/2014/main" id="{2F3C2BDE-D641-77A7-B487-5B55D25A953F}"/>
+                <a16:creationId xmlns:a16="http://schemas.microsoft.com/office/drawing/2014/main" id="{731D8716-A697-8A1E-347D-61F2D6A8FD5D}"/>
               </a:ext>
             </a:extLst>
           </p:cNvPr>
@@ -25072,745 +25371,444 @@
         </p:nvGrpSpPr>
         <p:grpSpPr>
           <a:xfrm>
-            <a:off x="366105" y="2868826"/>
-            <a:ext cx="6143806" cy="3869905"/>
-            <a:chOff x="336001" y="3031639"/>
-            <a:chExt cx="5995283" cy="3776352"/>
+            <a:off x="5443220" y="4243723"/>
+            <a:ext cx="1066691" cy="985850"/>
+            <a:chOff x="5332830" y="4387474"/>
+            <a:chExt cx="1040904" cy="962018"/>
           </a:xfrm>
         </p:grpSpPr>
-        <p:grpSp>
-          <p:nvGrpSpPr>
-            <p:cNvPr id="32" name="Group 31">
+        <p:pic>
+          <p:nvPicPr>
+            <p:cNvPr id="49" name="Picture 5">
               <a:extLst>
                 <a:ext uri="{FF2B5EF4-FFF2-40B4-BE49-F238E27FC236}">
-                  <a16:creationId xmlns:a16="http://schemas.microsoft.com/office/drawing/2014/main" id="{A86DDB91-8645-946E-615C-71EB1C3CC340}"/>
+                  <a16:creationId xmlns:a16="http://schemas.microsoft.com/office/drawing/2014/main" id="{A7D501B2-6705-DF49-171E-A018ED309F8C}"/>
                 </a:ext>
               </a:extLst>
             </p:cNvPr>
-            <p:cNvGrpSpPr/>
+            <p:cNvPicPr>
+              <a:picLocks noChangeAspect="1" noChangeArrowheads="1"/>
+            </p:cNvPicPr>
             <p:nvPr/>
-          </p:nvGrpSpPr>
-          <p:grpSpPr>
-            <a:xfrm>
-              <a:off x="651995" y="3031639"/>
-              <a:ext cx="5166273" cy="3672554"/>
-              <a:chOff x="1288029" y="1248053"/>
-              <a:chExt cx="8595100" cy="6110010"/>
-            </a:xfrm>
-          </p:grpSpPr>
-          <p:pic>
-            <p:nvPicPr>
-              <p:cNvPr id="51" name="Picture 2">
-                <a:extLst>
-                  <a:ext uri="{FF2B5EF4-FFF2-40B4-BE49-F238E27FC236}">
-                    <a16:creationId xmlns:a16="http://schemas.microsoft.com/office/drawing/2014/main" id="{090AD3AA-827F-5E3B-35F4-C40CA89B0998}"/>
-                  </a:ext>
-                </a:extLst>
-              </p:cNvPr>
-              <p:cNvPicPr>
-                <a:picLocks noChangeAspect="1" noChangeArrowheads="1"/>
-              </p:cNvPicPr>
-              <p:nvPr/>
-            </p:nvPicPr>
-            <p:blipFill rotWithShape="1">
-              <a:blip r:embed="rId6">
-                <a:alphaModFix/>
-                <a:grayscl/>
-                <a:extLst>
-                  <a:ext uri="{BEBA8EAE-BF5A-486C-A8C5-ECC9F3942E4B}">
-                    <a14:imgProps xmlns:a14="http://schemas.microsoft.com/office/drawing/2010/main">
-                      <a14:imgLayer r:embed="rId7">
-                        <a14:imgEffect>
-                          <a14:saturation sat="0"/>
-                        </a14:imgEffect>
-                      </a14:imgLayer>
-                    </a14:imgProps>
-                  </a:ext>
-                  <a:ext uri="{28A0092B-C50C-407E-A947-70E740481C1C}">
-                    <a14:useLocalDpi xmlns:a14="http://schemas.microsoft.com/office/drawing/2010/main" val="0"/>
-                  </a:ext>
-                </a:extLst>
-              </a:blip>
-              <a:srcRect t="5365"/>
-              <a:stretch>
-                <a:fillRect/>
-              </a:stretch>
-            </p:blipFill>
-            <p:spPr bwMode="auto">
-              <a:xfrm>
-                <a:off x="1288029" y="1248053"/>
-                <a:ext cx="8595100" cy="6110010"/>
-              </a:xfrm>
-              <a:prstGeom prst="rect">
-                <a:avLst/>
-              </a:prstGeom>
-              <a:noFill/>
+          </p:nvPicPr>
+          <p:blipFill rotWithShape="1">
+            <a:blip r:embed="rId3">
               <a:extLst>
-                <a:ext uri="{909E8E84-426E-40DD-AFC4-6F175D3DCCD1}">
-                  <a14:hiddenFill xmlns:a14="http://schemas.microsoft.com/office/drawing/2010/main">
-                    <a:solidFill>
-                      <a:srgbClr val="FFFFFF"/>
-                    </a:solidFill>
-                  </a14:hiddenFill>
+                <a:ext uri="{28A0092B-C50C-407E-A947-70E740481C1C}">
+                  <a14:useLocalDpi xmlns:a14="http://schemas.microsoft.com/office/drawing/2010/main" val="0"/>
                 </a:ext>
               </a:extLst>
-            </p:spPr>
-          </p:pic>
-          <p:pic>
-            <p:nvPicPr>
-              <p:cNvPr id="52" name="Picture 4">
-                <a:extLst>
-                  <a:ext uri="{FF2B5EF4-FFF2-40B4-BE49-F238E27FC236}">
-                    <a16:creationId xmlns:a16="http://schemas.microsoft.com/office/drawing/2014/main" id="{486C646E-5E27-B5CD-8934-94ED5B3DEA12}"/>
-                  </a:ext>
-                </a:extLst>
-              </p:cNvPr>
-              <p:cNvPicPr>
-                <a:picLocks noChangeAspect="1" noChangeArrowheads="1"/>
-              </p:cNvPicPr>
-              <p:nvPr/>
-            </p:nvPicPr>
-            <p:blipFill rotWithShape="1">
-              <a:blip r:embed="rId8">
-                <a:extLst>
-                  <a:ext uri="{BEBA8EAE-BF5A-486C-A8C5-ECC9F3942E4B}">
-                    <a14:imgProps xmlns:a14="http://schemas.microsoft.com/office/drawing/2010/main">
-                      <a14:imgLayer r:embed="rId9">
-                        <a14:imgEffect>
-                          <a14:backgroundRemoval t="32813" b="65938" l="1526" r="16315">
-                            <a14:foregroundMark x1="2347" y1="35313" x2="4930" y2="34688"/>
-                            <a14:foregroundMark x1="9038" y1="63438" x2="13850" y2="67188"/>
-                            <a14:foregroundMark x1="13850" y1="67188" x2="16315" y2="60625"/>
-                            <a14:foregroundMark x1="16315" y1="60625" x2="15258" y2="57969"/>
-                            <a14:foregroundMark x1="9859" y1="65781" x2="15141" y2="65938"/>
-                            <a14:foregroundMark x1="3052" y1="33125" x2="4108" y2="32813"/>
-                          </a14:backgroundRemoval>
-                        </a14:imgEffect>
-                      </a14:imgLayer>
-                    </a14:imgProps>
-                  </a:ext>
-                  <a:ext uri="{28A0092B-C50C-407E-A947-70E740481C1C}">
-                    <a14:useLocalDpi xmlns:a14="http://schemas.microsoft.com/office/drawing/2010/main" val="0"/>
-                  </a:ext>
-                </a:extLst>
-              </a:blip>
-              <a:srcRect t="30786" r="83068" b="31542"/>
-              <a:stretch>
-                <a:fillRect/>
-              </a:stretch>
-            </p:blipFill>
-            <p:spPr bwMode="auto">
-              <a:xfrm>
-                <a:off x="1288029" y="2884172"/>
-                <a:ext cx="1455370" cy="2432304"/>
-              </a:xfrm>
-              <a:prstGeom prst="rect">
-                <a:avLst/>
-              </a:prstGeom>
-              <a:noFill/>
-              <a:extLst>
-                <a:ext uri="{909E8E84-426E-40DD-AFC4-6F175D3DCCD1}">
-                  <a14:hiddenFill xmlns:a14="http://schemas.microsoft.com/office/drawing/2010/main">
-                    <a:solidFill>
-                      <a:srgbClr val="FFFFFF"/>
-                    </a:solidFill>
-                  </a14:hiddenFill>
-                </a:ext>
-              </a:extLst>
-            </p:spPr>
-          </p:pic>
-          <p:pic>
-            <p:nvPicPr>
-              <p:cNvPr id="53" name="Picture 4">
-                <a:extLst>
-                  <a:ext uri="{FF2B5EF4-FFF2-40B4-BE49-F238E27FC236}">
-                    <a16:creationId xmlns:a16="http://schemas.microsoft.com/office/drawing/2014/main" id="{C4AC6C9D-920D-BEA8-F549-FF5A9F8A070B}"/>
-                  </a:ext>
-                </a:extLst>
-              </p:cNvPr>
-              <p:cNvPicPr>
-                <a:picLocks noChangeAspect="1" noChangeArrowheads="1"/>
-              </p:cNvPicPr>
-              <p:nvPr/>
-            </p:nvPicPr>
-            <p:blipFill rotWithShape="1">
-              <a:blip r:embed="rId10">
-                <a:extLst>
-                  <a:ext uri="{BEBA8EAE-BF5A-486C-A8C5-ECC9F3942E4B}">
-                    <a14:imgProps xmlns:a14="http://schemas.microsoft.com/office/drawing/2010/main">
-                      <a14:imgLayer r:embed="rId11">
-                        <a14:imgEffect>
-                          <a14:backgroundRemoval t="36094" b="56875" l="70775" r="89789">
-                            <a14:foregroundMark x1="83398" y1="36518" x2="84390" y2="36406"/>
-                            <a14:foregroundMark x1="78873" y1="37031" x2="79385" y2="36973"/>
-                            <a14:foregroundMark x1="84390" y1="36406" x2="90023" y2="37500"/>
-                            <a14:foregroundMark x1="90023" y1="37500" x2="88732" y2="52344"/>
-                            <a14:foregroundMark x1="88732" y1="52344" x2="78987" y2="56524"/>
-                            <a14:foregroundMark x1="77013" y1="56515" x2="72653" y2="55156"/>
-                            <a14:foregroundMark x1="72653" y1="55156" x2="71831" y2="49375"/>
-                            <a14:foregroundMark x1="83685" y1="36094" x2="87559" y2="36250"/>
-                            <a14:foregroundMark x1="87911" y1="36719" x2="89789" y2="43906"/>
-                            <a14:foregroundMark x1="89789" y1="43906" x2="88732" y2="43906"/>
-                            <a14:backgroundMark x1="79577" y1="36563" x2="83451" y2="36406"/>
-                            <a14:backgroundMark x1="77934" y1="57813" x2="77934" y2="57813"/>
-                            <a14:backgroundMark x1="78052" y1="57500" x2="78638" y2="57344"/>
-                            <a14:backgroundMark x1="78052" y1="57500" x2="78052" y2="57500"/>
-                            <a14:backgroundMark x1="78052" y1="57500" x2="77700" y2="57656"/>
-                            <a14:backgroundMark x1="78169" y1="57813" x2="78052" y2="57500"/>
-                            <a14:backgroundMark x1="78052" y1="57344" x2="78052" y2="57344"/>
-                            <a14:backgroundMark x1="78286" y1="57813" x2="77934" y2="57656"/>
-                            <a14:backgroundMark x1="78169" y1="57188" x2="77700" y2="57344"/>
-                          </a14:backgroundRemoval>
-                        </a14:imgEffect>
-                      </a14:imgLayer>
-                    </a14:imgProps>
-                  </a:ext>
-                  <a:ext uri="{28A0092B-C50C-407E-A947-70E740481C1C}">
-                    <a14:useLocalDpi xmlns:a14="http://schemas.microsoft.com/office/drawing/2010/main" val="0"/>
-                  </a:ext>
-                </a:extLst>
-              </a:blip>
-              <a:srcRect l="68759" t="35021" r="9163" b="41374"/>
-              <a:stretch>
-                <a:fillRect/>
-              </a:stretch>
-            </p:blipFill>
-            <p:spPr bwMode="auto">
-              <a:xfrm>
-                <a:off x="7203406" y="3164796"/>
-                <a:ext cx="1897627" cy="1524000"/>
-              </a:xfrm>
-              <a:prstGeom prst="rect">
-                <a:avLst/>
-              </a:prstGeom>
-              <a:noFill/>
-              <a:extLst>
-                <a:ext uri="{909E8E84-426E-40DD-AFC4-6F175D3DCCD1}">
-                  <a14:hiddenFill xmlns:a14="http://schemas.microsoft.com/office/drawing/2010/main">
-                    <a:solidFill>
-                      <a:srgbClr val="FFFFFF"/>
-                    </a:solidFill>
-                  </a14:hiddenFill>
-                </a:ext>
-              </a:extLst>
-            </p:spPr>
-          </p:pic>
-          <p:pic>
-            <p:nvPicPr>
-              <p:cNvPr id="54" name="Picture 4">
-                <a:extLst>
-                  <a:ext uri="{FF2B5EF4-FFF2-40B4-BE49-F238E27FC236}">
-                    <a16:creationId xmlns:a16="http://schemas.microsoft.com/office/drawing/2014/main" id="{559C3ED2-9BF4-8384-0090-FED13B4EC30B}"/>
-                  </a:ext>
-                </a:extLst>
-              </p:cNvPr>
-              <p:cNvPicPr>
-                <a:picLocks noChangeAspect="1" noChangeArrowheads="1"/>
-              </p:cNvPicPr>
-              <p:nvPr/>
-            </p:nvPicPr>
-            <p:blipFill rotWithShape="1">
-              <a:blip r:embed="rId12">
-                <a:extLst>
-                  <a:ext uri="{BEBA8EAE-BF5A-486C-A8C5-ECC9F3942E4B}">
-                    <a14:imgProps xmlns:a14="http://schemas.microsoft.com/office/drawing/2010/main">
-                      <a14:imgLayer r:embed="rId13">
-                        <a14:imgEffect>
-                          <a14:backgroundRemoval t="65625" b="96250" l="32512" r="54343">
-                            <a14:foregroundMark x1="32512" y1="77813" x2="33216" y2="74063"/>
-                            <a14:foregroundMark x1="41784" y1="68594" x2="47066" y2="67969"/>
-                            <a14:foregroundMark x1="41315" y1="65781" x2="43192" y2="66250"/>
-                            <a14:foregroundMark x1="54343" y1="78125" x2="54343" y2="78125"/>
-                            <a14:backgroundMark x1="54577" y1="72344" x2="54108" y2="71719"/>
-                          </a14:backgroundRemoval>
-                        </a14:imgEffect>
-                      </a14:imgLayer>
-                    </a14:imgProps>
-                  </a:ext>
-                  <a:ext uri="{28A0092B-C50C-407E-A947-70E740481C1C}">
-                    <a14:useLocalDpi xmlns:a14="http://schemas.microsoft.com/office/drawing/2010/main" val="0"/>
-                  </a:ext>
-                </a:extLst>
-              </a:blip>
-              <a:srcRect l="30337" t="64817" r="43811"/>
-              <a:stretch>
-                <a:fillRect/>
-              </a:stretch>
-            </p:blipFill>
-            <p:spPr bwMode="auto">
-              <a:xfrm>
-                <a:off x="3894145" y="5079044"/>
-                <a:ext cx="2221992" cy="2271524"/>
-              </a:xfrm>
-              <a:prstGeom prst="rect">
-                <a:avLst/>
-              </a:prstGeom>
-              <a:noFill/>
-              <a:extLst>
-                <a:ext uri="{909E8E84-426E-40DD-AFC4-6F175D3DCCD1}">
-                  <a14:hiddenFill xmlns:a14="http://schemas.microsoft.com/office/drawing/2010/main">
-                    <a:solidFill>
-                      <a:srgbClr val="FFFFFF"/>
-                    </a:solidFill>
-                  </a14:hiddenFill>
-                </a:ext>
-              </a:extLst>
-            </p:spPr>
-          </p:pic>
-        </p:grpSp>
-        <p:grpSp>
-          <p:nvGrpSpPr>
-            <p:cNvPr id="33" name="Group 32">
+            </a:blip>
+            <a:srcRect l="8887" t="17100" r="9473" b="15159"/>
+            <a:stretch>
+              <a:fillRect/>
+            </a:stretch>
+          </p:blipFill>
+          <p:spPr bwMode="auto">
+            <a:xfrm>
+              <a:off x="5332830" y="4484157"/>
+              <a:ext cx="1040904" cy="865335"/>
+            </a:xfrm>
+            <a:prstGeom prst="rect">
+              <a:avLst/>
+            </a:prstGeom>
+            <a:noFill/>
+            <a:extLst>
+              <a:ext uri="{909E8E84-426E-40DD-AFC4-6F175D3DCCD1}">
+                <a14:hiddenFill xmlns:a14="http://schemas.microsoft.com/office/drawing/2010/main">
+                  <a:solidFill>
+                    <a:srgbClr val="FFFFFF"/>
+                  </a:solidFill>
+                </a14:hiddenFill>
+              </a:ext>
+            </a:extLst>
+          </p:spPr>
+        </p:pic>
+        <p:pic>
+          <p:nvPicPr>
+            <p:cNvPr id="50" name="Picture 2" descr="solar energy icon logo vector illustration. solar panels symbol ...">
               <a:extLst>
                 <a:ext uri="{FF2B5EF4-FFF2-40B4-BE49-F238E27FC236}">
-                  <a16:creationId xmlns:a16="http://schemas.microsoft.com/office/drawing/2014/main" id="{731D8716-A697-8A1E-347D-61F2D6A8FD5D}"/>
+                  <a16:creationId xmlns:a16="http://schemas.microsoft.com/office/drawing/2014/main" id="{5328724F-5CD4-C8AB-7321-A0B3CB3E3EDB}"/>
                 </a:ext>
               </a:extLst>
             </p:cNvPr>
-            <p:cNvGrpSpPr/>
+            <p:cNvPicPr>
+              <a:picLocks noChangeAspect="1" noChangeArrowheads="1"/>
+            </p:cNvPicPr>
             <p:nvPr/>
-          </p:nvGrpSpPr>
-          <p:grpSpPr>
-            <a:xfrm>
-              <a:off x="5290380" y="4373299"/>
-              <a:ext cx="1040904" cy="962018"/>
-              <a:chOff x="5332830" y="4387474"/>
-              <a:chExt cx="1040904" cy="962018"/>
-            </a:xfrm>
-          </p:grpSpPr>
-          <p:pic>
-            <p:nvPicPr>
-              <p:cNvPr id="49" name="Picture 5">
-                <a:extLst>
-                  <a:ext uri="{FF2B5EF4-FFF2-40B4-BE49-F238E27FC236}">
-                    <a16:creationId xmlns:a16="http://schemas.microsoft.com/office/drawing/2014/main" id="{A7D501B2-6705-DF49-171E-A018ED309F8C}"/>
-                  </a:ext>
-                </a:extLst>
-              </p:cNvPr>
-              <p:cNvPicPr>
-                <a:picLocks noChangeAspect="1" noChangeArrowheads="1"/>
-              </p:cNvPicPr>
-              <p:nvPr/>
-            </p:nvPicPr>
-            <p:blipFill rotWithShape="1">
-              <a:blip r:embed="rId3">
-                <a:extLst>
-                  <a:ext uri="{28A0092B-C50C-407E-A947-70E740481C1C}">
-                    <a14:useLocalDpi xmlns:a14="http://schemas.microsoft.com/office/drawing/2010/main" val="0"/>
-                  </a:ext>
-                </a:extLst>
-              </a:blip>
-              <a:srcRect l="8887" t="17100" r="9473" b="15159"/>
-              <a:stretch>
-                <a:fillRect/>
-              </a:stretch>
-            </p:blipFill>
-            <p:spPr bwMode="auto">
-              <a:xfrm>
-                <a:off x="5332830" y="4484157"/>
-                <a:ext cx="1040904" cy="865335"/>
-              </a:xfrm>
-              <a:prstGeom prst="rect">
-                <a:avLst/>
-              </a:prstGeom>
-              <a:noFill/>
+          </p:nvPicPr>
+          <p:blipFill rotWithShape="1">
+            <a:blip r:embed="rId14">
+              <a:biLevel thresh="50000"/>
               <a:extLst>
-                <a:ext uri="{909E8E84-426E-40DD-AFC4-6F175D3DCCD1}">
-                  <a14:hiddenFill xmlns:a14="http://schemas.microsoft.com/office/drawing/2010/main">
-                    <a:solidFill>
-                      <a:srgbClr val="FFFFFF"/>
-                    </a:solidFill>
-                  </a14:hiddenFill>
+                <a:ext uri="{BEBA8EAE-BF5A-486C-A8C5-ECC9F3942E4B}">
+                  <a14:imgProps xmlns:a14="http://schemas.microsoft.com/office/drawing/2010/main">
+                    <a14:imgLayer r:embed="rId15">
+                      <a14:imgEffect>
+                        <a14:backgroundRemoval t="26458" b="73646" l="21250" r="78750">
+                          <a14:foregroundMark x1="54896" y1="53021" x2="54896" y2="53021"/>
+                          <a14:foregroundMark x1="71146" y1="53542" x2="71146" y2="53542"/>
+                          <a14:foregroundMark x1="64063" y1="70052" x2="64063" y2="70052"/>
+                          <a14:foregroundMark x1="47813" y1="69531" x2="47813" y2="69531"/>
+                          <a14:foregroundMark x1="34115" y1="68229" x2="34115" y2="68229"/>
+                          <a14:foregroundMark x1="33854" y1="40417" x2="33854" y2="40417"/>
+                          <a14:foregroundMark x1="43594" y1="32240" x2="43594" y2="32240"/>
+                          <a14:foregroundMark x1="48333" y1="40938" x2="48333" y2="40938"/>
+                          <a14:foregroundMark x1="23906" y1="51406" x2="23906" y2="51406"/>
+                          <a14:foregroundMark x1="21250" y1="41198" x2="21250" y2="41198"/>
+                          <a14:foregroundMark x1="24948" y1="31979" x2="24948" y2="31979"/>
+                          <a14:foregroundMark x1="34115" y1="26979" x2="34115" y2="26979"/>
+                          <a14:foregroundMark x1="39896" y1="50625" x2="39896" y2="50625"/>
+                          <a14:foregroundMark x1="33854" y1="26458" x2="33854" y2="26458"/>
+                          <a14:foregroundMark x1="34688" y1="28698" x2="34688" y2="28698"/>
+                          <a14:foregroundMark x1="25625" y1="32396" x2="25625" y2="32396"/>
+                          <a14:foregroundMark x1="26042" y1="32292" x2="26042" y2="32292"/>
+                          <a14:foregroundMark x1="24896" y1="50938" x2="24896" y2="50938"/>
+                          <a14:foregroundMark x1="24896" y1="50938" x2="24896" y2="50938"/>
+                          <a14:foregroundMark x1="34688" y1="28073" x2="34688" y2="28073"/>
+                          <a14:foregroundMark x1="34792" y1="29427" x2="34792" y2="29427"/>
+                          <a14:foregroundMark x1="24479" y1="30573" x2="24479" y2="30573"/>
+                        </a14:backgroundRemoval>
+                      </a14:imgEffect>
+                      <a14:imgEffect>
+                        <a14:saturation sat="0"/>
+                      </a14:imgEffect>
+                    </a14:imgLayer>
+                  </a14:imgProps>
+                </a:ext>
+                <a:ext uri="{28A0092B-C50C-407E-A947-70E740481C1C}">
+                  <a14:useLocalDpi xmlns:a14="http://schemas.microsoft.com/office/drawing/2010/main" val="0"/>
                 </a:ext>
               </a:extLst>
-            </p:spPr>
-          </p:pic>
-          <p:pic>
-            <p:nvPicPr>
-              <p:cNvPr id="50" name="Picture 2" descr="solar energy icon logo vector illustration. solar panels symbol ...">
-                <a:extLst>
-                  <a:ext uri="{FF2B5EF4-FFF2-40B4-BE49-F238E27FC236}">
-                    <a16:creationId xmlns:a16="http://schemas.microsoft.com/office/drawing/2014/main" id="{5328724F-5CD4-C8AB-7321-A0B3CB3E3EDB}"/>
-                  </a:ext>
-                </a:extLst>
-              </p:cNvPr>
-              <p:cNvPicPr>
-                <a:picLocks noChangeAspect="1" noChangeArrowheads="1"/>
-              </p:cNvPicPr>
-              <p:nvPr/>
-            </p:nvPicPr>
-            <p:blipFill rotWithShape="1">
-              <a:blip r:embed="rId14">
-                <a:biLevel thresh="50000"/>
-                <a:extLst>
-                  <a:ext uri="{BEBA8EAE-BF5A-486C-A8C5-ECC9F3942E4B}">
-                    <a14:imgProps xmlns:a14="http://schemas.microsoft.com/office/drawing/2010/main">
-                      <a14:imgLayer r:embed="rId15">
-                        <a14:imgEffect>
-                          <a14:backgroundRemoval t="26458" b="73646" l="21250" r="78750">
-                            <a14:foregroundMark x1="54896" y1="53021" x2="54896" y2="53021"/>
-                            <a14:foregroundMark x1="71146" y1="53542" x2="71146" y2="53542"/>
-                            <a14:foregroundMark x1="64063" y1="70052" x2="64063" y2="70052"/>
-                            <a14:foregroundMark x1="47813" y1="69531" x2="47813" y2="69531"/>
-                            <a14:foregroundMark x1="34115" y1="68229" x2="34115" y2="68229"/>
-                            <a14:foregroundMark x1="33854" y1="40417" x2="33854" y2="40417"/>
-                            <a14:foregroundMark x1="43594" y1="32240" x2="43594" y2="32240"/>
-                            <a14:foregroundMark x1="48333" y1="40938" x2="48333" y2="40938"/>
-                            <a14:foregroundMark x1="23906" y1="51406" x2="23906" y2="51406"/>
-                            <a14:foregroundMark x1="21250" y1="41198" x2="21250" y2="41198"/>
-                            <a14:foregroundMark x1="24948" y1="31979" x2="24948" y2="31979"/>
-                            <a14:foregroundMark x1="34115" y1="26979" x2="34115" y2="26979"/>
-                            <a14:foregroundMark x1="39896" y1="50625" x2="39896" y2="50625"/>
-                            <a14:foregroundMark x1="33854" y1="26458" x2="33854" y2="26458"/>
-                            <a14:foregroundMark x1="34688" y1="28698" x2="34688" y2="28698"/>
-                            <a14:foregroundMark x1="25625" y1="32396" x2="25625" y2="32396"/>
-                            <a14:foregroundMark x1="26042" y1="32292" x2="26042" y2="32292"/>
-                            <a14:foregroundMark x1="24896" y1="50938" x2="24896" y2="50938"/>
-                            <a14:foregroundMark x1="24896" y1="50938" x2="24896" y2="50938"/>
-                            <a14:foregroundMark x1="34688" y1="28073" x2="34688" y2="28073"/>
-                            <a14:foregroundMark x1="34792" y1="29427" x2="34792" y2="29427"/>
-                            <a14:foregroundMark x1="24479" y1="30573" x2="24479" y2="30573"/>
-                          </a14:backgroundRemoval>
-                        </a14:imgEffect>
-                        <a14:imgEffect>
-                          <a14:saturation sat="0"/>
-                        </a14:imgEffect>
-                      </a14:imgLayer>
-                    </a14:imgProps>
-                  </a:ext>
-                  <a:ext uri="{28A0092B-C50C-407E-A947-70E740481C1C}">
-                    <a14:useLocalDpi xmlns:a14="http://schemas.microsoft.com/office/drawing/2010/main" val="0"/>
-                  </a:ext>
-                </a:extLst>
-              </a:blip>
-              <a:srcRect l="14807" t="21993" r="14052" b="20615"/>
-              <a:stretch>
-                <a:fillRect/>
-              </a:stretch>
-            </p:blipFill>
-            <p:spPr bwMode="auto">
-              <a:xfrm>
-                <a:off x="5370924" y="4387474"/>
-                <a:ext cx="507750" cy="409620"/>
-              </a:xfrm>
-              <a:prstGeom prst="rect">
-                <a:avLst/>
-              </a:prstGeom>
-              <a:noFill/>
-              <a:extLst>
-                <a:ext uri="{909E8E84-426E-40DD-AFC4-6F175D3DCCD1}">
-                  <a14:hiddenFill xmlns:a14="http://schemas.microsoft.com/office/drawing/2010/main">
-                    <a:solidFill>
-                      <a:srgbClr val="FFFFFF"/>
-                    </a:solidFill>
-                  </a14:hiddenFill>
-                </a:ext>
-              </a:extLst>
-            </p:spPr>
-          </p:pic>
-        </p:grpSp>
-        <p:grpSp>
-          <p:nvGrpSpPr>
-            <p:cNvPr id="36" name="Group 35">
+            </a:blip>
+            <a:srcRect l="14807" t="21993" r="14052" b="20615"/>
+            <a:stretch>
+              <a:fillRect/>
+            </a:stretch>
+          </p:blipFill>
+          <p:spPr bwMode="auto">
+            <a:xfrm>
+              <a:off x="5370924" y="4387474"/>
+              <a:ext cx="507750" cy="409620"/>
+            </a:xfrm>
+            <a:prstGeom prst="rect">
+              <a:avLst/>
+            </a:prstGeom>
+            <a:noFill/>
+            <a:extLst>
+              <a:ext uri="{909E8E84-426E-40DD-AFC4-6F175D3DCCD1}">
+                <a14:hiddenFill xmlns:a14="http://schemas.microsoft.com/office/drawing/2010/main">
+                  <a:solidFill>
+                    <a:srgbClr val="FFFFFF"/>
+                  </a:solidFill>
+                </a14:hiddenFill>
+              </a:ext>
+            </a:extLst>
+          </p:spPr>
+        </p:pic>
+      </p:grpSp>
+      <p:grpSp>
+        <p:nvGrpSpPr>
+          <p:cNvPr id="36" name="Group 35">
+            <a:extLst>
+              <a:ext uri="{FF2B5EF4-FFF2-40B4-BE49-F238E27FC236}">
+                <a16:creationId xmlns:a16="http://schemas.microsoft.com/office/drawing/2014/main" id="{7D1CAB4D-F681-0D40-FDF8-981C0AE9BC9A}"/>
+              </a:ext>
+            </a:extLst>
+          </p:cNvPr>
+          <p:cNvGrpSpPr/>
+          <p:nvPr/>
+        </p:nvGrpSpPr>
+        <p:grpSpPr>
+          <a:xfrm>
+            <a:off x="366105" y="4750594"/>
+            <a:ext cx="1066691" cy="985850"/>
+            <a:chOff x="5332830" y="4387474"/>
+            <a:chExt cx="1040904" cy="962018"/>
+          </a:xfrm>
+        </p:grpSpPr>
+        <p:pic>
+          <p:nvPicPr>
+            <p:cNvPr id="47" name="Picture 5">
               <a:extLst>
                 <a:ext uri="{FF2B5EF4-FFF2-40B4-BE49-F238E27FC236}">
-                  <a16:creationId xmlns:a16="http://schemas.microsoft.com/office/drawing/2014/main" id="{7D1CAB4D-F681-0D40-FDF8-981C0AE9BC9A}"/>
+                  <a16:creationId xmlns:a16="http://schemas.microsoft.com/office/drawing/2014/main" id="{63A4EBF5-A0C5-3B99-1F2C-4E1318591672}"/>
                 </a:ext>
               </a:extLst>
             </p:cNvPr>
-            <p:cNvGrpSpPr/>
+            <p:cNvPicPr>
+              <a:picLocks noChangeAspect="1" noChangeArrowheads="1"/>
+            </p:cNvPicPr>
             <p:nvPr/>
-          </p:nvGrpSpPr>
-          <p:grpSpPr>
-            <a:xfrm>
-              <a:off x="336001" y="4867916"/>
-              <a:ext cx="1040904" cy="962018"/>
-              <a:chOff x="5332830" y="4387474"/>
-              <a:chExt cx="1040904" cy="962018"/>
-            </a:xfrm>
-          </p:grpSpPr>
-          <p:pic>
-            <p:nvPicPr>
-              <p:cNvPr id="47" name="Picture 5">
-                <a:extLst>
-                  <a:ext uri="{FF2B5EF4-FFF2-40B4-BE49-F238E27FC236}">
-                    <a16:creationId xmlns:a16="http://schemas.microsoft.com/office/drawing/2014/main" id="{63A4EBF5-A0C5-3B99-1F2C-4E1318591672}"/>
-                  </a:ext>
-                </a:extLst>
-              </p:cNvPr>
-              <p:cNvPicPr>
-                <a:picLocks noChangeAspect="1" noChangeArrowheads="1"/>
-              </p:cNvPicPr>
-              <p:nvPr/>
-            </p:nvPicPr>
-            <p:blipFill rotWithShape="1">
-              <a:blip r:embed="rId3">
-                <a:extLst>
-                  <a:ext uri="{28A0092B-C50C-407E-A947-70E740481C1C}">
-                    <a14:useLocalDpi xmlns:a14="http://schemas.microsoft.com/office/drawing/2010/main" val="0"/>
-                  </a:ext>
-                </a:extLst>
-              </a:blip>
-              <a:srcRect l="8887" t="17100" r="9473" b="15159"/>
-              <a:stretch>
-                <a:fillRect/>
-              </a:stretch>
-            </p:blipFill>
-            <p:spPr bwMode="auto">
-              <a:xfrm>
-                <a:off x="5332830" y="4484157"/>
-                <a:ext cx="1040904" cy="865335"/>
-              </a:xfrm>
-              <a:prstGeom prst="rect">
-                <a:avLst/>
-              </a:prstGeom>
-              <a:noFill/>
+          </p:nvPicPr>
+          <p:blipFill rotWithShape="1">
+            <a:blip r:embed="rId3">
               <a:extLst>
-                <a:ext uri="{909E8E84-426E-40DD-AFC4-6F175D3DCCD1}">
-                  <a14:hiddenFill xmlns:a14="http://schemas.microsoft.com/office/drawing/2010/main">
-                    <a:solidFill>
-                      <a:srgbClr val="FFFFFF"/>
-                    </a:solidFill>
-                  </a14:hiddenFill>
+                <a:ext uri="{28A0092B-C50C-407E-A947-70E740481C1C}">
+                  <a14:useLocalDpi xmlns:a14="http://schemas.microsoft.com/office/drawing/2010/main" val="0"/>
                 </a:ext>
               </a:extLst>
-            </p:spPr>
-          </p:pic>
-          <p:pic>
-            <p:nvPicPr>
-              <p:cNvPr id="48" name="Picture 2" descr="solar energy icon logo vector illustration. solar panels symbol ...">
-                <a:extLst>
-                  <a:ext uri="{FF2B5EF4-FFF2-40B4-BE49-F238E27FC236}">
-                    <a16:creationId xmlns:a16="http://schemas.microsoft.com/office/drawing/2014/main" id="{D4726B13-CAAB-F6C5-0D20-A53E5DD3AFEB}"/>
-                  </a:ext>
-                </a:extLst>
-              </p:cNvPr>
-              <p:cNvPicPr>
-                <a:picLocks noChangeAspect="1" noChangeArrowheads="1"/>
-              </p:cNvPicPr>
-              <p:nvPr/>
-            </p:nvPicPr>
-            <p:blipFill rotWithShape="1">
-              <a:blip r:embed="rId14">
-                <a:biLevel thresh="25000"/>
-                <a:extLst>
-                  <a:ext uri="{BEBA8EAE-BF5A-486C-A8C5-ECC9F3942E4B}">
-                    <a14:imgProps xmlns:a14="http://schemas.microsoft.com/office/drawing/2010/main">
-                      <a14:imgLayer r:embed="rId5">
-                        <a14:imgEffect>
-                          <a14:backgroundRemoval t="26458" b="73646" l="21250" r="78750">
-                            <a14:foregroundMark x1="54896" y1="53021" x2="54896" y2="53021"/>
-                            <a14:foregroundMark x1="71146" y1="53542" x2="71146" y2="53542"/>
-                            <a14:foregroundMark x1="64063" y1="70052" x2="64063" y2="70052"/>
-                            <a14:foregroundMark x1="47813" y1="69531" x2="47813" y2="69531"/>
-                            <a14:foregroundMark x1="34115" y1="68229" x2="34115" y2="68229"/>
-                            <a14:foregroundMark x1="33854" y1="40417" x2="33854" y2="40417"/>
-                            <a14:foregroundMark x1="43594" y1="32240" x2="43594" y2="32240"/>
-                            <a14:foregroundMark x1="48333" y1="40938" x2="48333" y2="40938"/>
-                            <a14:foregroundMark x1="23906" y1="51406" x2="23906" y2="51406"/>
-                            <a14:foregroundMark x1="21250" y1="41198" x2="21250" y2="41198"/>
-                            <a14:foregroundMark x1="24948" y1="31979" x2="24948" y2="31979"/>
-                            <a14:foregroundMark x1="34115" y1="26979" x2="34115" y2="26979"/>
-                            <a14:foregroundMark x1="39896" y1="50625" x2="39896" y2="50625"/>
-                            <a14:foregroundMark x1="33854" y1="26458" x2="33854" y2="26458"/>
-                            <a14:foregroundMark x1="34688" y1="28698" x2="34688" y2="28698"/>
-                            <a14:foregroundMark x1="25625" y1="32396" x2="25625" y2="32396"/>
-                            <a14:foregroundMark x1="26042" y1="32292" x2="26042" y2="32292"/>
-                            <a14:foregroundMark x1="24896" y1="50938" x2="24896" y2="50938"/>
-                            <a14:foregroundMark x1="24896" y1="50938" x2="24896" y2="50938"/>
-                            <a14:foregroundMark x1="34688" y1="28073" x2="34688" y2="28073"/>
-                            <a14:foregroundMark x1="34792" y1="29427" x2="34792" y2="29427"/>
-                            <a14:foregroundMark x1="24479" y1="30573" x2="24479" y2="30573"/>
-                          </a14:backgroundRemoval>
-                        </a14:imgEffect>
-                        <a14:imgEffect>
-                          <a14:saturation sat="0"/>
-                        </a14:imgEffect>
-                      </a14:imgLayer>
-                    </a14:imgProps>
-                  </a:ext>
-                  <a:ext uri="{28A0092B-C50C-407E-A947-70E740481C1C}">
-                    <a14:useLocalDpi xmlns:a14="http://schemas.microsoft.com/office/drawing/2010/main" val="0"/>
-                  </a:ext>
-                </a:extLst>
-              </a:blip>
-              <a:srcRect l="14807" t="21993" r="14052" b="20615"/>
-              <a:stretch>
-                <a:fillRect/>
-              </a:stretch>
-            </p:blipFill>
-            <p:spPr bwMode="auto">
-              <a:xfrm>
-                <a:off x="5370924" y="4387474"/>
-                <a:ext cx="507750" cy="409620"/>
-              </a:xfrm>
-              <a:prstGeom prst="rect">
-                <a:avLst/>
-              </a:prstGeom>
-              <a:noFill/>
-              <a:extLst>
-                <a:ext uri="{909E8E84-426E-40DD-AFC4-6F175D3DCCD1}">
-                  <a14:hiddenFill xmlns:a14="http://schemas.microsoft.com/office/drawing/2010/main">
-                    <a:solidFill>
-                      <a:srgbClr val="FFFFFF"/>
-                    </a:solidFill>
-                  </a14:hiddenFill>
-                </a:ext>
-              </a:extLst>
-            </p:spPr>
-          </p:pic>
-        </p:grpSp>
-        <p:grpSp>
-          <p:nvGrpSpPr>
-            <p:cNvPr id="37" name="Group 36">
+            </a:blip>
+            <a:srcRect l="8887" t="17100" r="9473" b="15159"/>
+            <a:stretch>
+              <a:fillRect/>
+            </a:stretch>
+          </p:blipFill>
+          <p:spPr bwMode="auto">
+            <a:xfrm>
+              <a:off x="5332830" y="4484157"/>
+              <a:ext cx="1040904" cy="865335"/>
+            </a:xfrm>
+            <a:prstGeom prst="rect">
+              <a:avLst/>
+            </a:prstGeom>
+            <a:noFill/>
+            <a:extLst>
+              <a:ext uri="{909E8E84-426E-40DD-AFC4-6F175D3DCCD1}">
+                <a14:hiddenFill xmlns:a14="http://schemas.microsoft.com/office/drawing/2010/main">
+                  <a:solidFill>
+                    <a:srgbClr val="FFFFFF"/>
+                  </a:solidFill>
+                </a14:hiddenFill>
+              </a:ext>
+            </a:extLst>
+          </p:spPr>
+        </p:pic>
+        <p:pic>
+          <p:nvPicPr>
+            <p:cNvPr id="48" name="Picture 2" descr="solar energy icon logo vector illustration. solar panels symbol ...">
               <a:extLst>
                 <a:ext uri="{FF2B5EF4-FFF2-40B4-BE49-F238E27FC236}">
-                  <a16:creationId xmlns:a16="http://schemas.microsoft.com/office/drawing/2014/main" id="{43E7B9A4-4FBA-0EC5-0C5B-45FD8FBFA579}"/>
+                  <a16:creationId xmlns:a16="http://schemas.microsoft.com/office/drawing/2014/main" id="{D4726B13-CAAB-F6C5-0D20-A53E5DD3AFEB}"/>
                 </a:ext>
               </a:extLst>
             </p:cNvPr>
-            <p:cNvGrpSpPr/>
+            <p:cNvPicPr>
+              <a:picLocks noChangeAspect="1" noChangeArrowheads="1"/>
+            </p:cNvPicPr>
             <p:nvPr/>
-          </p:nvGrpSpPr>
-          <p:grpSpPr>
-            <a:xfrm>
-              <a:off x="2365794" y="5845973"/>
-              <a:ext cx="1040904" cy="962018"/>
-              <a:chOff x="5332830" y="4387474"/>
-              <a:chExt cx="1040904" cy="962018"/>
-            </a:xfrm>
-          </p:grpSpPr>
-          <p:pic>
-            <p:nvPicPr>
-              <p:cNvPr id="40" name="Picture 5">
-                <a:extLst>
-                  <a:ext uri="{FF2B5EF4-FFF2-40B4-BE49-F238E27FC236}">
-                    <a16:creationId xmlns:a16="http://schemas.microsoft.com/office/drawing/2014/main" id="{6167ACA3-B189-E30D-72B9-FF64B0A58266}"/>
-                  </a:ext>
-                </a:extLst>
-              </p:cNvPr>
-              <p:cNvPicPr>
-                <a:picLocks noChangeAspect="1" noChangeArrowheads="1"/>
-              </p:cNvPicPr>
-              <p:nvPr/>
-            </p:nvPicPr>
-            <p:blipFill rotWithShape="1">
-              <a:blip r:embed="rId3">
-                <a:extLst>
-                  <a:ext uri="{28A0092B-C50C-407E-A947-70E740481C1C}">
-                    <a14:useLocalDpi xmlns:a14="http://schemas.microsoft.com/office/drawing/2010/main" val="0"/>
-                  </a:ext>
-                </a:extLst>
-              </a:blip>
-              <a:srcRect l="8887" t="17100" r="9473" b="15159"/>
-              <a:stretch>
-                <a:fillRect/>
-              </a:stretch>
-            </p:blipFill>
-            <p:spPr bwMode="auto">
-              <a:xfrm>
-                <a:off x="5332830" y="4484157"/>
-                <a:ext cx="1040904" cy="865335"/>
-              </a:xfrm>
-              <a:prstGeom prst="rect">
-                <a:avLst/>
-              </a:prstGeom>
-              <a:noFill/>
+          </p:nvPicPr>
+          <p:blipFill rotWithShape="1">
+            <a:blip r:embed="rId14">
+              <a:biLevel thresh="25000"/>
               <a:extLst>
-                <a:ext uri="{909E8E84-426E-40DD-AFC4-6F175D3DCCD1}">
-                  <a14:hiddenFill xmlns:a14="http://schemas.microsoft.com/office/drawing/2010/main">
-                    <a:solidFill>
-                      <a:srgbClr val="FFFFFF"/>
-                    </a:solidFill>
-                  </a14:hiddenFill>
+                <a:ext uri="{BEBA8EAE-BF5A-486C-A8C5-ECC9F3942E4B}">
+                  <a14:imgProps xmlns:a14="http://schemas.microsoft.com/office/drawing/2010/main">
+                    <a14:imgLayer r:embed="rId5">
+                      <a14:imgEffect>
+                        <a14:backgroundRemoval t="26458" b="73646" l="21250" r="78750">
+                          <a14:foregroundMark x1="54896" y1="53021" x2="54896" y2="53021"/>
+                          <a14:foregroundMark x1="71146" y1="53542" x2="71146" y2="53542"/>
+                          <a14:foregroundMark x1="64063" y1="70052" x2="64063" y2="70052"/>
+                          <a14:foregroundMark x1="47813" y1="69531" x2="47813" y2="69531"/>
+                          <a14:foregroundMark x1="34115" y1="68229" x2="34115" y2="68229"/>
+                          <a14:foregroundMark x1="33854" y1="40417" x2="33854" y2="40417"/>
+                          <a14:foregroundMark x1="43594" y1="32240" x2="43594" y2="32240"/>
+                          <a14:foregroundMark x1="48333" y1="40938" x2="48333" y2="40938"/>
+                          <a14:foregroundMark x1="23906" y1="51406" x2="23906" y2="51406"/>
+                          <a14:foregroundMark x1="21250" y1="41198" x2="21250" y2="41198"/>
+                          <a14:foregroundMark x1="24948" y1="31979" x2="24948" y2="31979"/>
+                          <a14:foregroundMark x1="34115" y1="26979" x2="34115" y2="26979"/>
+                          <a14:foregroundMark x1="39896" y1="50625" x2="39896" y2="50625"/>
+                          <a14:foregroundMark x1="33854" y1="26458" x2="33854" y2="26458"/>
+                          <a14:foregroundMark x1="34688" y1="28698" x2="34688" y2="28698"/>
+                          <a14:foregroundMark x1="25625" y1="32396" x2="25625" y2="32396"/>
+                          <a14:foregroundMark x1="26042" y1="32292" x2="26042" y2="32292"/>
+                          <a14:foregroundMark x1="24896" y1="50938" x2="24896" y2="50938"/>
+                          <a14:foregroundMark x1="24896" y1="50938" x2="24896" y2="50938"/>
+                          <a14:foregroundMark x1="34688" y1="28073" x2="34688" y2="28073"/>
+                          <a14:foregroundMark x1="34792" y1="29427" x2="34792" y2="29427"/>
+                          <a14:foregroundMark x1="24479" y1="30573" x2="24479" y2="30573"/>
+                        </a14:backgroundRemoval>
+                      </a14:imgEffect>
+                      <a14:imgEffect>
+                        <a14:saturation sat="0"/>
+                      </a14:imgEffect>
+                    </a14:imgLayer>
+                  </a14:imgProps>
+                </a:ext>
+                <a:ext uri="{28A0092B-C50C-407E-A947-70E740481C1C}">
+                  <a14:useLocalDpi xmlns:a14="http://schemas.microsoft.com/office/drawing/2010/main" val="0"/>
                 </a:ext>
               </a:extLst>
-            </p:spPr>
-          </p:pic>
-          <p:pic>
-            <p:nvPicPr>
-              <p:cNvPr id="41" name="Picture 2" descr="solar energy icon logo vector illustration. solar panels symbol ...">
-                <a:extLst>
-                  <a:ext uri="{FF2B5EF4-FFF2-40B4-BE49-F238E27FC236}">
-                    <a16:creationId xmlns:a16="http://schemas.microsoft.com/office/drawing/2014/main" id="{12E54575-8A86-EB76-386A-FE0E04325FA9}"/>
-                  </a:ext>
-                </a:extLst>
-              </p:cNvPr>
-              <p:cNvPicPr>
-                <a:picLocks noChangeAspect="1" noChangeArrowheads="1"/>
-              </p:cNvPicPr>
-              <p:nvPr/>
-            </p:nvPicPr>
-            <p:blipFill rotWithShape="1">
-              <a:blip r:embed="rId14">
-                <a:biLevel thresh="25000"/>
-                <a:extLst>
-                  <a:ext uri="{BEBA8EAE-BF5A-486C-A8C5-ECC9F3942E4B}">
-                    <a14:imgProps xmlns:a14="http://schemas.microsoft.com/office/drawing/2010/main">
-                      <a14:imgLayer r:embed="rId5">
-                        <a14:imgEffect>
-                          <a14:backgroundRemoval t="26458" b="73646" l="21250" r="78750">
-                            <a14:foregroundMark x1="54896" y1="53021" x2="54896" y2="53021"/>
-                            <a14:foregroundMark x1="71146" y1="53542" x2="71146" y2="53542"/>
-                            <a14:foregroundMark x1="64063" y1="70052" x2="64063" y2="70052"/>
-                            <a14:foregroundMark x1="47813" y1="69531" x2="47813" y2="69531"/>
-                            <a14:foregroundMark x1="34115" y1="68229" x2="34115" y2="68229"/>
-                            <a14:foregroundMark x1="33854" y1="40417" x2="33854" y2="40417"/>
-                            <a14:foregroundMark x1="43594" y1="32240" x2="43594" y2="32240"/>
-                            <a14:foregroundMark x1="48333" y1="40938" x2="48333" y2="40938"/>
-                            <a14:foregroundMark x1="23906" y1="51406" x2="23906" y2="51406"/>
-                            <a14:foregroundMark x1="21250" y1="41198" x2="21250" y2="41198"/>
-                            <a14:foregroundMark x1="24948" y1="31979" x2="24948" y2="31979"/>
-                            <a14:foregroundMark x1="34115" y1="26979" x2="34115" y2="26979"/>
-                            <a14:foregroundMark x1="39896" y1="50625" x2="39896" y2="50625"/>
-                            <a14:foregroundMark x1="33854" y1="26458" x2="33854" y2="26458"/>
-                            <a14:foregroundMark x1="34688" y1="28698" x2="34688" y2="28698"/>
-                            <a14:foregroundMark x1="25625" y1="32396" x2="25625" y2="32396"/>
-                            <a14:foregroundMark x1="26042" y1="32292" x2="26042" y2="32292"/>
-                            <a14:foregroundMark x1="24896" y1="50938" x2="24896" y2="50938"/>
-                            <a14:foregroundMark x1="24896" y1="50938" x2="24896" y2="50938"/>
-                            <a14:foregroundMark x1="34688" y1="28073" x2="34688" y2="28073"/>
-                            <a14:foregroundMark x1="34792" y1="29427" x2="34792" y2="29427"/>
-                            <a14:foregroundMark x1="24479" y1="30573" x2="24479" y2="30573"/>
-                          </a14:backgroundRemoval>
-                        </a14:imgEffect>
-                        <a14:imgEffect>
-                          <a14:saturation sat="0"/>
-                        </a14:imgEffect>
-                      </a14:imgLayer>
-                    </a14:imgProps>
-                  </a:ext>
-                  <a:ext uri="{28A0092B-C50C-407E-A947-70E740481C1C}">
-                    <a14:useLocalDpi xmlns:a14="http://schemas.microsoft.com/office/drawing/2010/main" val="0"/>
-                  </a:ext>
-                </a:extLst>
-              </a:blip>
-              <a:srcRect l="14807" t="21993" r="14052" b="20615"/>
-              <a:stretch>
-                <a:fillRect/>
-              </a:stretch>
-            </p:blipFill>
-            <p:spPr bwMode="auto">
-              <a:xfrm>
-                <a:off x="5370924" y="4387474"/>
-                <a:ext cx="507750" cy="409620"/>
-              </a:xfrm>
-              <a:prstGeom prst="rect">
-                <a:avLst/>
-              </a:prstGeom>
-              <a:noFill/>
+            </a:blip>
+            <a:srcRect l="14807" t="21993" r="14052" b="20615"/>
+            <a:stretch>
+              <a:fillRect/>
+            </a:stretch>
+          </p:blipFill>
+          <p:spPr bwMode="auto">
+            <a:xfrm>
+              <a:off x="5370924" y="4387474"/>
+              <a:ext cx="507750" cy="409620"/>
+            </a:xfrm>
+            <a:prstGeom prst="rect">
+              <a:avLst/>
+            </a:prstGeom>
+            <a:noFill/>
+            <a:extLst>
+              <a:ext uri="{909E8E84-426E-40DD-AFC4-6F175D3DCCD1}">
+                <a14:hiddenFill xmlns:a14="http://schemas.microsoft.com/office/drawing/2010/main">
+                  <a:solidFill>
+                    <a:srgbClr val="FFFFFF"/>
+                  </a:solidFill>
+                </a14:hiddenFill>
+              </a:ext>
+            </a:extLst>
+          </p:spPr>
+        </p:pic>
+      </p:grpSp>
+      <p:grpSp>
+        <p:nvGrpSpPr>
+          <p:cNvPr id="37" name="Group 36">
+            <a:extLst>
+              <a:ext uri="{FF2B5EF4-FFF2-40B4-BE49-F238E27FC236}">
+                <a16:creationId xmlns:a16="http://schemas.microsoft.com/office/drawing/2014/main" id="{43E7B9A4-4FBA-0EC5-0C5B-45FD8FBFA579}"/>
+              </a:ext>
+            </a:extLst>
+          </p:cNvPr>
+          <p:cNvGrpSpPr/>
+          <p:nvPr/>
+        </p:nvGrpSpPr>
+        <p:grpSpPr>
+          <a:xfrm>
+            <a:off x="2446183" y="5752881"/>
+            <a:ext cx="1066691" cy="985850"/>
+            <a:chOff x="5332830" y="4387474"/>
+            <a:chExt cx="1040904" cy="962018"/>
+          </a:xfrm>
+        </p:grpSpPr>
+        <p:pic>
+          <p:nvPicPr>
+            <p:cNvPr id="40" name="Picture 5">
               <a:extLst>
-                <a:ext uri="{909E8E84-426E-40DD-AFC4-6F175D3DCCD1}">
-                  <a14:hiddenFill xmlns:a14="http://schemas.microsoft.com/office/drawing/2010/main">
-                    <a:solidFill>
-                      <a:srgbClr val="FFFFFF"/>
-                    </a:solidFill>
-                  </a14:hiddenFill>
+                <a:ext uri="{FF2B5EF4-FFF2-40B4-BE49-F238E27FC236}">
+                  <a16:creationId xmlns:a16="http://schemas.microsoft.com/office/drawing/2014/main" id="{6167ACA3-B189-E30D-72B9-FF64B0A58266}"/>
                 </a:ext>
               </a:extLst>
-            </p:spPr>
-          </p:pic>
-        </p:grpSp>
+            </p:cNvPr>
+            <p:cNvPicPr>
+              <a:picLocks noChangeAspect="1" noChangeArrowheads="1"/>
+            </p:cNvPicPr>
+            <p:nvPr/>
+          </p:nvPicPr>
+          <p:blipFill rotWithShape="1">
+            <a:blip r:embed="rId3">
+              <a:extLst>
+                <a:ext uri="{28A0092B-C50C-407E-A947-70E740481C1C}">
+                  <a14:useLocalDpi xmlns:a14="http://schemas.microsoft.com/office/drawing/2010/main" val="0"/>
+                </a:ext>
+              </a:extLst>
+            </a:blip>
+            <a:srcRect l="8887" t="17100" r="9473" b="15159"/>
+            <a:stretch>
+              <a:fillRect/>
+            </a:stretch>
+          </p:blipFill>
+          <p:spPr bwMode="auto">
+            <a:xfrm>
+              <a:off x="5332830" y="4484157"/>
+              <a:ext cx="1040904" cy="865335"/>
+            </a:xfrm>
+            <a:prstGeom prst="rect">
+              <a:avLst/>
+            </a:prstGeom>
+            <a:noFill/>
+            <a:extLst>
+              <a:ext uri="{909E8E84-426E-40DD-AFC4-6F175D3DCCD1}">
+                <a14:hiddenFill xmlns:a14="http://schemas.microsoft.com/office/drawing/2010/main">
+                  <a:solidFill>
+                    <a:srgbClr val="FFFFFF"/>
+                  </a:solidFill>
+                </a14:hiddenFill>
+              </a:ext>
+            </a:extLst>
+          </p:spPr>
+        </p:pic>
+        <p:pic>
+          <p:nvPicPr>
+            <p:cNvPr id="41" name="Picture 2" descr="solar energy icon logo vector illustration. solar panels symbol ...">
+              <a:extLst>
+                <a:ext uri="{FF2B5EF4-FFF2-40B4-BE49-F238E27FC236}">
+                  <a16:creationId xmlns:a16="http://schemas.microsoft.com/office/drawing/2014/main" id="{12E54575-8A86-EB76-386A-FE0E04325FA9}"/>
+                </a:ext>
+              </a:extLst>
+            </p:cNvPr>
+            <p:cNvPicPr>
+              <a:picLocks noChangeAspect="1" noChangeArrowheads="1"/>
+            </p:cNvPicPr>
+            <p:nvPr/>
+          </p:nvPicPr>
+          <p:blipFill rotWithShape="1">
+            <a:blip r:embed="rId14">
+              <a:biLevel thresh="25000"/>
+              <a:extLst>
+                <a:ext uri="{BEBA8EAE-BF5A-486C-A8C5-ECC9F3942E4B}">
+                  <a14:imgProps xmlns:a14="http://schemas.microsoft.com/office/drawing/2010/main">
+                    <a14:imgLayer r:embed="rId5">
+                      <a14:imgEffect>
+                        <a14:backgroundRemoval t="26458" b="73646" l="21250" r="78750">
+                          <a14:foregroundMark x1="54896" y1="53021" x2="54896" y2="53021"/>
+                          <a14:foregroundMark x1="71146" y1="53542" x2="71146" y2="53542"/>
+                          <a14:foregroundMark x1="64063" y1="70052" x2="64063" y2="70052"/>
+                          <a14:foregroundMark x1="47813" y1="69531" x2="47813" y2="69531"/>
+                          <a14:foregroundMark x1="34115" y1="68229" x2="34115" y2="68229"/>
+                          <a14:foregroundMark x1="33854" y1="40417" x2="33854" y2="40417"/>
+                          <a14:foregroundMark x1="43594" y1="32240" x2="43594" y2="32240"/>
+                          <a14:foregroundMark x1="48333" y1="40938" x2="48333" y2="40938"/>
+                          <a14:foregroundMark x1="23906" y1="51406" x2="23906" y2="51406"/>
+                          <a14:foregroundMark x1="21250" y1="41198" x2="21250" y2="41198"/>
+                          <a14:foregroundMark x1="24948" y1="31979" x2="24948" y2="31979"/>
+                          <a14:foregroundMark x1="34115" y1="26979" x2="34115" y2="26979"/>
+                          <a14:foregroundMark x1="39896" y1="50625" x2="39896" y2="50625"/>
+                          <a14:foregroundMark x1="33854" y1="26458" x2="33854" y2="26458"/>
+                          <a14:foregroundMark x1="34688" y1="28698" x2="34688" y2="28698"/>
+                          <a14:foregroundMark x1="25625" y1="32396" x2="25625" y2="32396"/>
+                          <a14:foregroundMark x1="26042" y1="32292" x2="26042" y2="32292"/>
+                          <a14:foregroundMark x1="24896" y1="50938" x2="24896" y2="50938"/>
+                          <a14:foregroundMark x1="24896" y1="50938" x2="24896" y2="50938"/>
+                          <a14:foregroundMark x1="34688" y1="28073" x2="34688" y2="28073"/>
+                          <a14:foregroundMark x1="34792" y1="29427" x2="34792" y2="29427"/>
+                          <a14:foregroundMark x1="24479" y1="30573" x2="24479" y2="30573"/>
+                        </a14:backgroundRemoval>
+                      </a14:imgEffect>
+                      <a14:imgEffect>
+                        <a14:saturation sat="0"/>
+                      </a14:imgEffect>
+                    </a14:imgLayer>
+                  </a14:imgProps>
+                </a:ext>
+                <a:ext uri="{28A0092B-C50C-407E-A947-70E740481C1C}">
+                  <a14:useLocalDpi xmlns:a14="http://schemas.microsoft.com/office/drawing/2010/main" val="0"/>
+                </a:ext>
+              </a:extLst>
+            </a:blip>
+            <a:srcRect l="14807" t="21993" r="14052" b="20615"/>
+            <a:stretch>
+              <a:fillRect/>
+            </a:stretch>
+          </p:blipFill>
+          <p:spPr bwMode="auto">
+            <a:xfrm>
+              <a:off x="5370924" y="4387474"/>
+              <a:ext cx="507750" cy="409620"/>
+            </a:xfrm>
+            <a:prstGeom prst="rect">
+              <a:avLst/>
+            </a:prstGeom>
+            <a:noFill/>
+            <a:extLst>
+              <a:ext uri="{909E8E84-426E-40DD-AFC4-6F175D3DCCD1}">
+                <a14:hiddenFill xmlns:a14="http://schemas.microsoft.com/office/drawing/2010/main">
+                  <a:solidFill>
+                    <a:srgbClr val="FFFFFF"/>
+                  </a:solidFill>
+                </a14:hiddenFill>
+              </a:ext>
+            </a:extLst>
+          </p:spPr>
+        </p:pic>
       </p:grpSp>
       <p:sp>
         <p:nvSpPr>

--- a/figs/figures.pptx
+++ b/figs/figures.pptx
@@ -5,11 +5,12 @@
     <p:sldMasterId id="2147483648" r:id="rId1"/>
   </p:sldMasterIdLst>
   <p:notesMasterIdLst>
-    <p:notesMasterId r:id="rId4"/>
+    <p:notesMasterId r:id="rId5"/>
   </p:notesMasterIdLst>
   <p:sldIdLst>
     <p:sldId id="257" r:id="rId2"/>
-    <p:sldId id="258" r:id="rId3"/>
+    <p:sldId id="259" r:id="rId3"/>
+    <p:sldId id="258" r:id="rId4"/>
   </p:sldIdLst>
   <p:sldSz cx="12192000" cy="6858000"/>
   <p:notesSz cx="6858000" cy="9144000"/>
@@ -198,7 +199,7 @@
           <a:p>
             <a:fld id="{9088784E-7603-884D-8785-F98637566DBB}" type="datetimeFigureOut">
               <a:rPr lang="en-US" smtClean="0"/>
-              <a:t>9/11/25</a:t>
+              <a:t>11/3/25</a:t>
             </a:fld>
             <a:endParaRPr lang="en-US"/>
           </a:p>
@@ -554,6 +555,114 @@
   <p:cSld>
     <p:spTree>
       <p:nvGrpSpPr>
+        <p:cNvPr id="1" name="">
+          <a:extLst>
+            <a:ext uri="{FF2B5EF4-FFF2-40B4-BE49-F238E27FC236}">
+              <a16:creationId xmlns:a16="http://schemas.microsoft.com/office/drawing/2014/main" id="{CF52486F-E0BD-D806-D31F-3A9DC94F6F1A}"/>
+            </a:ext>
+          </a:extLst>
+        </p:cNvPr>
+        <p:cNvGrpSpPr/>
+        <p:nvPr/>
+      </p:nvGrpSpPr>
+      <p:grpSpPr>
+        <a:xfrm>
+          <a:off x="0" y="0"/>
+          <a:ext cx="0" cy="0"/>
+          <a:chOff x="0" y="0"/>
+          <a:chExt cx="0" cy="0"/>
+        </a:xfrm>
+      </p:grpSpPr>
+      <p:sp>
+        <p:nvSpPr>
+          <p:cNvPr id="2" name="Slide Image Placeholder 1">
+            <a:extLst>
+              <a:ext uri="{FF2B5EF4-FFF2-40B4-BE49-F238E27FC236}">
+                <a16:creationId xmlns:a16="http://schemas.microsoft.com/office/drawing/2014/main" id="{F8B67F25-7D0F-8E00-5DE0-5E41A66BED37}"/>
+              </a:ext>
+            </a:extLst>
+          </p:cNvPr>
+          <p:cNvSpPr>
+            <a:spLocks noGrp="1" noRot="1" noChangeAspect="1"/>
+          </p:cNvSpPr>
+          <p:nvPr>
+            <p:ph type="sldImg"/>
+          </p:nvPr>
+        </p:nvSpPr>
+        <p:spPr/>
+      </p:sp>
+      <p:sp>
+        <p:nvSpPr>
+          <p:cNvPr id="3" name="Notes Placeholder 2">
+            <a:extLst>
+              <a:ext uri="{FF2B5EF4-FFF2-40B4-BE49-F238E27FC236}">
+                <a16:creationId xmlns:a16="http://schemas.microsoft.com/office/drawing/2014/main" id="{21F181C8-5F96-7487-147F-37ED71359210}"/>
+              </a:ext>
+            </a:extLst>
+          </p:cNvPr>
+          <p:cNvSpPr>
+            <a:spLocks noGrp="1"/>
+          </p:cNvSpPr>
+          <p:nvPr>
+            <p:ph type="body" idx="1"/>
+          </p:nvPr>
+        </p:nvSpPr>
+        <p:spPr/>
+        <p:txBody>
+          <a:bodyPr/>
+          <a:lstStyle/>
+          <a:p>
+            <a:endParaRPr lang="en-US" dirty="0"/>
+          </a:p>
+        </p:txBody>
+      </p:sp>
+      <p:sp>
+        <p:nvSpPr>
+          <p:cNvPr id="4" name="Slide Number Placeholder 3">
+            <a:extLst>
+              <a:ext uri="{FF2B5EF4-FFF2-40B4-BE49-F238E27FC236}">
+                <a16:creationId xmlns:a16="http://schemas.microsoft.com/office/drawing/2014/main" id="{800A607B-F9E6-84CD-69BC-AD3FA02C44B4}"/>
+              </a:ext>
+            </a:extLst>
+          </p:cNvPr>
+          <p:cNvSpPr>
+            <a:spLocks noGrp="1"/>
+          </p:cNvSpPr>
+          <p:nvPr>
+            <p:ph type="sldNum" sz="quarter" idx="5"/>
+          </p:nvPr>
+        </p:nvSpPr>
+        <p:spPr/>
+        <p:txBody>
+          <a:bodyPr/>
+          <a:lstStyle/>
+          <a:p>
+            <a:fld id="{FCAA66A0-D859-734E-9163-83C93787C599}" type="slidenum">
+              <a:rPr lang="en-US" smtClean="0"/>
+              <a:t>2</a:t>
+            </a:fld>
+            <a:endParaRPr lang="en-US"/>
+          </a:p>
+        </p:txBody>
+      </p:sp>
+    </p:spTree>
+    <p:extLst>
+      <p:ext uri="{BB962C8B-B14F-4D97-AF65-F5344CB8AC3E}">
+        <p14:creationId xmlns:p14="http://schemas.microsoft.com/office/powerpoint/2010/main" val="2203747868"/>
+      </p:ext>
+    </p:extLst>
+  </p:cSld>
+  <p:clrMapOvr>
+    <a:masterClrMapping/>
+  </p:clrMapOvr>
+</p:notes>
+</file>
+
+<file path=ppt/notesSlides/notesSlide3.xml><?xml version="1.0" encoding="utf-8"?>
+<p:notes xmlns:a="http://schemas.openxmlformats.org/drawingml/2006/main" xmlns:r="http://schemas.openxmlformats.org/officeDocument/2006/relationships" xmlns:p="http://schemas.openxmlformats.org/presentationml/2006/main">
+  <p:cSld>
+    <p:spTree>
+      <p:nvGrpSpPr>
         <p:cNvPr id="1" name=""/>
         <p:cNvGrpSpPr/>
         <p:nvPr/>
@@ -614,7 +723,7 @@
           <a:p>
             <a:fld id="{FCAA66A0-D859-734E-9163-83C93787C599}" type="slidenum">
               <a:rPr lang="en-US" smtClean="0"/>
-              <a:t>2</a:t>
+              <a:t>3</a:t>
             </a:fld>
             <a:endParaRPr lang="en-US"/>
           </a:p>
@@ -780,7 +889,7 @@
           <a:p>
             <a:fld id="{D8914414-2A77-FC4C-88A1-A9A8211F05BC}" type="datetimeFigureOut">
               <a:rPr lang="en-US" smtClean="0"/>
-              <a:t>9/11/25</a:t>
+              <a:t>11/3/25</a:t>
             </a:fld>
             <a:endParaRPr lang="en-US"/>
           </a:p>
@@ -978,7 +1087,7 @@
           <a:p>
             <a:fld id="{D8914414-2A77-FC4C-88A1-A9A8211F05BC}" type="datetimeFigureOut">
               <a:rPr lang="en-US" smtClean="0"/>
-              <a:t>9/11/25</a:t>
+              <a:t>11/3/25</a:t>
             </a:fld>
             <a:endParaRPr lang="en-US"/>
           </a:p>
@@ -1186,7 +1295,7 @@
           <a:p>
             <a:fld id="{D8914414-2A77-FC4C-88A1-A9A8211F05BC}" type="datetimeFigureOut">
               <a:rPr lang="en-US" smtClean="0"/>
-              <a:t>9/11/25</a:t>
+              <a:t>11/3/25</a:t>
             </a:fld>
             <a:endParaRPr lang="en-US"/>
           </a:p>
@@ -1384,7 +1493,7 @@
           <a:p>
             <a:fld id="{D8914414-2A77-FC4C-88A1-A9A8211F05BC}" type="datetimeFigureOut">
               <a:rPr lang="en-US" smtClean="0"/>
-              <a:t>9/11/25</a:t>
+              <a:t>11/3/25</a:t>
             </a:fld>
             <a:endParaRPr lang="en-US"/>
           </a:p>
@@ -1659,7 +1768,7 @@
           <a:p>
             <a:fld id="{D8914414-2A77-FC4C-88A1-A9A8211F05BC}" type="datetimeFigureOut">
               <a:rPr lang="en-US" smtClean="0"/>
-              <a:t>9/11/25</a:t>
+              <a:t>11/3/25</a:t>
             </a:fld>
             <a:endParaRPr lang="en-US"/>
           </a:p>
@@ -1924,7 +2033,7 @@
           <a:p>
             <a:fld id="{D8914414-2A77-FC4C-88A1-A9A8211F05BC}" type="datetimeFigureOut">
               <a:rPr lang="en-US" smtClean="0"/>
-              <a:t>9/11/25</a:t>
+              <a:t>11/3/25</a:t>
             </a:fld>
             <a:endParaRPr lang="en-US"/>
           </a:p>
@@ -2336,7 +2445,7 @@
           <a:p>
             <a:fld id="{D8914414-2A77-FC4C-88A1-A9A8211F05BC}" type="datetimeFigureOut">
               <a:rPr lang="en-US" smtClean="0"/>
-              <a:t>9/11/25</a:t>
+              <a:t>11/3/25</a:t>
             </a:fld>
             <a:endParaRPr lang="en-US"/>
           </a:p>
@@ -2477,7 +2586,7 @@
           <a:p>
             <a:fld id="{D8914414-2A77-FC4C-88A1-A9A8211F05BC}" type="datetimeFigureOut">
               <a:rPr lang="en-US" smtClean="0"/>
-              <a:t>9/11/25</a:t>
+              <a:t>11/3/25</a:t>
             </a:fld>
             <a:endParaRPr lang="en-US"/>
           </a:p>
@@ -2590,7 +2699,7 @@
           <a:p>
             <a:fld id="{D8914414-2A77-FC4C-88A1-A9A8211F05BC}" type="datetimeFigureOut">
               <a:rPr lang="en-US" smtClean="0"/>
-              <a:t>9/11/25</a:t>
+              <a:t>11/3/25</a:t>
             </a:fld>
             <a:endParaRPr lang="en-US"/>
           </a:p>
@@ -2901,7 +3010,7 @@
           <a:p>
             <a:fld id="{D8914414-2A77-FC4C-88A1-A9A8211F05BC}" type="datetimeFigureOut">
               <a:rPr lang="en-US" smtClean="0"/>
-              <a:t>9/11/25</a:t>
+              <a:t>11/3/25</a:t>
             </a:fld>
             <a:endParaRPr lang="en-US"/>
           </a:p>
@@ -3189,7 +3298,7 @@
           <a:p>
             <a:fld id="{D8914414-2A77-FC4C-88A1-A9A8211F05BC}" type="datetimeFigureOut">
               <a:rPr lang="en-US" smtClean="0"/>
-              <a:t>9/11/25</a:t>
+              <a:t>11/3/25</a:t>
             </a:fld>
             <a:endParaRPr lang="en-US"/>
           </a:p>
@@ -3430,7 +3539,7 @@
           <a:p>
             <a:fld id="{D8914414-2A77-FC4C-88A1-A9A8211F05BC}" type="datetimeFigureOut">
               <a:rPr lang="en-US" smtClean="0"/>
-              <a:t>9/11/25</a:t>
+              <a:t>11/3/25</a:t>
             </a:fld>
             <a:endParaRPr lang="en-US"/>
           </a:p>
@@ -3853,12 +3962,4201 @@
           <a:chExt cx="0" cy="0"/>
         </a:xfrm>
       </p:grpSpPr>
+      <p:pic>
+        <p:nvPicPr>
+          <p:cNvPr id="1486" name="Picture 2">
+            <a:extLst>
+              <a:ext uri="{FF2B5EF4-FFF2-40B4-BE49-F238E27FC236}">
+                <a16:creationId xmlns:a16="http://schemas.microsoft.com/office/drawing/2014/main" id="{F057581D-821B-1EDC-903A-F8717866AD88}"/>
+              </a:ext>
+            </a:extLst>
+          </p:cNvPr>
+          <p:cNvPicPr>
+            <a:picLocks noChangeAspect="1" noChangeArrowheads="1"/>
+          </p:cNvPicPr>
+          <p:nvPr/>
+        </p:nvPicPr>
+        <p:blipFill rotWithShape="1">
+          <a:blip r:embed="rId3">
+            <a:grayscl/>
+            <a:alphaModFix/>
+            <a:extLst>
+              <a:ext uri="{BEBA8EAE-BF5A-486C-A8C5-ECC9F3942E4B}">
+                <a14:imgProps xmlns:a14="http://schemas.microsoft.com/office/drawing/2010/main">
+                  <a14:imgLayer r:embed="rId4">
+                    <a14:imgEffect>
+                      <a14:colorTemperature colorTemp="4700"/>
+                    </a14:imgEffect>
+                    <a14:imgEffect>
+                      <a14:saturation sat="0"/>
+                    </a14:imgEffect>
+                  </a14:imgLayer>
+                </a14:imgProps>
+              </a:ext>
+              <a:ext uri="{28A0092B-C50C-407E-A947-70E740481C1C}">
+                <a14:useLocalDpi xmlns:a14="http://schemas.microsoft.com/office/drawing/2010/main" val="0"/>
+              </a:ext>
+            </a:extLst>
+          </a:blip>
+          <a:srcRect t="5365"/>
+          <a:stretch>
+            <a:fillRect/>
+          </a:stretch>
+        </p:blipFill>
+        <p:spPr bwMode="auto">
+          <a:xfrm>
+            <a:off x="122765" y="3078578"/>
+            <a:ext cx="4460260" cy="3170670"/>
+          </a:xfrm>
+          <a:prstGeom prst="rect">
+            <a:avLst/>
+          </a:prstGeom>
+          <a:noFill/>
+          <a:extLst>
+            <a:ext uri="{909E8E84-426E-40DD-AFC4-6F175D3DCCD1}">
+              <a14:hiddenFill xmlns:a14="http://schemas.microsoft.com/office/drawing/2010/main">
+                <a:solidFill>
+                  <a:srgbClr val="FFFFFF"/>
+                </a:solidFill>
+              </a14:hiddenFill>
+            </a:ext>
+          </a:extLst>
+        </p:spPr>
+      </p:pic>
+      <p:sp>
+        <p:nvSpPr>
+          <p:cNvPr id="16" name="TextBox 15">
+            <a:extLst>
+              <a:ext uri="{FF2B5EF4-FFF2-40B4-BE49-F238E27FC236}">
+                <a16:creationId xmlns:a16="http://schemas.microsoft.com/office/drawing/2014/main" id="{166DB45E-72D5-B68B-DEA6-72EC3896B591}"/>
+              </a:ext>
+            </a:extLst>
+          </p:cNvPr>
+          <p:cNvSpPr txBox="1"/>
+          <p:nvPr/>
+        </p:nvSpPr>
+        <p:spPr>
+          <a:xfrm>
+            <a:off x="3048000" y="-3662"/>
+            <a:ext cx="6096000" cy="523220"/>
+          </a:xfrm>
+          <a:prstGeom prst="rect">
+            <a:avLst/>
+          </a:prstGeom>
+          <a:noFill/>
+        </p:spPr>
+        <p:txBody>
+          <a:bodyPr wrap="square">
+            <a:spAutoFit/>
+          </a:bodyPr>
+          <a:lstStyle/>
+          <a:p>
+            <a:pPr algn="ctr"/>
+            <a:r>
+              <a:rPr lang="en-US" sz="2800" b="1">
+                <a:latin typeface="Arial" panose="020B0604020202020204" pitchFamily="34" charset="0"/>
+                <a:cs typeface="Arial" panose="020B0604020202020204" pitchFamily="34" charset="0"/>
+              </a:rPr>
+              <a:t>Temporal resolution </a:t>
+            </a:r>
+            <a:r>
+              <a:rPr lang="en-US" sz="2800" b="1" dirty="0">
+                <a:latin typeface="Arial" panose="020B0604020202020204" pitchFamily="34" charset="0"/>
+                <a:cs typeface="Arial" panose="020B0604020202020204" pitchFamily="34" charset="0"/>
+              </a:rPr>
+              <a:t>m</a:t>
+            </a:r>
+            <a:r>
+              <a:rPr lang="en-US" sz="2800" b="1">
+                <a:latin typeface="Arial" panose="020B0604020202020204" pitchFamily="34" charset="0"/>
+                <a:cs typeface="Arial" panose="020B0604020202020204" pitchFamily="34" charset="0"/>
+              </a:rPr>
+              <a:t>atters</a:t>
+            </a:r>
+            <a:endParaRPr lang="en-US" sz="2800" b="1" dirty="0">
+              <a:latin typeface="Arial" panose="020B0604020202020204" pitchFamily="34" charset="0"/>
+              <a:cs typeface="Arial" panose="020B0604020202020204" pitchFamily="34" charset="0"/>
+            </a:endParaRPr>
+          </a:p>
+        </p:txBody>
+      </p:sp>
+      <p:sp>
+        <p:nvSpPr>
+          <p:cNvPr id="12" name="TextBox 11">
+            <a:extLst>
+              <a:ext uri="{FF2B5EF4-FFF2-40B4-BE49-F238E27FC236}">
+                <a16:creationId xmlns:a16="http://schemas.microsoft.com/office/drawing/2014/main" id="{D2CA779B-885B-947A-02C9-5B5C161B3AD7}"/>
+              </a:ext>
+            </a:extLst>
+          </p:cNvPr>
+          <p:cNvSpPr txBox="1"/>
+          <p:nvPr/>
+        </p:nvSpPr>
+        <p:spPr>
+          <a:xfrm>
+            <a:off x="278003" y="993418"/>
+            <a:ext cx="4358962" cy="2118465"/>
+          </a:xfrm>
+          <a:prstGeom prst="rect">
+            <a:avLst/>
+          </a:prstGeom>
+          <a:noFill/>
+        </p:spPr>
+        <p:txBody>
+          <a:bodyPr wrap="square">
+            <a:spAutoFit/>
+          </a:bodyPr>
+          <a:lstStyle/>
+          <a:p>
+            <a:pPr algn="ctr">
+              <a:lnSpc>
+                <a:spcPct val="150000"/>
+              </a:lnSpc>
+            </a:pPr>
+            <a:r>
+              <a:rPr lang="en-US" dirty="0">
+                <a:solidFill>
+                  <a:srgbClr val="ECA9A1"/>
+                </a:solidFill>
+                <a:latin typeface="Arial" panose="020B0604020202020204" pitchFamily="34" charset="0"/>
+                <a:cs typeface="Arial" panose="020B0604020202020204" pitchFamily="34" charset="0"/>
+              </a:rPr>
+              <a:t>Annual avg: 1 (year)</a:t>
+            </a:r>
+          </a:p>
+          <a:p>
+            <a:pPr algn="ctr">
+              <a:lnSpc>
+                <a:spcPct val="150000"/>
+              </a:lnSpc>
+            </a:pPr>
+            <a:r>
+              <a:rPr lang="en-US" dirty="0">
+                <a:solidFill>
+                  <a:srgbClr val="EBB16D"/>
+                </a:solidFill>
+                <a:latin typeface="Arial" panose="020B0604020202020204" pitchFamily="34" charset="0"/>
+                <a:cs typeface="Arial" panose="020B0604020202020204" pitchFamily="34" charset="0"/>
+              </a:rPr>
+              <a:t>Seasonal avg: 4 (season) </a:t>
+            </a:r>
+          </a:p>
+          <a:p>
+            <a:pPr algn="ctr">
+              <a:lnSpc>
+                <a:spcPct val="150000"/>
+              </a:lnSpc>
+            </a:pPr>
+            <a:r>
+              <a:rPr lang="en-US" dirty="0">
+                <a:solidFill>
+                  <a:srgbClr val="BEB9D4"/>
+                </a:solidFill>
+                <a:latin typeface="Arial" panose="020B0604020202020204" pitchFamily="34" charset="0"/>
+                <a:cs typeface="Arial" panose="020B0604020202020204" pitchFamily="34" charset="0"/>
+              </a:rPr>
+              <a:t>Time-of-day avg: 24 (hour)</a:t>
+            </a:r>
+          </a:p>
+          <a:p>
+            <a:pPr algn="ctr">
+              <a:lnSpc>
+                <a:spcPct val="150000"/>
+              </a:lnSpc>
+            </a:pPr>
+            <a:r>
+              <a:rPr lang="en-US" dirty="0">
+                <a:solidFill>
+                  <a:srgbClr val="88ADCA"/>
+                </a:solidFill>
+                <a:latin typeface="Arial" panose="020B0604020202020204" pitchFamily="34" charset="0"/>
+                <a:cs typeface="Arial" panose="020B0604020202020204" pitchFamily="34" charset="0"/>
+              </a:rPr>
+              <a:t>Season-hour avg: 4 x 24 (season x hour)</a:t>
+            </a:r>
+          </a:p>
+          <a:p>
+            <a:pPr algn="ctr">
+              <a:lnSpc>
+                <a:spcPct val="150000"/>
+              </a:lnSpc>
+            </a:pPr>
+            <a:r>
+              <a:rPr lang="en-US" dirty="0">
+                <a:solidFill>
+                  <a:srgbClr val="8DC8BE"/>
+                </a:solidFill>
+                <a:latin typeface="Arial" panose="020B0604020202020204" pitchFamily="34" charset="0"/>
+                <a:cs typeface="Arial" panose="020B0604020202020204" pitchFamily="34" charset="0"/>
+              </a:rPr>
+              <a:t>Month-hour avg: 12 x 24 (month x hour)</a:t>
+            </a:r>
+          </a:p>
+        </p:txBody>
+      </p:sp>
+      <p:pic>
+        <p:nvPicPr>
+          <p:cNvPr id="1452" name="Picture 5">
+            <a:extLst>
+              <a:ext uri="{FF2B5EF4-FFF2-40B4-BE49-F238E27FC236}">
+                <a16:creationId xmlns:a16="http://schemas.microsoft.com/office/drawing/2014/main" id="{515AF12F-4F26-45BE-1F0E-3B2D69378B0F}"/>
+              </a:ext>
+            </a:extLst>
+          </p:cNvPr>
+          <p:cNvPicPr>
+            <a:picLocks noChangeAspect="1" noChangeArrowheads="1"/>
+          </p:cNvPicPr>
+          <p:nvPr/>
+        </p:nvPicPr>
+        <p:blipFill rotWithShape="1">
+          <a:blip r:embed="rId5">
+            <a:duotone>
+              <a:schemeClr val="bg2">
+                <a:shade val="45000"/>
+                <a:satMod val="135000"/>
+              </a:schemeClr>
+              <a:prstClr val="white"/>
+            </a:duotone>
+            <a:extLst>
+              <a:ext uri="{28A0092B-C50C-407E-A947-70E740481C1C}">
+                <a14:useLocalDpi xmlns:a14="http://schemas.microsoft.com/office/drawing/2010/main" val="0"/>
+              </a:ext>
+            </a:extLst>
+          </a:blip>
+          <a:srcRect l="8887" t="17100" r="9473" b="15159"/>
+          <a:stretch>
+            <a:fillRect/>
+          </a:stretch>
+        </p:blipFill>
+        <p:spPr bwMode="auto">
+          <a:xfrm>
+            <a:off x="5304455" y="4188156"/>
+            <a:ext cx="2313712" cy="1923459"/>
+          </a:xfrm>
+          <a:prstGeom prst="rect">
+            <a:avLst/>
+          </a:prstGeom>
+          <a:noFill/>
+          <a:extLst>
+            <a:ext uri="{909E8E84-426E-40DD-AFC4-6F175D3DCCD1}">
+              <a14:hiddenFill xmlns:a14="http://schemas.microsoft.com/office/drawing/2010/main">
+                <a:solidFill>
+                  <a:srgbClr val="FFFFFF"/>
+                </a:solidFill>
+              </a14:hiddenFill>
+            </a:ext>
+          </a:extLst>
+        </p:spPr>
+      </p:pic>
+      <p:sp>
+        <p:nvSpPr>
+          <p:cNvPr id="1455" name="TextBox 1454">
+            <a:extLst>
+              <a:ext uri="{FF2B5EF4-FFF2-40B4-BE49-F238E27FC236}">
+                <a16:creationId xmlns:a16="http://schemas.microsoft.com/office/drawing/2014/main" id="{D8CF1DD4-32B0-691C-DB15-E345352DF6C5}"/>
+              </a:ext>
+            </a:extLst>
+          </p:cNvPr>
+          <p:cNvSpPr txBox="1"/>
+          <p:nvPr/>
+        </p:nvSpPr>
+        <p:spPr>
+          <a:xfrm>
+            <a:off x="5156924" y="6203830"/>
+            <a:ext cx="2477467" cy="456535"/>
+          </a:xfrm>
+          <a:prstGeom prst="rect">
+            <a:avLst/>
+          </a:prstGeom>
+          <a:noFill/>
+        </p:spPr>
+        <p:txBody>
+          <a:bodyPr wrap="square">
+            <a:spAutoFit/>
+          </a:bodyPr>
+          <a:lstStyle/>
+          <a:p>
+            <a:pPr algn="ctr">
+              <a:lnSpc>
+                <a:spcPct val="150000"/>
+              </a:lnSpc>
+            </a:pPr>
+            <a:r>
+              <a:rPr lang="en-US" dirty="0">
+                <a:latin typeface="Arial" panose="020B0604020202020204" pitchFamily="34" charset="0"/>
+                <a:cs typeface="Arial" panose="020B0604020202020204" pitchFamily="34" charset="0"/>
+              </a:rPr>
+              <a:t>639 real buildings</a:t>
+            </a:r>
+          </a:p>
+        </p:txBody>
+      </p:sp>
+      <p:pic>
+        <p:nvPicPr>
+          <p:cNvPr id="1479" name="Picture 2" descr="solar energy icon logo vector illustration. solar panels symbol ...">
+            <a:extLst>
+              <a:ext uri="{FF2B5EF4-FFF2-40B4-BE49-F238E27FC236}">
+                <a16:creationId xmlns:a16="http://schemas.microsoft.com/office/drawing/2014/main" id="{F7308F00-6224-E4FC-F88C-70FA8E237D91}"/>
+              </a:ext>
+            </a:extLst>
+          </p:cNvPr>
+          <p:cNvPicPr>
+            <a:picLocks noChangeAspect="1" noChangeArrowheads="1"/>
+          </p:cNvPicPr>
+          <p:nvPr/>
+        </p:nvPicPr>
+        <p:blipFill rotWithShape="1">
+          <a:blip r:embed="rId6">
+            <a:duotone>
+              <a:schemeClr val="bg2">
+                <a:shade val="45000"/>
+                <a:satMod val="135000"/>
+              </a:schemeClr>
+              <a:prstClr val="white"/>
+            </a:duotone>
+            <a:extLst>
+              <a:ext uri="{BEBA8EAE-BF5A-486C-A8C5-ECC9F3942E4B}">
+                <a14:imgProps xmlns:a14="http://schemas.microsoft.com/office/drawing/2010/main">
+                  <a14:imgLayer r:embed="rId7">
+                    <a14:imgEffect>
+                      <a14:saturation sat="0"/>
+                    </a14:imgEffect>
+                  </a14:imgLayer>
+                </a14:imgProps>
+              </a:ext>
+              <a:ext uri="{28A0092B-C50C-407E-A947-70E740481C1C}">
+                <a14:useLocalDpi xmlns:a14="http://schemas.microsoft.com/office/drawing/2010/main" val="0"/>
+              </a:ext>
+            </a:extLst>
+          </a:blip>
+          <a:srcRect l="14807" t="21993" r="18194" b="20615"/>
+          <a:stretch>
+            <a:fillRect/>
+          </a:stretch>
+        </p:blipFill>
+        <p:spPr bwMode="auto">
+          <a:xfrm>
+            <a:off x="5156924" y="3304247"/>
+            <a:ext cx="1389797" cy="1190513"/>
+          </a:xfrm>
+          <a:prstGeom prst="rect">
+            <a:avLst/>
+          </a:prstGeom>
+          <a:noFill/>
+          <a:extLst>
+            <a:ext uri="{909E8E84-426E-40DD-AFC4-6F175D3DCCD1}">
+              <a14:hiddenFill xmlns:a14="http://schemas.microsoft.com/office/drawing/2010/main">
+                <a:solidFill>
+                  <a:srgbClr val="FFFFFF"/>
+                </a:solidFill>
+              </a14:hiddenFill>
+            </a:ext>
+          </a:extLst>
+        </p:spPr>
+      </p:pic>
+      <p:sp>
+        <p:nvSpPr>
+          <p:cNvPr id="1468" name="TextBox 1467">
+            <a:extLst>
+              <a:ext uri="{FF2B5EF4-FFF2-40B4-BE49-F238E27FC236}">
+                <a16:creationId xmlns:a16="http://schemas.microsoft.com/office/drawing/2014/main" id="{5C8FCB69-F4D7-0F95-4C2E-E09E484CA4E1}"/>
+              </a:ext>
+            </a:extLst>
+          </p:cNvPr>
+          <p:cNvSpPr txBox="1"/>
+          <p:nvPr/>
+        </p:nvSpPr>
+        <p:spPr>
+          <a:xfrm>
+            <a:off x="1080923" y="6203830"/>
+            <a:ext cx="2587986" cy="456535"/>
+          </a:xfrm>
+          <a:prstGeom prst="rect">
+            <a:avLst/>
+          </a:prstGeom>
+          <a:noFill/>
+        </p:spPr>
+        <p:txBody>
+          <a:bodyPr wrap="square">
+            <a:spAutoFit/>
+          </a:bodyPr>
+          <a:lstStyle/>
+          <a:p>
+            <a:pPr algn="ctr">
+              <a:lnSpc>
+                <a:spcPct val="150000"/>
+              </a:lnSpc>
+            </a:pPr>
+            <a:r>
+              <a:rPr lang="en-US" dirty="0">
+                <a:latin typeface="Arial" panose="020B0604020202020204" pitchFamily="34" charset="0"/>
+                <a:cs typeface="Arial" panose="020B0604020202020204" pitchFamily="34" charset="0"/>
+              </a:rPr>
+              <a:t>18 grid regions</a:t>
+            </a:r>
+          </a:p>
+        </p:txBody>
+      </p:sp>
+      <p:sp>
+        <p:nvSpPr>
+          <p:cNvPr id="1490" name="TextBox 1489">
+            <a:extLst>
+              <a:ext uri="{FF2B5EF4-FFF2-40B4-BE49-F238E27FC236}">
+                <a16:creationId xmlns:a16="http://schemas.microsoft.com/office/drawing/2014/main" id="{F3B350C0-F0C1-43E4-790A-20130E7B6456}"/>
+              </a:ext>
+            </a:extLst>
+          </p:cNvPr>
+          <p:cNvSpPr txBox="1"/>
+          <p:nvPr/>
+        </p:nvSpPr>
+        <p:spPr>
+          <a:xfrm>
+            <a:off x="508073" y="563395"/>
+            <a:ext cx="3470657" cy="456535"/>
+          </a:xfrm>
+          <a:prstGeom prst="rect">
+            <a:avLst/>
+          </a:prstGeom>
+          <a:noFill/>
+        </p:spPr>
+        <p:txBody>
+          <a:bodyPr wrap="square">
+            <a:spAutoFit/>
+          </a:bodyPr>
+          <a:lstStyle/>
+          <a:p>
+            <a:pPr algn="ctr">
+              <a:lnSpc>
+                <a:spcPct val="150000"/>
+              </a:lnSpc>
+            </a:pPr>
+            <a:r>
+              <a:rPr lang="en-US" b="1" dirty="0">
+                <a:latin typeface="Arial" panose="020B0604020202020204" pitchFamily="34" charset="0"/>
+                <a:cs typeface="Arial" panose="020B0604020202020204" pitchFamily="34" charset="0"/>
+              </a:rPr>
+              <a:t>Grid emission factors</a:t>
+            </a:r>
+          </a:p>
+        </p:txBody>
+      </p:sp>
+      <p:sp>
+        <p:nvSpPr>
+          <p:cNvPr id="1491" name="TextBox 1490">
+            <a:extLst>
+              <a:ext uri="{FF2B5EF4-FFF2-40B4-BE49-F238E27FC236}">
+                <a16:creationId xmlns:a16="http://schemas.microsoft.com/office/drawing/2014/main" id="{32AEFCE3-AB6E-9EF6-B0A9-82BB7BBE5E6D}"/>
+              </a:ext>
+            </a:extLst>
+          </p:cNvPr>
+          <p:cNvSpPr txBox="1"/>
+          <p:nvPr/>
+        </p:nvSpPr>
+        <p:spPr>
+          <a:xfrm>
+            <a:off x="4504526" y="563395"/>
+            <a:ext cx="3434471" cy="456535"/>
+          </a:xfrm>
+          <a:prstGeom prst="rect">
+            <a:avLst/>
+          </a:prstGeom>
+          <a:noFill/>
+        </p:spPr>
+        <p:txBody>
+          <a:bodyPr wrap="square">
+            <a:spAutoFit/>
+          </a:bodyPr>
+          <a:lstStyle/>
+          <a:p>
+            <a:pPr algn="ctr">
+              <a:lnSpc>
+                <a:spcPct val="150000"/>
+              </a:lnSpc>
+            </a:pPr>
+            <a:r>
+              <a:rPr lang="en-US" b="1" dirty="0">
+                <a:latin typeface="Arial" panose="020B0604020202020204" pitchFamily="34" charset="0"/>
+                <a:cs typeface="Arial" panose="020B0604020202020204" pitchFamily="34" charset="0"/>
+              </a:rPr>
+              <a:t>Variable onsite PV generation</a:t>
+            </a:r>
+          </a:p>
+        </p:txBody>
+      </p:sp>
+      <p:sp>
+        <p:nvSpPr>
+          <p:cNvPr id="1498" name="TextBox 1497">
+            <a:extLst>
+              <a:ext uri="{FF2B5EF4-FFF2-40B4-BE49-F238E27FC236}">
+                <a16:creationId xmlns:a16="http://schemas.microsoft.com/office/drawing/2014/main" id="{7BE66078-F5C8-0AAD-6524-441E90C22EE8}"/>
+              </a:ext>
+            </a:extLst>
+          </p:cNvPr>
+          <p:cNvSpPr txBox="1"/>
+          <p:nvPr/>
+        </p:nvSpPr>
+        <p:spPr>
+          <a:xfrm>
+            <a:off x="4618970" y="982886"/>
+            <a:ext cx="3242811" cy="2118465"/>
+          </a:xfrm>
+          <a:prstGeom prst="rect">
+            <a:avLst/>
+          </a:prstGeom>
+          <a:noFill/>
+        </p:spPr>
+        <p:txBody>
+          <a:bodyPr wrap="square">
+            <a:spAutoFit/>
+          </a:bodyPr>
+          <a:lstStyle/>
+          <a:p>
+            <a:pPr algn="ctr">
+              <a:lnSpc>
+                <a:spcPct val="150000"/>
+              </a:lnSpc>
+            </a:pPr>
+            <a:r>
+              <a:rPr lang="en-US" dirty="0">
+                <a:latin typeface="Arial" panose="020B0604020202020204" pitchFamily="34" charset="0"/>
+                <a:cs typeface="Arial" panose="020B0604020202020204" pitchFamily="34" charset="0"/>
+              </a:rPr>
+              <a:t>(% annual electricity consumption offset)</a:t>
+            </a:r>
+          </a:p>
+          <a:p>
+            <a:pPr algn="ctr">
+              <a:lnSpc>
+                <a:spcPct val="150000"/>
+              </a:lnSpc>
+            </a:pPr>
+            <a:r>
+              <a:rPr lang="en-US" dirty="0">
+                <a:latin typeface="Arial" panose="020B0604020202020204" pitchFamily="34" charset="0"/>
+                <a:cs typeface="Arial" panose="020B0604020202020204" pitchFamily="34" charset="0"/>
+              </a:rPr>
+              <a:t>0% </a:t>
+            </a:r>
+          </a:p>
+          <a:p>
+            <a:pPr algn="ctr">
+              <a:lnSpc>
+                <a:spcPct val="150000"/>
+              </a:lnSpc>
+            </a:pPr>
+            <a:r>
+              <a:rPr lang="en-US" dirty="0">
+                <a:latin typeface="Arial" panose="020B0604020202020204" pitchFamily="34" charset="0"/>
+                <a:cs typeface="Arial" panose="020B0604020202020204" pitchFamily="34" charset="0"/>
+              </a:rPr>
+              <a:t>25%</a:t>
+            </a:r>
+          </a:p>
+          <a:p>
+            <a:pPr algn="ctr">
+              <a:lnSpc>
+                <a:spcPct val="150000"/>
+              </a:lnSpc>
+            </a:pPr>
+            <a:r>
+              <a:rPr lang="en-US" dirty="0">
+                <a:latin typeface="Arial" panose="020B0604020202020204" pitchFamily="34" charset="0"/>
+                <a:cs typeface="Arial" panose="020B0604020202020204" pitchFamily="34" charset="0"/>
+              </a:rPr>
+              <a:t>100% </a:t>
+            </a:r>
+          </a:p>
+        </p:txBody>
+      </p:sp>
+      <p:grpSp>
+        <p:nvGrpSpPr>
+          <p:cNvPr id="9" name="Group 8">
+            <a:extLst>
+              <a:ext uri="{FF2B5EF4-FFF2-40B4-BE49-F238E27FC236}">
+                <a16:creationId xmlns:a16="http://schemas.microsoft.com/office/drawing/2014/main" id="{9FC214BD-4001-1381-88FB-AE81E192691D}"/>
+              </a:ext>
+            </a:extLst>
+          </p:cNvPr>
+          <p:cNvGrpSpPr/>
+          <p:nvPr/>
+        </p:nvGrpSpPr>
+        <p:grpSpPr>
+          <a:xfrm>
+            <a:off x="8205197" y="566071"/>
+            <a:ext cx="3744492" cy="5545544"/>
+            <a:chOff x="8205197" y="566071"/>
+            <a:chExt cx="3744492" cy="5545544"/>
+          </a:xfrm>
+        </p:grpSpPr>
+        <p:sp>
+          <p:nvSpPr>
+            <p:cNvPr id="1492" name="TextBox 1491">
+              <a:extLst>
+                <a:ext uri="{FF2B5EF4-FFF2-40B4-BE49-F238E27FC236}">
+                  <a16:creationId xmlns:a16="http://schemas.microsoft.com/office/drawing/2014/main" id="{40CF8413-E8F4-F8DF-7E48-D3C5191A7A66}"/>
+                </a:ext>
+              </a:extLst>
+            </p:cNvPr>
+            <p:cNvSpPr txBox="1"/>
+            <p:nvPr/>
+          </p:nvSpPr>
+          <p:spPr>
+            <a:xfrm>
+              <a:off x="8243568" y="566071"/>
+              <a:ext cx="3706121" cy="456535"/>
+            </a:xfrm>
+            <a:prstGeom prst="rect">
+              <a:avLst/>
+            </a:prstGeom>
+            <a:noFill/>
+          </p:spPr>
+          <p:txBody>
+            <a:bodyPr wrap="square">
+              <a:spAutoFit/>
+            </a:bodyPr>
+            <a:lstStyle/>
+            <a:p>
+              <a:pPr algn="ctr">
+                <a:lnSpc>
+                  <a:spcPct val="150000"/>
+                </a:lnSpc>
+              </a:pPr>
+              <a:r>
+                <a:rPr lang="en-US" b="1" dirty="0">
+                  <a:latin typeface="Arial" panose="020B0604020202020204" pitchFamily="34" charset="0"/>
+                  <a:cs typeface="Arial" panose="020B0604020202020204" pitchFamily="34" charset="0"/>
+                </a:rPr>
+                <a:t>Emission accounting accuracy</a:t>
+              </a:r>
+            </a:p>
+          </p:txBody>
+        </p:sp>
+        <p:sp>
+          <p:nvSpPr>
+            <p:cNvPr id="1501" name="TextBox 1500">
+              <a:extLst>
+                <a:ext uri="{FF2B5EF4-FFF2-40B4-BE49-F238E27FC236}">
+                  <a16:creationId xmlns:a16="http://schemas.microsoft.com/office/drawing/2014/main" id="{3A4F3F66-D761-4943-BFFD-7344952D1D84}"/>
+                </a:ext>
+              </a:extLst>
+            </p:cNvPr>
+            <p:cNvSpPr txBox="1"/>
+            <p:nvPr/>
+          </p:nvSpPr>
+          <p:spPr>
+            <a:xfrm>
+              <a:off x="8795725" y="991153"/>
+              <a:ext cx="2707164" cy="871970"/>
+            </a:xfrm>
+            <a:prstGeom prst="rect">
+              <a:avLst/>
+            </a:prstGeom>
+            <a:noFill/>
+          </p:spPr>
+          <p:txBody>
+            <a:bodyPr wrap="square">
+              <a:spAutoFit/>
+            </a:bodyPr>
+            <a:lstStyle/>
+            <a:p>
+              <a:pPr algn="ctr">
+                <a:lnSpc>
+                  <a:spcPct val="150000"/>
+                </a:lnSpc>
+              </a:pPr>
+              <a:r>
+                <a:rPr lang="en-US" dirty="0">
+                  <a:latin typeface="Arial" panose="020B0604020202020204" pitchFamily="34" charset="0"/>
+                  <a:cs typeface="Arial" panose="020B0604020202020204" pitchFamily="34" charset="0"/>
+                </a:rPr>
+                <a:t>Operational &amp; avoided emissions</a:t>
+              </a:r>
+            </a:p>
+          </p:txBody>
+        </p:sp>
+        <p:sp>
+          <p:nvSpPr>
+            <p:cNvPr id="1499" name="TextBox 1498">
+              <a:extLst>
+                <a:ext uri="{FF2B5EF4-FFF2-40B4-BE49-F238E27FC236}">
+                  <a16:creationId xmlns:a16="http://schemas.microsoft.com/office/drawing/2014/main" id="{228C7DBE-5FE4-FC3B-CEE9-1FF9BF2566F2}"/>
+                </a:ext>
+              </a:extLst>
+            </p:cNvPr>
+            <p:cNvSpPr txBox="1"/>
+            <p:nvPr/>
+          </p:nvSpPr>
+          <p:spPr>
+            <a:xfrm>
+              <a:off x="9512159" y="2714906"/>
+              <a:ext cx="2141385" cy="1524007"/>
+            </a:xfrm>
+            <a:prstGeom prst="rect">
+              <a:avLst/>
+            </a:prstGeom>
+            <a:noFill/>
+          </p:spPr>
+          <p:txBody>
+            <a:bodyPr wrap="square">
+              <a:spAutoFit/>
+            </a:bodyPr>
+            <a:lstStyle/>
+            <a:p>
+              <a:pPr algn="ctr">
+                <a:lnSpc>
+                  <a:spcPct val="150000"/>
+                </a:lnSpc>
+              </a:pPr>
+              <a:r>
+                <a:rPr lang="en-US" sz="1600" dirty="0">
+                  <a:latin typeface="Arial" panose="020B0604020202020204" pitchFamily="34" charset="0"/>
+                  <a:cs typeface="Arial" panose="020B0604020202020204" pitchFamily="34" charset="0"/>
+                </a:rPr>
+                <a:t>Not recommended: </a:t>
+              </a:r>
+              <a:r>
+                <a:rPr lang="en-US" sz="1600" dirty="0">
+                  <a:solidFill>
+                    <a:srgbClr val="ECA9A1"/>
+                  </a:solidFill>
+                  <a:latin typeface="Arial" panose="020B0604020202020204" pitchFamily="34" charset="0"/>
+                  <a:cs typeface="Arial" panose="020B0604020202020204" pitchFamily="34" charset="0"/>
+                </a:rPr>
+                <a:t>Annual </a:t>
+              </a:r>
+              <a:r>
+                <a:rPr lang="en-US" sz="1600" dirty="0">
+                  <a:latin typeface="Arial" panose="020B0604020202020204" pitchFamily="34" charset="0"/>
+                  <a:cs typeface="Arial" panose="020B0604020202020204" pitchFamily="34" charset="0"/>
+                </a:rPr>
+                <a:t>&amp;</a:t>
+              </a:r>
+            </a:p>
+            <a:p>
+              <a:pPr algn="ctr">
+                <a:lnSpc>
+                  <a:spcPct val="150000"/>
+                </a:lnSpc>
+              </a:pPr>
+              <a:r>
+                <a:rPr lang="en-US" sz="1600" dirty="0">
+                  <a:solidFill>
+                    <a:srgbClr val="EBB16D"/>
+                  </a:solidFill>
+                  <a:latin typeface="Arial" panose="020B0604020202020204" pitchFamily="34" charset="0"/>
+                  <a:cs typeface="Arial" panose="020B0604020202020204" pitchFamily="34" charset="0"/>
+                </a:rPr>
+                <a:t>Seasonal </a:t>
+              </a:r>
+              <a:r>
+                <a:rPr lang="en-US" sz="1600" dirty="0">
+                  <a:latin typeface="Arial" panose="020B0604020202020204" pitchFamily="34" charset="0"/>
+                  <a:cs typeface="Arial" panose="020B0604020202020204" pitchFamily="34" charset="0"/>
+                </a:rPr>
+                <a:t>&amp;</a:t>
+              </a:r>
+              <a:r>
+                <a:rPr lang="en-US" sz="1600" dirty="0">
+                  <a:solidFill>
+                    <a:srgbClr val="EBB16D"/>
+                  </a:solidFill>
+                  <a:latin typeface="Arial" panose="020B0604020202020204" pitchFamily="34" charset="0"/>
+                  <a:cs typeface="Arial" panose="020B0604020202020204" pitchFamily="34" charset="0"/>
+                </a:rPr>
+                <a:t> </a:t>
+              </a:r>
+            </a:p>
+            <a:p>
+              <a:pPr algn="ctr">
+                <a:lnSpc>
+                  <a:spcPct val="150000"/>
+                </a:lnSpc>
+              </a:pPr>
+              <a:r>
+                <a:rPr lang="en-US" sz="1600" dirty="0">
+                  <a:solidFill>
+                    <a:srgbClr val="BEB9D4"/>
+                  </a:solidFill>
+                  <a:latin typeface="Arial" panose="020B0604020202020204" pitchFamily="34" charset="0"/>
+                  <a:cs typeface="Arial" panose="020B0604020202020204" pitchFamily="34" charset="0"/>
+                </a:rPr>
+                <a:t>Time-of-day avg</a:t>
+              </a:r>
+              <a:endParaRPr lang="en-US" sz="1600" dirty="0">
+                <a:latin typeface="Arial" panose="020B0604020202020204" pitchFamily="34" charset="0"/>
+                <a:cs typeface="Arial" panose="020B0604020202020204" pitchFamily="34" charset="0"/>
+              </a:endParaRPr>
+            </a:p>
+          </p:txBody>
+        </p:sp>
+        <p:sp>
+          <p:nvSpPr>
+            <p:cNvPr id="1500" name="TextBox 1499">
+              <a:extLst>
+                <a:ext uri="{FF2B5EF4-FFF2-40B4-BE49-F238E27FC236}">
+                  <a16:creationId xmlns:a16="http://schemas.microsoft.com/office/drawing/2014/main" id="{3E88AA81-7848-3AAA-F1E1-62DF232FE2A0}"/>
+                </a:ext>
+              </a:extLst>
+            </p:cNvPr>
+            <p:cNvSpPr txBox="1"/>
+            <p:nvPr/>
+          </p:nvSpPr>
+          <p:spPr>
+            <a:xfrm>
+              <a:off x="9585232" y="4434362"/>
+              <a:ext cx="2161363" cy="1154675"/>
+            </a:xfrm>
+            <a:prstGeom prst="rect">
+              <a:avLst/>
+            </a:prstGeom>
+            <a:noFill/>
+          </p:spPr>
+          <p:txBody>
+            <a:bodyPr wrap="square">
+              <a:spAutoFit/>
+            </a:bodyPr>
+            <a:lstStyle/>
+            <a:p>
+              <a:pPr algn="ctr">
+                <a:lnSpc>
+                  <a:spcPct val="150000"/>
+                </a:lnSpc>
+              </a:pPr>
+              <a:r>
+                <a:rPr lang="en-US" sz="1600" b="1" dirty="0">
+                  <a:latin typeface="Arial" panose="020B0604020202020204" pitchFamily="34" charset="0"/>
+                  <a:cs typeface="Arial" panose="020B0604020202020204" pitchFamily="34" charset="0"/>
+                </a:rPr>
+                <a:t>Recommended: </a:t>
+              </a:r>
+              <a:r>
+                <a:rPr lang="en-US" sz="1600" b="1" dirty="0">
+                  <a:solidFill>
+                    <a:srgbClr val="88ADCA"/>
+                  </a:solidFill>
+                  <a:latin typeface="Arial" panose="020B0604020202020204" pitchFamily="34" charset="0"/>
+                  <a:cs typeface="Arial" panose="020B0604020202020204" pitchFamily="34" charset="0"/>
+                </a:rPr>
+                <a:t>season-hour </a:t>
+              </a:r>
+              <a:r>
+                <a:rPr lang="en-US" sz="1600" b="1" dirty="0">
+                  <a:latin typeface="Arial" panose="020B0604020202020204" pitchFamily="34" charset="0"/>
+                  <a:cs typeface="Arial" panose="020B0604020202020204" pitchFamily="34" charset="0"/>
+                </a:rPr>
+                <a:t>&amp;</a:t>
+              </a:r>
+              <a:r>
+                <a:rPr lang="en-US" sz="1600" b="1" dirty="0">
+                  <a:solidFill>
+                    <a:srgbClr val="88ADCA"/>
+                  </a:solidFill>
+                  <a:latin typeface="Arial" panose="020B0604020202020204" pitchFamily="34" charset="0"/>
+                  <a:cs typeface="Arial" panose="020B0604020202020204" pitchFamily="34" charset="0"/>
+                </a:rPr>
+                <a:t> </a:t>
+              </a:r>
+              <a:r>
+                <a:rPr lang="en-US" sz="1600" b="1" dirty="0">
+                  <a:solidFill>
+                    <a:srgbClr val="8DC8BE"/>
+                  </a:solidFill>
+                  <a:latin typeface="Arial" panose="020B0604020202020204" pitchFamily="34" charset="0"/>
+                  <a:cs typeface="Arial" panose="020B0604020202020204" pitchFamily="34" charset="0"/>
+                </a:rPr>
+                <a:t>month-hour avg</a:t>
+              </a:r>
+              <a:endParaRPr lang="en-US" sz="1600" b="1" dirty="0">
+                <a:latin typeface="Arial" panose="020B0604020202020204" pitchFamily="34" charset="0"/>
+                <a:cs typeface="Arial" panose="020B0604020202020204" pitchFamily="34" charset="0"/>
+              </a:endParaRPr>
+            </a:p>
+          </p:txBody>
+        </p:sp>
+        <p:grpSp>
+          <p:nvGrpSpPr>
+            <p:cNvPr id="1424" name="Group 1423">
+              <a:extLst>
+                <a:ext uri="{FF2B5EF4-FFF2-40B4-BE49-F238E27FC236}">
+                  <a16:creationId xmlns:a16="http://schemas.microsoft.com/office/drawing/2014/main" id="{2FDE8D2B-0EF2-785E-EA85-C5AC5C476D15}"/>
+                </a:ext>
+              </a:extLst>
+            </p:cNvPr>
+            <p:cNvGrpSpPr>
+              <a:grpSpLocks noChangeAspect="1"/>
+            </p:cNvGrpSpPr>
+            <p:nvPr/>
+          </p:nvGrpSpPr>
+          <p:grpSpPr>
+            <a:xfrm rot="5400000">
+              <a:off x="8984469" y="2221258"/>
+              <a:ext cx="535197" cy="952938"/>
+              <a:chOff x="5294362" y="4839774"/>
+              <a:chExt cx="289151" cy="514844"/>
+            </a:xfrm>
+          </p:grpSpPr>
+          <p:sp>
+            <p:nvSpPr>
+              <p:cNvPr id="1129" name="Freeform 1128">
+                <a:extLst>
+                  <a:ext uri="{FF2B5EF4-FFF2-40B4-BE49-F238E27FC236}">
+                    <a16:creationId xmlns:a16="http://schemas.microsoft.com/office/drawing/2014/main" id="{A944156E-D16F-CE8B-7AA5-93C42D030658}"/>
+                  </a:ext>
+                </a:extLst>
+              </p:cNvPr>
+              <p:cNvSpPr/>
+              <p:nvPr/>
+            </p:nvSpPr>
+            <p:spPr>
+              <a:xfrm>
+                <a:off x="5366612" y="5328942"/>
+                <a:ext cx="144575" cy="25676"/>
+              </a:xfrm>
+              <a:custGeom>
+                <a:avLst/>
+                <a:gdLst>
+                  <a:gd name="connsiteX0" fmla="*/ 0 w 144575"/>
+                  <a:gd name="connsiteY0" fmla="*/ 0 h 25676"/>
+                  <a:gd name="connsiteX1" fmla="*/ 144576 w 144575"/>
+                  <a:gd name="connsiteY1" fmla="*/ 0 h 25676"/>
+                  <a:gd name="connsiteX2" fmla="*/ 144576 w 144575"/>
+                  <a:gd name="connsiteY2" fmla="*/ 25677 h 25676"/>
+                  <a:gd name="connsiteX3" fmla="*/ 0 w 144575"/>
+                  <a:gd name="connsiteY3" fmla="*/ 25677 h 25676"/>
+                </a:gdLst>
+                <a:ahLst/>
+                <a:cxnLst>
+                  <a:cxn ang="0">
+                    <a:pos x="connsiteX0" y="connsiteY0"/>
+                  </a:cxn>
+                  <a:cxn ang="0">
+                    <a:pos x="connsiteX1" y="connsiteY1"/>
+                  </a:cxn>
+                  <a:cxn ang="0">
+                    <a:pos x="connsiteX2" y="connsiteY2"/>
+                  </a:cxn>
+                  <a:cxn ang="0">
+                    <a:pos x="connsiteX3" y="connsiteY3"/>
+                  </a:cxn>
+                </a:cxnLst>
+                <a:rect l="l" t="t" r="r" b="b"/>
+                <a:pathLst>
+                  <a:path w="144575" h="25676">
+                    <a:moveTo>
+                      <a:pt x="0" y="0"/>
+                    </a:moveTo>
+                    <a:lnTo>
+                      <a:pt x="144576" y="0"/>
+                    </a:lnTo>
+                    <a:lnTo>
+                      <a:pt x="144576" y="25677"/>
+                    </a:lnTo>
+                    <a:lnTo>
+                      <a:pt x="0" y="25677"/>
+                    </a:lnTo>
+                    <a:close/>
+                  </a:path>
+                </a:pathLst>
+              </a:custGeom>
+              <a:solidFill>
+                <a:srgbClr val="E68B81">
+                  <a:alpha val="40000"/>
+                </a:srgbClr>
+              </a:solidFill>
+              <a:ln w="3316" cap="flat">
+                <a:solidFill>
+                  <a:srgbClr val="333333"/>
+                </a:solidFill>
+                <a:prstDash val="solid"/>
+                <a:miter/>
+              </a:ln>
+            </p:spPr>
+            <p:txBody>
+              <a:bodyPr rtlCol="0" anchor="ctr"/>
+              <a:lstStyle/>
+              <a:p>
+                <a:endParaRPr lang="en-US"/>
+              </a:p>
+            </p:txBody>
+          </p:sp>
+          <p:sp>
+            <p:nvSpPr>
+              <p:cNvPr id="1130" name="Freeform 1129">
+                <a:extLst>
+                  <a:ext uri="{FF2B5EF4-FFF2-40B4-BE49-F238E27FC236}">
+                    <a16:creationId xmlns:a16="http://schemas.microsoft.com/office/drawing/2014/main" id="{3B72AB75-BF9A-5F2D-7282-31AB14357663}"/>
+                  </a:ext>
+                </a:extLst>
+              </p:cNvPr>
+              <p:cNvSpPr/>
+              <p:nvPr/>
+            </p:nvSpPr>
+            <p:spPr>
+              <a:xfrm>
+                <a:off x="5330448" y="5286610"/>
+                <a:ext cx="216902" cy="42331"/>
+              </a:xfrm>
+              <a:custGeom>
+                <a:avLst/>
+                <a:gdLst>
+                  <a:gd name="connsiteX0" fmla="*/ 0 w 216902"/>
+                  <a:gd name="connsiteY0" fmla="*/ 0 h 42331"/>
+                  <a:gd name="connsiteX1" fmla="*/ 216902 w 216902"/>
+                  <a:gd name="connsiteY1" fmla="*/ 0 h 42331"/>
+                  <a:gd name="connsiteX2" fmla="*/ 216902 w 216902"/>
+                  <a:gd name="connsiteY2" fmla="*/ 42332 h 42331"/>
+                  <a:gd name="connsiteX3" fmla="*/ 0 w 216902"/>
+                  <a:gd name="connsiteY3" fmla="*/ 42332 h 42331"/>
+                </a:gdLst>
+                <a:ahLst/>
+                <a:cxnLst>
+                  <a:cxn ang="0">
+                    <a:pos x="connsiteX0" y="connsiteY0"/>
+                  </a:cxn>
+                  <a:cxn ang="0">
+                    <a:pos x="connsiteX1" y="connsiteY1"/>
+                  </a:cxn>
+                  <a:cxn ang="0">
+                    <a:pos x="connsiteX2" y="connsiteY2"/>
+                  </a:cxn>
+                  <a:cxn ang="0">
+                    <a:pos x="connsiteX3" y="connsiteY3"/>
+                  </a:cxn>
+                </a:cxnLst>
+                <a:rect l="l" t="t" r="r" b="b"/>
+                <a:pathLst>
+                  <a:path w="216902" h="42331">
+                    <a:moveTo>
+                      <a:pt x="0" y="0"/>
+                    </a:moveTo>
+                    <a:lnTo>
+                      <a:pt x="216902" y="0"/>
+                    </a:lnTo>
+                    <a:lnTo>
+                      <a:pt x="216902" y="42332"/>
+                    </a:lnTo>
+                    <a:lnTo>
+                      <a:pt x="0" y="42332"/>
+                    </a:lnTo>
+                    <a:close/>
+                  </a:path>
+                </a:pathLst>
+              </a:custGeom>
+              <a:solidFill>
+                <a:srgbClr val="E68B81">
+                  <a:alpha val="40000"/>
+                </a:srgbClr>
+              </a:solidFill>
+              <a:ln w="3316" cap="flat">
+                <a:solidFill>
+                  <a:srgbClr val="333333"/>
+                </a:solidFill>
+                <a:prstDash val="solid"/>
+                <a:miter/>
+              </a:ln>
+            </p:spPr>
+            <p:txBody>
+              <a:bodyPr rtlCol="0" anchor="ctr"/>
+              <a:lstStyle/>
+              <a:p>
+                <a:endParaRPr lang="en-US"/>
+              </a:p>
+            </p:txBody>
+          </p:sp>
+          <p:sp>
+            <p:nvSpPr>
+              <p:cNvPr id="1131" name="Freeform 1130">
+                <a:extLst>
+                  <a:ext uri="{FF2B5EF4-FFF2-40B4-BE49-F238E27FC236}">
+                    <a16:creationId xmlns:a16="http://schemas.microsoft.com/office/drawing/2014/main" id="{AEF20299-C270-6CD0-50E4-AE7D0CF6D919}"/>
+                  </a:ext>
+                </a:extLst>
+              </p:cNvPr>
+              <p:cNvSpPr/>
+              <p:nvPr/>
+            </p:nvSpPr>
+            <p:spPr>
+              <a:xfrm>
+                <a:off x="5294362" y="5214977"/>
+                <a:ext cx="289151" cy="71632"/>
+              </a:xfrm>
+              <a:custGeom>
+                <a:avLst/>
+                <a:gdLst>
+                  <a:gd name="connsiteX0" fmla="*/ 0 w 289151"/>
+                  <a:gd name="connsiteY0" fmla="*/ 0 h 71632"/>
+                  <a:gd name="connsiteX1" fmla="*/ 289152 w 289151"/>
+                  <a:gd name="connsiteY1" fmla="*/ 0 h 71632"/>
+                  <a:gd name="connsiteX2" fmla="*/ 289152 w 289151"/>
+                  <a:gd name="connsiteY2" fmla="*/ 71633 h 71632"/>
+                  <a:gd name="connsiteX3" fmla="*/ 0 w 289151"/>
+                  <a:gd name="connsiteY3" fmla="*/ 71633 h 71632"/>
+                </a:gdLst>
+                <a:ahLst/>
+                <a:cxnLst>
+                  <a:cxn ang="0">
+                    <a:pos x="connsiteX0" y="connsiteY0"/>
+                  </a:cxn>
+                  <a:cxn ang="0">
+                    <a:pos x="connsiteX1" y="connsiteY1"/>
+                  </a:cxn>
+                  <a:cxn ang="0">
+                    <a:pos x="connsiteX2" y="connsiteY2"/>
+                  </a:cxn>
+                  <a:cxn ang="0">
+                    <a:pos x="connsiteX3" y="connsiteY3"/>
+                  </a:cxn>
+                </a:cxnLst>
+                <a:rect l="l" t="t" r="r" b="b"/>
+                <a:pathLst>
+                  <a:path w="289151" h="71632">
+                    <a:moveTo>
+                      <a:pt x="0" y="0"/>
+                    </a:moveTo>
+                    <a:lnTo>
+                      <a:pt x="289152" y="0"/>
+                    </a:lnTo>
+                    <a:lnTo>
+                      <a:pt x="289152" y="71633"/>
+                    </a:lnTo>
+                    <a:lnTo>
+                      <a:pt x="0" y="71633"/>
+                    </a:lnTo>
+                    <a:close/>
+                  </a:path>
+                </a:pathLst>
+              </a:custGeom>
+              <a:solidFill>
+                <a:srgbClr val="E68B81">
+                  <a:alpha val="40000"/>
+                </a:srgbClr>
+              </a:solidFill>
+              <a:ln w="3316" cap="flat">
+                <a:solidFill>
+                  <a:srgbClr val="333333"/>
+                </a:solidFill>
+                <a:prstDash val="solid"/>
+                <a:miter/>
+              </a:ln>
+            </p:spPr>
+            <p:txBody>
+              <a:bodyPr rtlCol="0" anchor="ctr"/>
+              <a:lstStyle/>
+              <a:p>
+                <a:endParaRPr lang="en-US"/>
+              </a:p>
+            </p:txBody>
+          </p:sp>
+          <p:sp>
+            <p:nvSpPr>
+              <p:cNvPr id="1132" name="Freeform 1131">
+                <a:extLst>
+                  <a:ext uri="{FF2B5EF4-FFF2-40B4-BE49-F238E27FC236}">
+                    <a16:creationId xmlns:a16="http://schemas.microsoft.com/office/drawing/2014/main" id="{D0A157B1-8E1B-D610-1C71-BFA40E570910}"/>
+                  </a:ext>
+                </a:extLst>
+              </p:cNvPr>
+              <p:cNvSpPr/>
+              <p:nvPr/>
+            </p:nvSpPr>
+            <p:spPr>
+              <a:xfrm>
+                <a:off x="5294362" y="5103558"/>
+                <a:ext cx="289151" cy="111419"/>
+              </a:xfrm>
+              <a:custGeom>
+                <a:avLst/>
+                <a:gdLst>
+                  <a:gd name="connsiteX0" fmla="*/ 0 w 289151"/>
+                  <a:gd name="connsiteY0" fmla="*/ 0 h 111419"/>
+                  <a:gd name="connsiteX1" fmla="*/ 289152 w 289151"/>
+                  <a:gd name="connsiteY1" fmla="*/ 0 h 111419"/>
+                  <a:gd name="connsiteX2" fmla="*/ 289152 w 289151"/>
+                  <a:gd name="connsiteY2" fmla="*/ 111420 h 111419"/>
+                  <a:gd name="connsiteX3" fmla="*/ 0 w 289151"/>
+                  <a:gd name="connsiteY3" fmla="*/ 111420 h 111419"/>
+                </a:gdLst>
+                <a:ahLst/>
+                <a:cxnLst>
+                  <a:cxn ang="0">
+                    <a:pos x="connsiteX0" y="connsiteY0"/>
+                  </a:cxn>
+                  <a:cxn ang="0">
+                    <a:pos x="connsiteX1" y="connsiteY1"/>
+                  </a:cxn>
+                  <a:cxn ang="0">
+                    <a:pos x="connsiteX2" y="connsiteY2"/>
+                  </a:cxn>
+                  <a:cxn ang="0">
+                    <a:pos x="connsiteX3" y="connsiteY3"/>
+                  </a:cxn>
+                </a:cxnLst>
+                <a:rect l="l" t="t" r="r" b="b"/>
+                <a:pathLst>
+                  <a:path w="289151" h="111419">
+                    <a:moveTo>
+                      <a:pt x="0" y="0"/>
+                    </a:moveTo>
+                    <a:lnTo>
+                      <a:pt x="289152" y="0"/>
+                    </a:lnTo>
+                    <a:lnTo>
+                      <a:pt x="289152" y="111420"/>
+                    </a:lnTo>
+                    <a:lnTo>
+                      <a:pt x="0" y="111420"/>
+                    </a:lnTo>
+                    <a:close/>
+                  </a:path>
+                </a:pathLst>
+              </a:custGeom>
+              <a:solidFill>
+                <a:srgbClr val="E68B81">
+                  <a:alpha val="40000"/>
+                </a:srgbClr>
+              </a:solidFill>
+              <a:ln w="3316" cap="flat">
+                <a:solidFill>
+                  <a:srgbClr val="333333"/>
+                </a:solidFill>
+                <a:prstDash val="solid"/>
+                <a:miter/>
+              </a:ln>
+            </p:spPr>
+            <p:txBody>
+              <a:bodyPr rtlCol="0" anchor="ctr"/>
+              <a:lstStyle/>
+              <a:p>
+                <a:endParaRPr lang="en-US"/>
+              </a:p>
+            </p:txBody>
+          </p:sp>
+          <p:sp>
+            <p:nvSpPr>
+              <p:cNvPr id="1133" name="Freeform 1132">
+                <a:extLst>
+                  <a:ext uri="{FF2B5EF4-FFF2-40B4-BE49-F238E27FC236}">
+                    <a16:creationId xmlns:a16="http://schemas.microsoft.com/office/drawing/2014/main" id="{D0C0C8FC-09FA-D418-0808-A5C03D72B786}"/>
+                  </a:ext>
+                </a:extLst>
+              </p:cNvPr>
+              <p:cNvSpPr/>
+              <p:nvPr/>
+            </p:nvSpPr>
+            <p:spPr>
+              <a:xfrm>
+                <a:off x="5330448" y="4968389"/>
+                <a:ext cx="216902" cy="135168"/>
+              </a:xfrm>
+              <a:custGeom>
+                <a:avLst/>
+                <a:gdLst>
+                  <a:gd name="connsiteX0" fmla="*/ 0 w 216902"/>
+                  <a:gd name="connsiteY0" fmla="*/ 0 h 135168"/>
+                  <a:gd name="connsiteX1" fmla="*/ 216902 w 216902"/>
+                  <a:gd name="connsiteY1" fmla="*/ 0 h 135168"/>
+                  <a:gd name="connsiteX2" fmla="*/ 216902 w 216902"/>
+                  <a:gd name="connsiteY2" fmla="*/ 135169 h 135168"/>
+                  <a:gd name="connsiteX3" fmla="*/ 0 w 216902"/>
+                  <a:gd name="connsiteY3" fmla="*/ 135169 h 135168"/>
+                </a:gdLst>
+                <a:ahLst/>
+                <a:cxnLst>
+                  <a:cxn ang="0">
+                    <a:pos x="connsiteX0" y="connsiteY0"/>
+                  </a:cxn>
+                  <a:cxn ang="0">
+                    <a:pos x="connsiteX1" y="connsiteY1"/>
+                  </a:cxn>
+                  <a:cxn ang="0">
+                    <a:pos x="connsiteX2" y="connsiteY2"/>
+                  </a:cxn>
+                  <a:cxn ang="0">
+                    <a:pos x="connsiteX3" y="connsiteY3"/>
+                  </a:cxn>
+                </a:cxnLst>
+                <a:rect l="l" t="t" r="r" b="b"/>
+                <a:pathLst>
+                  <a:path w="216902" h="135168">
+                    <a:moveTo>
+                      <a:pt x="0" y="0"/>
+                    </a:moveTo>
+                    <a:lnTo>
+                      <a:pt x="216902" y="0"/>
+                    </a:lnTo>
+                    <a:lnTo>
+                      <a:pt x="216902" y="135169"/>
+                    </a:lnTo>
+                    <a:lnTo>
+                      <a:pt x="0" y="135169"/>
+                    </a:lnTo>
+                    <a:close/>
+                  </a:path>
+                </a:pathLst>
+              </a:custGeom>
+              <a:solidFill>
+                <a:srgbClr val="E68B81">
+                  <a:alpha val="40000"/>
+                </a:srgbClr>
+              </a:solidFill>
+              <a:ln w="3316" cap="flat">
+                <a:solidFill>
+                  <a:srgbClr val="333333"/>
+                </a:solidFill>
+                <a:prstDash val="solid"/>
+                <a:miter/>
+              </a:ln>
+            </p:spPr>
+            <p:txBody>
+              <a:bodyPr rtlCol="0" anchor="ctr"/>
+              <a:lstStyle/>
+              <a:p>
+                <a:endParaRPr lang="en-US"/>
+              </a:p>
+            </p:txBody>
+          </p:sp>
+          <p:sp>
+            <p:nvSpPr>
+              <p:cNvPr id="1134" name="Freeform 1133">
+                <a:extLst>
+                  <a:ext uri="{FF2B5EF4-FFF2-40B4-BE49-F238E27FC236}">
+                    <a16:creationId xmlns:a16="http://schemas.microsoft.com/office/drawing/2014/main" id="{A0BB7091-D0D8-455A-D6C4-806C89A2CFFB}"/>
+                  </a:ext>
+                </a:extLst>
+              </p:cNvPr>
+              <p:cNvSpPr/>
+              <p:nvPr/>
+            </p:nvSpPr>
+            <p:spPr>
+              <a:xfrm>
+                <a:off x="5366612" y="4839774"/>
+                <a:ext cx="144575" cy="128614"/>
+              </a:xfrm>
+              <a:custGeom>
+                <a:avLst/>
+                <a:gdLst>
+                  <a:gd name="connsiteX0" fmla="*/ 0 w 144575"/>
+                  <a:gd name="connsiteY0" fmla="*/ 0 h 128614"/>
+                  <a:gd name="connsiteX1" fmla="*/ 144576 w 144575"/>
+                  <a:gd name="connsiteY1" fmla="*/ 0 h 128614"/>
+                  <a:gd name="connsiteX2" fmla="*/ 144576 w 144575"/>
+                  <a:gd name="connsiteY2" fmla="*/ 128615 h 128614"/>
+                  <a:gd name="connsiteX3" fmla="*/ 0 w 144575"/>
+                  <a:gd name="connsiteY3" fmla="*/ 128615 h 128614"/>
+                </a:gdLst>
+                <a:ahLst/>
+                <a:cxnLst>
+                  <a:cxn ang="0">
+                    <a:pos x="connsiteX0" y="connsiteY0"/>
+                  </a:cxn>
+                  <a:cxn ang="0">
+                    <a:pos x="connsiteX1" y="connsiteY1"/>
+                  </a:cxn>
+                  <a:cxn ang="0">
+                    <a:pos x="connsiteX2" y="connsiteY2"/>
+                  </a:cxn>
+                  <a:cxn ang="0">
+                    <a:pos x="connsiteX3" y="connsiteY3"/>
+                  </a:cxn>
+                </a:cxnLst>
+                <a:rect l="l" t="t" r="r" b="b"/>
+                <a:pathLst>
+                  <a:path w="144575" h="128614">
+                    <a:moveTo>
+                      <a:pt x="0" y="0"/>
+                    </a:moveTo>
+                    <a:lnTo>
+                      <a:pt x="144576" y="0"/>
+                    </a:lnTo>
+                    <a:lnTo>
+                      <a:pt x="144576" y="128615"/>
+                    </a:lnTo>
+                    <a:lnTo>
+                      <a:pt x="0" y="128615"/>
+                    </a:lnTo>
+                    <a:close/>
+                  </a:path>
+                </a:pathLst>
+              </a:custGeom>
+              <a:solidFill>
+                <a:srgbClr val="E68B81">
+                  <a:alpha val="40000"/>
+                </a:srgbClr>
+              </a:solidFill>
+              <a:ln w="3316" cap="flat">
+                <a:solidFill>
+                  <a:srgbClr val="333333"/>
+                </a:solidFill>
+                <a:prstDash val="solid"/>
+                <a:miter/>
+              </a:ln>
+            </p:spPr>
+            <p:txBody>
+              <a:bodyPr rtlCol="0" anchor="ctr"/>
+              <a:lstStyle/>
+              <a:p>
+                <a:endParaRPr lang="en-US"/>
+              </a:p>
+            </p:txBody>
+          </p:sp>
+          <p:sp>
+            <p:nvSpPr>
+              <p:cNvPr id="1135" name="Freeform 1134">
+                <a:extLst>
+                  <a:ext uri="{FF2B5EF4-FFF2-40B4-BE49-F238E27FC236}">
+                    <a16:creationId xmlns:a16="http://schemas.microsoft.com/office/drawing/2014/main" id="{90604DC1-F1DB-1927-F026-63C963465AAA}"/>
+                  </a:ext>
+                </a:extLst>
+              </p:cNvPr>
+              <p:cNvSpPr/>
+              <p:nvPr/>
+            </p:nvSpPr>
+            <p:spPr>
+              <a:xfrm>
+                <a:off x="5294362" y="5214977"/>
+                <a:ext cx="289151" cy="7710"/>
+              </a:xfrm>
+              <a:custGeom>
+                <a:avLst/>
+                <a:gdLst>
+                  <a:gd name="connsiteX0" fmla="*/ 0 w 289151"/>
+                  <a:gd name="connsiteY0" fmla="*/ 0 h 7710"/>
+                  <a:gd name="connsiteX1" fmla="*/ 289152 w 289151"/>
+                  <a:gd name="connsiteY1" fmla="*/ 0 h 7710"/>
+                </a:gdLst>
+                <a:ahLst/>
+                <a:cxnLst>
+                  <a:cxn ang="0">
+                    <a:pos x="connsiteX0" y="connsiteY0"/>
+                  </a:cxn>
+                  <a:cxn ang="0">
+                    <a:pos x="connsiteX1" y="connsiteY1"/>
+                  </a:cxn>
+                </a:cxnLst>
+                <a:rect l="l" t="t" r="r" b="b"/>
+                <a:pathLst>
+                  <a:path w="289151" h="7710">
+                    <a:moveTo>
+                      <a:pt x="0" y="0"/>
+                    </a:moveTo>
+                    <a:lnTo>
+                      <a:pt x="289152" y="0"/>
+                    </a:lnTo>
+                  </a:path>
+                </a:pathLst>
+              </a:custGeom>
+              <a:ln w="3316" cap="flat">
+                <a:solidFill>
+                  <a:srgbClr val="E68B81">
+                    <a:alpha val="40000"/>
+                  </a:srgbClr>
+                </a:solidFill>
+                <a:prstDash val="solid"/>
+                <a:round/>
+              </a:ln>
+            </p:spPr>
+            <p:txBody>
+              <a:bodyPr rtlCol="0" anchor="ctr"/>
+              <a:lstStyle/>
+              <a:p>
+                <a:endParaRPr lang="en-US"/>
+              </a:p>
+            </p:txBody>
+          </p:sp>
+        </p:grpSp>
+        <p:grpSp>
+          <p:nvGrpSpPr>
+            <p:cNvPr id="1425" name="Group 1424">
+              <a:extLst>
+                <a:ext uri="{FF2B5EF4-FFF2-40B4-BE49-F238E27FC236}">
+                  <a16:creationId xmlns:a16="http://schemas.microsoft.com/office/drawing/2014/main" id="{8BB0EF98-85FC-CB6C-0A4B-C7516C15C31F}"/>
+                </a:ext>
+              </a:extLst>
+            </p:cNvPr>
+            <p:cNvGrpSpPr>
+              <a:grpSpLocks noChangeAspect="1"/>
+            </p:cNvGrpSpPr>
+            <p:nvPr/>
+          </p:nvGrpSpPr>
+          <p:grpSpPr>
+            <a:xfrm rot="5400000">
+              <a:off x="8888774" y="2931197"/>
+              <a:ext cx="535197" cy="761551"/>
+              <a:chOff x="5602791" y="4950731"/>
+              <a:chExt cx="289151" cy="411443"/>
+            </a:xfrm>
+          </p:grpSpPr>
+          <p:sp>
+            <p:nvSpPr>
+              <p:cNvPr id="1143" name="Freeform 1142">
+                <a:extLst>
+                  <a:ext uri="{FF2B5EF4-FFF2-40B4-BE49-F238E27FC236}">
+                    <a16:creationId xmlns:a16="http://schemas.microsoft.com/office/drawing/2014/main" id="{8DD58D50-E87F-C4B4-812F-96E682BFA2D0}"/>
+                  </a:ext>
+                </a:extLst>
+              </p:cNvPr>
+              <p:cNvSpPr/>
+              <p:nvPr/>
+            </p:nvSpPr>
+            <p:spPr>
+              <a:xfrm>
+                <a:off x="5675040" y="5352922"/>
+                <a:ext cx="144575" cy="9252"/>
+              </a:xfrm>
+              <a:custGeom>
+                <a:avLst/>
+                <a:gdLst>
+                  <a:gd name="connsiteX0" fmla="*/ 0 w 144575"/>
+                  <a:gd name="connsiteY0" fmla="*/ 0 h 9252"/>
+                  <a:gd name="connsiteX1" fmla="*/ 144576 w 144575"/>
+                  <a:gd name="connsiteY1" fmla="*/ 0 h 9252"/>
+                  <a:gd name="connsiteX2" fmla="*/ 144576 w 144575"/>
+                  <a:gd name="connsiteY2" fmla="*/ 9253 h 9252"/>
+                  <a:gd name="connsiteX3" fmla="*/ 0 w 144575"/>
+                  <a:gd name="connsiteY3" fmla="*/ 9253 h 9252"/>
+                </a:gdLst>
+                <a:ahLst/>
+                <a:cxnLst>
+                  <a:cxn ang="0">
+                    <a:pos x="connsiteX0" y="connsiteY0"/>
+                  </a:cxn>
+                  <a:cxn ang="0">
+                    <a:pos x="connsiteX1" y="connsiteY1"/>
+                  </a:cxn>
+                  <a:cxn ang="0">
+                    <a:pos x="connsiteX2" y="connsiteY2"/>
+                  </a:cxn>
+                  <a:cxn ang="0">
+                    <a:pos x="connsiteX3" y="connsiteY3"/>
+                  </a:cxn>
+                </a:cxnLst>
+                <a:rect l="l" t="t" r="r" b="b"/>
+                <a:pathLst>
+                  <a:path w="144575" h="9252">
+                    <a:moveTo>
+                      <a:pt x="0" y="0"/>
+                    </a:moveTo>
+                    <a:lnTo>
+                      <a:pt x="144576" y="0"/>
+                    </a:lnTo>
+                    <a:lnTo>
+                      <a:pt x="144576" y="9253"/>
+                    </a:lnTo>
+                    <a:lnTo>
+                      <a:pt x="0" y="9253"/>
+                    </a:lnTo>
+                    <a:close/>
+                  </a:path>
+                </a:pathLst>
+              </a:custGeom>
+              <a:solidFill>
+                <a:srgbClr val="EAAA60">
+                  <a:alpha val="40000"/>
+                </a:srgbClr>
+              </a:solidFill>
+              <a:ln w="3316" cap="flat">
+                <a:solidFill>
+                  <a:srgbClr val="333333"/>
+                </a:solidFill>
+                <a:prstDash val="solid"/>
+                <a:miter/>
+              </a:ln>
+            </p:spPr>
+            <p:txBody>
+              <a:bodyPr rtlCol="0" anchor="ctr"/>
+              <a:lstStyle/>
+              <a:p>
+                <a:endParaRPr lang="en-US"/>
+              </a:p>
+            </p:txBody>
+          </p:sp>
+          <p:sp>
+            <p:nvSpPr>
+              <p:cNvPr id="1144" name="Freeform 1143">
+                <a:extLst>
+                  <a:ext uri="{FF2B5EF4-FFF2-40B4-BE49-F238E27FC236}">
+                    <a16:creationId xmlns:a16="http://schemas.microsoft.com/office/drawing/2014/main" id="{0DDE59A3-A121-3A3F-2119-1FC473F197F7}"/>
+                  </a:ext>
+                </a:extLst>
+              </p:cNvPr>
+              <p:cNvSpPr/>
+              <p:nvPr/>
+            </p:nvSpPr>
+            <p:spPr>
+              <a:xfrm>
+                <a:off x="5638954" y="5333491"/>
+                <a:ext cx="216902" cy="19430"/>
+              </a:xfrm>
+              <a:custGeom>
+                <a:avLst/>
+                <a:gdLst>
+                  <a:gd name="connsiteX0" fmla="*/ 0 w 216902"/>
+                  <a:gd name="connsiteY0" fmla="*/ 0 h 19430"/>
+                  <a:gd name="connsiteX1" fmla="*/ 216902 w 216902"/>
+                  <a:gd name="connsiteY1" fmla="*/ 0 h 19430"/>
+                  <a:gd name="connsiteX2" fmla="*/ 216902 w 216902"/>
+                  <a:gd name="connsiteY2" fmla="*/ 19431 h 19430"/>
+                  <a:gd name="connsiteX3" fmla="*/ 0 w 216902"/>
+                  <a:gd name="connsiteY3" fmla="*/ 19431 h 19430"/>
+                </a:gdLst>
+                <a:ahLst/>
+                <a:cxnLst>
+                  <a:cxn ang="0">
+                    <a:pos x="connsiteX0" y="connsiteY0"/>
+                  </a:cxn>
+                  <a:cxn ang="0">
+                    <a:pos x="connsiteX1" y="connsiteY1"/>
+                  </a:cxn>
+                  <a:cxn ang="0">
+                    <a:pos x="connsiteX2" y="connsiteY2"/>
+                  </a:cxn>
+                  <a:cxn ang="0">
+                    <a:pos x="connsiteX3" y="connsiteY3"/>
+                  </a:cxn>
+                </a:cxnLst>
+                <a:rect l="l" t="t" r="r" b="b"/>
+                <a:pathLst>
+                  <a:path w="216902" h="19430">
+                    <a:moveTo>
+                      <a:pt x="0" y="0"/>
+                    </a:moveTo>
+                    <a:lnTo>
+                      <a:pt x="216902" y="0"/>
+                    </a:lnTo>
+                    <a:lnTo>
+                      <a:pt x="216902" y="19431"/>
+                    </a:lnTo>
+                    <a:lnTo>
+                      <a:pt x="0" y="19431"/>
+                    </a:lnTo>
+                    <a:close/>
+                  </a:path>
+                </a:pathLst>
+              </a:custGeom>
+              <a:solidFill>
+                <a:srgbClr val="EAAA60">
+                  <a:alpha val="40000"/>
+                </a:srgbClr>
+              </a:solidFill>
+              <a:ln w="3316" cap="flat">
+                <a:solidFill>
+                  <a:srgbClr val="333333"/>
+                </a:solidFill>
+                <a:prstDash val="solid"/>
+                <a:miter/>
+              </a:ln>
+            </p:spPr>
+            <p:txBody>
+              <a:bodyPr rtlCol="0" anchor="ctr"/>
+              <a:lstStyle/>
+              <a:p>
+                <a:endParaRPr lang="en-US"/>
+              </a:p>
+            </p:txBody>
+          </p:sp>
+          <p:sp>
+            <p:nvSpPr>
+              <p:cNvPr id="1145" name="Freeform 1144">
+                <a:extLst>
+                  <a:ext uri="{FF2B5EF4-FFF2-40B4-BE49-F238E27FC236}">
+                    <a16:creationId xmlns:a16="http://schemas.microsoft.com/office/drawing/2014/main" id="{8E3C9D15-1EB1-934E-9E2B-166C994A6DEF}"/>
+                  </a:ext>
+                </a:extLst>
+              </p:cNvPr>
+              <p:cNvSpPr/>
+              <p:nvPr/>
+            </p:nvSpPr>
+            <p:spPr>
+              <a:xfrm>
+                <a:off x="5602791" y="5280827"/>
+                <a:ext cx="289151" cy="52664"/>
+              </a:xfrm>
+              <a:custGeom>
+                <a:avLst/>
+                <a:gdLst>
+                  <a:gd name="connsiteX0" fmla="*/ 0 w 289151"/>
+                  <a:gd name="connsiteY0" fmla="*/ 0 h 52664"/>
+                  <a:gd name="connsiteX1" fmla="*/ 289152 w 289151"/>
+                  <a:gd name="connsiteY1" fmla="*/ 0 h 52664"/>
+                  <a:gd name="connsiteX2" fmla="*/ 289152 w 289151"/>
+                  <a:gd name="connsiteY2" fmla="*/ 52664 h 52664"/>
+                  <a:gd name="connsiteX3" fmla="*/ 0 w 289151"/>
+                  <a:gd name="connsiteY3" fmla="*/ 52664 h 52664"/>
+                </a:gdLst>
+                <a:ahLst/>
+                <a:cxnLst>
+                  <a:cxn ang="0">
+                    <a:pos x="connsiteX0" y="connsiteY0"/>
+                  </a:cxn>
+                  <a:cxn ang="0">
+                    <a:pos x="connsiteX1" y="connsiteY1"/>
+                  </a:cxn>
+                  <a:cxn ang="0">
+                    <a:pos x="connsiteX2" y="connsiteY2"/>
+                  </a:cxn>
+                  <a:cxn ang="0">
+                    <a:pos x="connsiteX3" y="connsiteY3"/>
+                  </a:cxn>
+                </a:cxnLst>
+                <a:rect l="l" t="t" r="r" b="b"/>
+                <a:pathLst>
+                  <a:path w="289151" h="52664">
+                    <a:moveTo>
+                      <a:pt x="0" y="0"/>
+                    </a:moveTo>
+                    <a:lnTo>
+                      <a:pt x="289152" y="0"/>
+                    </a:lnTo>
+                    <a:lnTo>
+                      <a:pt x="289152" y="52664"/>
+                    </a:lnTo>
+                    <a:lnTo>
+                      <a:pt x="0" y="52664"/>
+                    </a:lnTo>
+                    <a:close/>
+                  </a:path>
+                </a:pathLst>
+              </a:custGeom>
+              <a:solidFill>
+                <a:srgbClr val="EAAA60">
+                  <a:alpha val="40000"/>
+                </a:srgbClr>
+              </a:solidFill>
+              <a:ln w="3316" cap="flat">
+                <a:solidFill>
+                  <a:srgbClr val="333333"/>
+                </a:solidFill>
+                <a:prstDash val="solid"/>
+                <a:miter/>
+              </a:ln>
+            </p:spPr>
+            <p:txBody>
+              <a:bodyPr rtlCol="0" anchor="ctr"/>
+              <a:lstStyle/>
+              <a:p>
+                <a:endParaRPr lang="en-US"/>
+              </a:p>
+            </p:txBody>
+          </p:sp>
+          <p:sp>
+            <p:nvSpPr>
+              <p:cNvPr id="1146" name="Freeform 1145">
+                <a:extLst>
+                  <a:ext uri="{FF2B5EF4-FFF2-40B4-BE49-F238E27FC236}">
+                    <a16:creationId xmlns:a16="http://schemas.microsoft.com/office/drawing/2014/main" id="{5F8C7618-D594-F63C-44FA-2493AAC09741}"/>
+                  </a:ext>
+                </a:extLst>
+              </p:cNvPr>
+              <p:cNvSpPr/>
+              <p:nvPr/>
+            </p:nvSpPr>
+            <p:spPr>
+              <a:xfrm>
+                <a:off x="5602791" y="5189147"/>
+                <a:ext cx="289151" cy="91680"/>
+              </a:xfrm>
+              <a:custGeom>
+                <a:avLst/>
+                <a:gdLst>
+                  <a:gd name="connsiteX0" fmla="*/ 0 w 289151"/>
+                  <a:gd name="connsiteY0" fmla="*/ 0 h 91680"/>
+                  <a:gd name="connsiteX1" fmla="*/ 289152 w 289151"/>
+                  <a:gd name="connsiteY1" fmla="*/ 0 h 91680"/>
+                  <a:gd name="connsiteX2" fmla="*/ 289152 w 289151"/>
+                  <a:gd name="connsiteY2" fmla="*/ 91680 h 91680"/>
+                  <a:gd name="connsiteX3" fmla="*/ 0 w 289151"/>
+                  <a:gd name="connsiteY3" fmla="*/ 91680 h 91680"/>
+                </a:gdLst>
+                <a:ahLst/>
+                <a:cxnLst>
+                  <a:cxn ang="0">
+                    <a:pos x="connsiteX0" y="connsiteY0"/>
+                  </a:cxn>
+                  <a:cxn ang="0">
+                    <a:pos x="connsiteX1" y="connsiteY1"/>
+                  </a:cxn>
+                  <a:cxn ang="0">
+                    <a:pos x="connsiteX2" y="connsiteY2"/>
+                  </a:cxn>
+                  <a:cxn ang="0">
+                    <a:pos x="connsiteX3" y="connsiteY3"/>
+                  </a:cxn>
+                </a:cxnLst>
+                <a:rect l="l" t="t" r="r" b="b"/>
+                <a:pathLst>
+                  <a:path w="289151" h="91680">
+                    <a:moveTo>
+                      <a:pt x="0" y="0"/>
+                    </a:moveTo>
+                    <a:lnTo>
+                      <a:pt x="289152" y="0"/>
+                    </a:lnTo>
+                    <a:lnTo>
+                      <a:pt x="289152" y="91680"/>
+                    </a:lnTo>
+                    <a:lnTo>
+                      <a:pt x="0" y="91680"/>
+                    </a:lnTo>
+                    <a:close/>
+                  </a:path>
+                </a:pathLst>
+              </a:custGeom>
+              <a:solidFill>
+                <a:srgbClr val="EAAA60">
+                  <a:alpha val="40000"/>
+                </a:srgbClr>
+              </a:solidFill>
+              <a:ln w="3316" cap="flat">
+                <a:solidFill>
+                  <a:srgbClr val="333333"/>
+                </a:solidFill>
+                <a:prstDash val="solid"/>
+                <a:miter/>
+              </a:ln>
+            </p:spPr>
+            <p:txBody>
+              <a:bodyPr rtlCol="0" anchor="ctr"/>
+              <a:lstStyle/>
+              <a:p>
+                <a:endParaRPr lang="en-US"/>
+              </a:p>
+            </p:txBody>
+          </p:sp>
+          <p:sp>
+            <p:nvSpPr>
+              <p:cNvPr id="1147" name="Freeform 1146">
+                <a:extLst>
+                  <a:ext uri="{FF2B5EF4-FFF2-40B4-BE49-F238E27FC236}">
+                    <a16:creationId xmlns:a16="http://schemas.microsoft.com/office/drawing/2014/main" id="{A55897DC-8FC4-C56B-72AD-76B10CC14797}"/>
+                  </a:ext>
+                </a:extLst>
+              </p:cNvPr>
+              <p:cNvSpPr/>
+              <p:nvPr/>
+            </p:nvSpPr>
+            <p:spPr>
+              <a:xfrm>
+                <a:off x="5638954" y="5071173"/>
+                <a:ext cx="216902" cy="118051"/>
+              </a:xfrm>
+              <a:custGeom>
+                <a:avLst/>
+                <a:gdLst>
+                  <a:gd name="connsiteX0" fmla="*/ 0 w 216902"/>
+                  <a:gd name="connsiteY0" fmla="*/ 0 h 118051"/>
+                  <a:gd name="connsiteX1" fmla="*/ 216902 w 216902"/>
+                  <a:gd name="connsiteY1" fmla="*/ 0 h 118051"/>
+                  <a:gd name="connsiteX2" fmla="*/ 216902 w 216902"/>
+                  <a:gd name="connsiteY2" fmla="*/ 118051 h 118051"/>
+                  <a:gd name="connsiteX3" fmla="*/ 0 w 216902"/>
+                  <a:gd name="connsiteY3" fmla="*/ 118051 h 118051"/>
+                </a:gdLst>
+                <a:ahLst/>
+                <a:cxnLst>
+                  <a:cxn ang="0">
+                    <a:pos x="connsiteX0" y="connsiteY0"/>
+                  </a:cxn>
+                  <a:cxn ang="0">
+                    <a:pos x="connsiteX1" y="connsiteY1"/>
+                  </a:cxn>
+                  <a:cxn ang="0">
+                    <a:pos x="connsiteX2" y="connsiteY2"/>
+                  </a:cxn>
+                  <a:cxn ang="0">
+                    <a:pos x="connsiteX3" y="connsiteY3"/>
+                  </a:cxn>
+                </a:cxnLst>
+                <a:rect l="l" t="t" r="r" b="b"/>
+                <a:pathLst>
+                  <a:path w="216902" h="118051">
+                    <a:moveTo>
+                      <a:pt x="0" y="0"/>
+                    </a:moveTo>
+                    <a:lnTo>
+                      <a:pt x="216902" y="0"/>
+                    </a:lnTo>
+                    <a:lnTo>
+                      <a:pt x="216902" y="118051"/>
+                    </a:lnTo>
+                    <a:lnTo>
+                      <a:pt x="0" y="118051"/>
+                    </a:lnTo>
+                    <a:close/>
+                  </a:path>
+                </a:pathLst>
+              </a:custGeom>
+              <a:solidFill>
+                <a:srgbClr val="EAAA60">
+                  <a:alpha val="40000"/>
+                </a:srgbClr>
+              </a:solidFill>
+              <a:ln w="3316" cap="flat">
+                <a:solidFill>
+                  <a:srgbClr val="333333"/>
+                </a:solidFill>
+                <a:prstDash val="solid"/>
+                <a:miter/>
+              </a:ln>
+            </p:spPr>
+            <p:txBody>
+              <a:bodyPr rtlCol="0" anchor="ctr"/>
+              <a:lstStyle/>
+              <a:p>
+                <a:endParaRPr lang="en-US"/>
+              </a:p>
+            </p:txBody>
+          </p:sp>
+          <p:sp>
+            <p:nvSpPr>
+              <p:cNvPr id="1148" name="Freeform 1147">
+                <a:extLst>
+                  <a:ext uri="{FF2B5EF4-FFF2-40B4-BE49-F238E27FC236}">
+                    <a16:creationId xmlns:a16="http://schemas.microsoft.com/office/drawing/2014/main" id="{56CF5505-14CB-733B-6716-4F3BF9E02E43}"/>
+                  </a:ext>
+                </a:extLst>
+              </p:cNvPr>
+              <p:cNvSpPr/>
+              <p:nvPr/>
+            </p:nvSpPr>
+            <p:spPr>
+              <a:xfrm>
+                <a:off x="5675040" y="4950731"/>
+                <a:ext cx="144575" cy="120364"/>
+              </a:xfrm>
+              <a:custGeom>
+                <a:avLst/>
+                <a:gdLst>
+                  <a:gd name="connsiteX0" fmla="*/ 0 w 144575"/>
+                  <a:gd name="connsiteY0" fmla="*/ 0 h 120364"/>
+                  <a:gd name="connsiteX1" fmla="*/ 144576 w 144575"/>
+                  <a:gd name="connsiteY1" fmla="*/ 0 h 120364"/>
+                  <a:gd name="connsiteX2" fmla="*/ 144576 w 144575"/>
+                  <a:gd name="connsiteY2" fmla="*/ 120364 h 120364"/>
+                  <a:gd name="connsiteX3" fmla="*/ 0 w 144575"/>
+                  <a:gd name="connsiteY3" fmla="*/ 120364 h 120364"/>
+                </a:gdLst>
+                <a:ahLst/>
+                <a:cxnLst>
+                  <a:cxn ang="0">
+                    <a:pos x="connsiteX0" y="connsiteY0"/>
+                  </a:cxn>
+                  <a:cxn ang="0">
+                    <a:pos x="connsiteX1" y="connsiteY1"/>
+                  </a:cxn>
+                  <a:cxn ang="0">
+                    <a:pos x="connsiteX2" y="connsiteY2"/>
+                  </a:cxn>
+                  <a:cxn ang="0">
+                    <a:pos x="connsiteX3" y="connsiteY3"/>
+                  </a:cxn>
+                </a:cxnLst>
+                <a:rect l="l" t="t" r="r" b="b"/>
+                <a:pathLst>
+                  <a:path w="144575" h="120364">
+                    <a:moveTo>
+                      <a:pt x="0" y="0"/>
+                    </a:moveTo>
+                    <a:lnTo>
+                      <a:pt x="144576" y="0"/>
+                    </a:lnTo>
+                    <a:lnTo>
+                      <a:pt x="144576" y="120364"/>
+                    </a:lnTo>
+                    <a:lnTo>
+                      <a:pt x="0" y="120364"/>
+                    </a:lnTo>
+                    <a:close/>
+                  </a:path>
+                </a:pathLst>
+              </a:custGeom>
+              <a:solidFill>
+                <a:srgbClr val="EAAA60">
+                  <a:alpha val="40000"/>
+                </a:srgbClr>
+              </a:solidFill>
+              <a:ln w="3316" cap="flat">
+                <a:solidFill>
+                  <a:srgbClr val="333333"/>
+                </a:solidFill>
+                <a:prstDash val="solid"/>
+                <a:miter/>
+              </a:ln>
+            </p:spPr>
+            <p:txBody>
+              <a:bodyPr rtlCol="0" anchor="ctr"/>
+              <a:lstStyle/>
+              <a:p>
+                <a:endParaRPr lang="en-US"/>
+              </a:p>
+            </p:txBody>
+          </p:sp>
+          <p:sp>
+            <p:nvSpPr>
+              <p:cNvPr id="1149" name="Freeform 1148">
+                <a:extLst>
+                  <a:ext uri="{FF2B5EF4-FFF2-40B4-BE49-F238E27FC236}">
+                    <a16:creationId xmlns:a16="http://schemas.microsoft.com/office/drawing/2014/main" id="{9F41C8D3-7CE7-EED4-C28F-CDD9B7085644}"/>
+                  </a:ext>
+                </a:extLst>
+              </p:cNvPr>
+              <p:cNvSpPr/>
+              <p:nvPr/>
+            </p:nvSpPr>
+            <p:spPr>
+              <a:xfrm>
+                <a:off x="5602791" y="5280827"/>
+                <a:ext cx="289151" cy="7710"/>
+              </a:xfrm>
+              <a:custGeom>
+                <a:avLst/>
+                <a:gdLst>
+                  <a:gd name="connsiteX0" fmla="*/ 0 w 289151"/>
+                  <a:gd name="connsiteY0" fmla="*/ 0 h 7710"/>
+                  <a:gd name="connsiteX1" fmla="*/ 289152 w 289151"/>
+                  <a:gd name="connsiteY1" fmla="*/ 0 h 7710"/>
+                </a:gdLst>
+                <a:ahLst/>
+                <a:cxnLst>
+                  <a:cxn ang="0">
+                    <a:pos x="connsiteX0" y="connsiteY0"/>
+                  </a:cxn>
+                  <a:cxn ang="0">
+                    <a:pos x="connsiteX1" y="connsiteY1"/>
+                  </a:cxn>
+                </a:cxnLst>
+                <a:rect l="l" t="t" r="r" b="b"/>
+                <a:pathLst>
+                  <a:path w="289151" h="7710">
+                    <a:moveTo>
+                      <a:pt x="0" y="0"/>
+                    </a:moveTo>
+                    <a:lnTo>
+                      <a:pt x="289152" y="0"/>
+                    </a:lnTo>
+                  </a:path>
+                </a:pathLst>
+              </a:custGeom>
+              <a:ln w="3316" cap="flat">
+                <a:solidFill>
+                  <a:srgbClr val="EAAA60">
+                    <a:alpha val="40000"/>
+                  </a:srgbClr>
+                </a:solidFill>
+                <a:prstDash val="solid"/>
+                <a:round/>
+              </a:ln>
+            </p:spPr>
+            <p:txBody>
+              <a:bodyPr rtlCol="0" anchor="ctr"/>
+              <a:lstStyle/>
+              <a:p>
+                <a:endParaRPr lang="en-US"/>
+              </a:p>
+            </p:txBody>
+          </p:sp>
+        </p:grpSp>
+        <p:grpSp>
+          <p:nvGrpSpPr>
+            <p:cNvPr id="1426" name="Group 1425">
+              <a:extLst>
+                <a:ext uri="{FF2B5EF4-FFF2-40B4-BE49-F238E27FC236}">
+                  <a16:creationId xmlns:a16="http://schemas.microsoft.com/office/drawing/2014/main" id="{9588F1FB-82FA-A580-D96A-0ED2C1719B60}"/>
+                </a:ext>
+              </a:extLst>
+            </p:cNvPr>
+            <p:cNvGrpSpPr>
+              <a:grpSpLocks noChangeAspect="1"/>
+            </p:cNvGrpSpPr>
+            <p:nvPr/>
+          </p:nvGrpSpPr>
+          <p:grpSpPr>
+            <a:xfrm rot="5400000">
+              <a:off x="8730626" y="3708020"/>
+              <a:ext cx="535197" cy="493807"/>
+              <a:chOff x="5911219" y="5091375"/>
+              <a:chExt cx="289151" cy="266790"/>
+            </a:xfrm>
+          </p:grpSpPr>
+          <p:sp>
+            <p:nvSpPr>
+              <p:cNvPr id="1157" name="Freeform 1156">
+                <a:extLst>
+                  <a:ext uri="{FF2B5EF4-FFF2-40B4-BE49-F238E27FC236}">
+                    <a16:creationId xmlns:a16="http://schemas.microsoft.com/office/drawing/2014/main" id="{E7E57F85-BFFF-BFC6-2E9F-5EBE9DB657EE}"/>
+                  </a:ext>
+                </a:extLst>
+              </p:cNvPr>
+              <p:cNvSpPr/>
+              <p:nvPr/>
+            </p:nvSpPr>
+            <p:spPr>
+              <a:xfrm>
+                <a:off x="5983546" y="5338426"/>
+                <a:ext cx="144575" cy="19739"/>
+              </a:xfrm>
+              <a:custGeom>
+                <a:avLst/>
+                <a:gdLst>
+                  <a:gd name="connsiteX0" fmla="*/ 0 w 144575"/>
+                  <a:gd name="connsiteY0" fmla="*/ 0 h 19739"/>
+                  <a:gd name="connsiteX1" fmla="*/ 144576 w 144575"/>
+                  <a:gd name="connsiteY1" fmla="*/ 0 h 19739"/>
+                  <a:gd name="connsiteX2" fmla="*/ 144576 w 144575"/>
+                  <a:gd name="connsiteY2" fmla="*/ 19739 h 19739"/>
+                  <a:gd name="connsiteX3" fmla="*/ 0 w 144575"/>
+                  <a:gd name="connsiteY3" fmla="*/ 19739 h 19739"/>
+                </a:gdLst>
+                <a:ahLst/>
+                <a:cxnLst>
+                  <a:cxn ang="0">
+                    <a:pos x="connsiteX0" y="connsiteY0"/>
+                  </a:cxn>
+                  <a:cxn ang="0">
+                    <a:pos x="connsiteX1" y="connsiteY1"/>
+                  </a:cxn>
+                  <a:cxn ang="0">
+                    <a:pos x="connsiteX2" y="connsiteY2"/>
+                  </a:cxn>
+                  <a:cxn ang="0">
+                    <a:pos x="connsiteX3" y="connsiteY3"/>
+                  </a:cxn>
+                </a:cxnLst>
+                <a:rect l="l" t="t" r="r" b="b"/>
+                <a:pathLst>
+                  <a:path w="144575" h="19739">
+                    <a:moveTo>
+                      <a:pt x="0" y="0"/>
+                    </a:moveTo>
+                    <a:lnTo>
+                      <a:pt x="144576" y="0"/>
+                    </a:lnTo>
+                    <a:lnTo>
+                      <a:pt x="144576" y="19739"/>
+                    </a:lnTo>
+                    <a:lnTo>
+                      <a:pt x="0" y="19739"/>
+                    </a:lnTo>
+                    <a:close/>
+                  </a:path>
+                </a:pathLst>
+              </a:custGeom>
+              <a:solidFill>
+                <a:srgbClr val="B7B2D0">
+                  <a:alpha val="40000"/>
+                </a:srgbClr>
+              </a:solidFill>
+              <a:ln w="3316" cap="flat">
+                <a:solidFill>
+                  <a:srgbClr val="333333"/>
+                </a:solidFill>
+                <a:prstDash val="solid"/>
+                <a:miter/>
+              </a:ln>
+            </p:spPr>
+            <p:txBody>
+              <a:bodyPr rtlCol="0" anchor="ctr"/>
+              <a:lstStyle/>
+              <a:p>
+                <a:endParaRPr lang="en-US"/>
+              </a:p>
+            </p:txBody>
+          </p:sp>
+          <p:sp>
+            <p:nvSpPr>
+              <p:cNvPr id="1158" name="Freeform 1157">
+                <a:extLst>
+                  <a:ext uri="{FF2B5EF4-FFF2-40B4-BE49-F238E27FC236}">
+                    <a16:creationId xmlns:a16="http://schemas.microsoft.com/office/drawing/2014/main" id="{97C6792C-F0D6-4467-D5C5-419041915E7E}"/>
+                  </a:ext>
+                </a:extLst>
+              </p:cNvPr>
+              <p:cNvSpPr/>
+              <p:nvPr/>
+            </p:nvSpPr>
+            <p:spPr>
+              <a:xfrm>
+                <a:off x="5947383" y="5309125"/>
+                <a:ext cx="216902" cy="29300"/>
+              </a:xfrm>
+              <a:custGeom>
+                <a:avLst/>
+                <a:gdLst>
+                  <a:gd name="connsiteX0" fmla="*/ 0 w 216902"/>
+                  <a:gd name="connsiteY0" fmla="*/ 0 h 29300"/>
+                  <a:gd name="connsiteX1" fmla="*/ 216902 w 216902"/>
+                  <a:gd name="connsiteY1" fmla="*/ 0 h 29300"/>
+                  <a:gd name="connsiteX2" fmla="*/ 216902 w 216902"/>
+                  <a:gd name="connsiteY2" fmla="*/ 29301 h 29300"/>
+                  <a:gd name="connsiteX3" fmla="*/ 0 w 216902"/>
+                  <a:gd name="connsiteY3" fmla="*/ 29301 h 29300"/>
+                </a:gdLst>
+                <a:ahLst/>
+                <a:cxnLst>
+                  <a:cxn ang="0">
+                    <a:pos x="connsiteX0" y="connsiteY0"/>
+                  </a:cxn>
+                  <a:cxn ang="0">
+                    <a:pos x="connsiteX1" y="connsiteY1"/>
+                  </a:cxn>
+                  <a:cxn ang="0">
+                    <a:pos x="connsiteX2" y="connsiteY2"/>
+                  </a:cxn>
+                  <a:cxn ang="0">
+                    <a:pos x="connsiteX3" y="connsiteY3"/>
+                  </a:cxn>
+                </a:cxnLst>
+                <a:rect l="l" t="t" r="r" b="b"/>
+                <a:pathLst>
+                  <a:path w="216902" h="29300">
+                    <a:moveTo>
+                      <a:pt x="0" y="0"/>
+                    </a:moveTo>
+                    <a:lnTo>
+                      <a:pt x="216902" y="0"/>
+                    </a:lnTo>
+                    <a:lnTo>
+                      <a:pt x="216902" y="29301"/>
+                    </a:lnTo>
+                    <a:lnTo>
+                      <a:pt x="0" y="29301"/>
+                    </a:lnTo>
+                    <a:close/>
+                  </a:path>
+                </a:pathLst>
+              </a:custGeom>
+              <a:solidFill>
+                <a:srgbClr val="B7B2D0">
+                  <a:alpha val="40000"/>
+                </a:srgbClr>
+              </a:solidFill>
+              <a:ln w="3316" cap="flat">
+                <a:solidFill>
+                  <a:srgbClr val="333333"/>
+                </a:solidFill>
+                <a:prstDash val="solid"/>
+                <a:miter/>
+              </a:ln>
+            </p:spPr>
+            <p:txBody>
+              <a:bodyPr rtlCol="0" anchor="ctr"/>
+              <a:lstStyle/>
+              <a:p>
+                <a:endParaRPr lang="en-US"/>
+              </a:p>
+            </p:txBody>
+          </p:sp>
+          <p:sp>
+            <p:nvSpPr>
+              <p:cNvPr id="1159" name="Freeform 1158">
+                <a:extLst>
+                  <a:ext uri="{FF2B5EF4-FFF2-40B4-BE49-F238E27FC236}">
+                    <a16:creationId xmlns:a16="http://schemas.microsoft.com/office/drawing/2014/main" id="{295553AE-FCBF-C532-0A96-C8435D06195A}"/>
+                  </a:ext>
+                </a:extLst>
+              </p:cNvPr>
+              <p:cNvSpPr/>
+              <p:nvPr/>
+            </p:nvSpPr>
+            <p:spPr>
+              <a:xfrm>
+                <a:off x="5911219" y="5267256"/>
+                <a:ext cx="289151" cy="41869"/>
+              </a:xfrm>
+              <a:custGeom>
+                <a:avLst/>
+                <a:gdLst>
+                  <a:gd name="connsiteX0" fmla="*/ 0 w 289151"/>
+                  <a:gd name="connsiteY0" fmla="*/ 0 h 41869"/>
+                  <a:gd name="connsiteX1" fmla="*/ 289152 w 289151"/>
+                  <a:gd name="connsiteY1" fmla="*/ 0 h 41869"/>
+                  <a:gd name="connsiteX2" fmla="*/ 289152 w 289151"/>
+                  <a:gd name="connsiteY2" fmla="*/ 41869 h 41869"/>
+                  <a:gd name="connsiteX3" fmla="*/ 0 w 289151"/>
+                  <a:gd name="connsiteY3" fmla="*/ 41869 h 41869"/>
+                </a:gdLst>
+                <a:ahLst/>
+                <a:cxnLst>
+                  <a:cxn ang="0">
+                    <a:pos x="connsiteX0" y="connsiteY0"/>
+                  </a:cxn>
+                  <a:cxn ang="0">
+                    <a:pos x="connsiteX1" y="connsiteY1"/>
+                  </a:cxn>
+                  <a:cxn ang="0">
+                    <a:pos x="connsiteX2" y="connsiteY2"/>
+                  </a:cxn>
+                  <a:cxn ang="0">
+                    <a:pos x="connsiteX3" y="connsiteY3"/>
+                  </a:cxn>
+                </a:cxnLst>
+                <a:rect l="l" t="t" r="r" b="b"/>
+                <a:pathLst>
+                  <a:path w="289151" h="41869">
+                    <a:moveTo>
+                      <a:pt x="0" y="0"/>
+                    </a:moveTo>
+                    <a:lnTo>
+                      <a:pt x="289152" y="0"/>
+                    </a:lnTo>
+                    <a:lnTo>
+                      <a:pt x="289152" y="41869"/>
+                    </a:lnTo>
+                    <a:lnTo>
+                      <a:pt x="0" y="41869"/>
+                    </a:lnTo>
+                    <a:close/>
+                  </a:path>
+                </a:pathLst>
+              </a:custGeom>
+              <a:solidFill>
+                <a:srgbClr val="B7B2D0">
+                  <a:alpha val="40000"/>
+                </a:srgbClr>
+              </a:solidFill>
+              <a:ln w="3316" cap="flat">
+                <a:solidFill>
+                  <a:srgbClr val="333333"/>
+                </a:solidFill>
+                <a:prstDash val="solid"/>
+                <a:miter/>
+              </a:ln>
+            </p:spPr>
+            <p:txBody>
+              <a:bodyPr rtlCol="0" anchor="ctr"/>
+              <a:lstStyle/>
+              <a:p>
+                <a:endParaRPr lang="en-US"/>
+              </a:p>
+            </p:txBody>
+          </p:sp>
+          <p:sp>
+            <p:nvSpPr>
+              <p:cNvPr id="1160" name="Freeform 1159">
+                <a:extLst>
+                  <a:ext uri="{FF2B5EF4-FFF2-40B4-BE49-F238E27FC236}">
+                    <a16:creationId xmlns:a16="http://schemas.microsoft.com/office/drawing/2014/main" id="{CF40F9C2-6798-A2EB-EEA7-6746A8807FE4}"/>
+                  </a:ext>
+                </a:extLst>
+              </p:cNvPr>
+              <p:cNvSpPr/>
+              <p:nvPr/>
+            </p:nvSpPr>
+            <p:spPr>
+              <a:xfrm>
+                <a:off x="5911219" y="5214592"/>
+                <a:ext cx="289151" cy="52664"/>
+              </a:xfrm>
+              <a:custGeom>
+                <a:avLst/>
+                <a:gdLst>
+                  <a:gd name="connsiteX0" fmla="*/ 0 w 289151"/>
+                  <a:gd name="connsiteY0" fmla="*/ 0 h 52664"/>
+                  <a:gd name="connsiteX1" fmla="*/ 289152 w 289151"/>
+                  <a:gd name="connsiteY1" fmla="*/ 0 h 52664"/>
+                  <a:gd name="connsiteX2" fmla="*/ 289152 w 289151"/>
+                  <a:gd name="connsiteY2" fmla="*/ 52664 h 52664"/>
+                  <a:gd name="connsiteX3" fmla="*/ 0 w 289151"/>
+                  <a:gd name="connsiteY3" fmla="*/ 52664 h 52664"/>
+                </a:gdLst>
+                <a:ahLst/>
+                <a:cxnLst>
+                  <a:cxn ang="0">
+                    <a:pos x="connsiteX0" y="connsiteY0"/>
+                  </a:cxn>
+                  <a:cxn ang="0">
+                    <a:pos x="connsiteX1" y="connsiteY1"/>
+                  </a:cxn>
+                  <a:cxn ang="0">
+                    <a:pos x="connsiteX2" y="connsiteY2"/>
+                  </a:cxn>
+                  <a:cxn ang="0">
+                    <a:pos x="connsiteX3" y="connsiteY3"/>
+                  </a:cxn>
+                </a:cxnLst>
+                <a:rect l="l" t="t" r="r" b="b"/>
+                <a:pathLst>
+                  <a:path w="289151" h="52664">
+                    <a:moveTo>
+                      <a:pt x="0" y="0"/>
+                    </a:moveTo>
+                    <a:lnTo>
+                      <a:pt x="289152" y="0"/>
+                    </a:lnTo>
+                    <a:lnTo>
+                      <a:pt x="289152" y="52664"/>
+                    </a:lnTo>
+                    <a:lnTo>
+                      <a:pt x="0" y="52664"/>
+                    </a:lnTo>
+                    <a:close/>
+                  </a:path>
+                </a:pathLst>
+              </a:custGeom>
+              <a:solidFill>
+                <a:srgbClr val="B7B2D0">
+                  <a:alpha val="40000"/>
+                </a:srgbClr>
+              </a:solidFill>
+              <a:ln w="3316" cap="flat">
+                <a:solidFill>
+                  <a:srgbClr val="333333"/>
+                </a:solidFill>
+                <a:prstDash val="solid"/>
+                <a:miter/>
+              </a:ln>
+            </p:spPr>
+            <p:txBody>
+              <a:bodyPr rtlCol="0" anchor="ctr"/>
+              <a:lstStyle/>
+              <a:p>
+                <a:endParaRPr lang="en-US"/>
+              </a:p>
+            </p:txBody>
+          </p:sp>
+          <p:sp>
+            <p:nvSpPr>
+              <p:cNvPr id="1161" name="Freeform 1160">
+                <a:extLst>
+                  <a:ext uri="{FF2B5EF4-FFF2-40B4-BE49-F238E27FC236}">
+                    <a16:creationId xmlns:a16="http://schemas.microsoft.com/office/drawing/2014/main" id="{379B9322-DDE1-F6BE-1B06-5B958E608092}"/>
+                  </a:ext>
+                </a:extLst>
+              </p:cNvPr>
+              <p:cNvSpPr/>
+              <p:nvPr/>
+            </p:nvSpPr>
+            <p:spPr>
+              <a:xfrm>
+                <a:off x="5947383" y="5165320"/>
+                <a:ext cx="216902" cy="49271"/>
+              </a:xfrm>
+              <a:custGeom>
+                <a:avLst/>
+                <a:gdLst>
+                  <a:gd name="connsiteX0" fmla="*/ 0 w 216902"/>
+                  <a:gd name="connsiteY0" fmla="*/ 0 h 49271"/>
+                  <a:gd name="connsiteX1" fmla="*/ 216902 w 216902"/>
+                  <a:gd name="connsiteY1" fmla="*/ 0 h 49271"/>
+                  <a:gd name="connsiteX2" fmla="*/ 216902 w 216902"/>
+                  <a:gd name="connsiteY2" fmla="*/ 49271 h 49271"/>
+                  <a:gd name="connsiteX3" fmla="*/ 0 w 216902"/>
+                  <a:gd name="connsiteY3" fmla="*/ 49271 h 49271"/>
+                </a:gdLst>
+                <a:ahLst/>
+                <a:cxnLst>
+                  <a:cxn ang="0">
+                    <a:pos x="connsiteX0" y="connsiteY0"/>
+                  </a:cxn>
+                  <a:cxn ang="0">
+                    <a:pos x="connsiteX1" y="connsiteY1"/>
+                  </a:cxn>
+                  <a:cxn ang="0">
+                    <a:pos x="connsiteX2" y="connsiteY2"/>
+                  </a:cxn>
+                  <a:cxn ang="0">
+                    <a:pos x="connsiteX3" y="connsiteY3"/>
+                  </a:cxn>
+                </a:cxnLst>
+                <a:rect l="l" t="t" r="r" b="b"/>
+                <a:pathLst>
+                  <a:path w="216902" h="49271">
+                    <a:moveTo>
+                      <a:pt x="0" y="0"/>
+                    </a:moveTo>
+                    <a:lnTo>
+                      <a:pt x="216902" y="0"/>
+                    </a:lnTo>
+                    <a:lnTo>
+                      <a:pt x="216902" y="49271"/>
+                    </a:lnTo>
+                    <a:lnTo>
+                      <a:pt x="0" y="49271"/>
+                    </a:lnTo>
+                    <a:close/>
+                  </a:path>
+                </a:pathLst>
+              </a:custGeom>
+              <a:solidFill>
+                <a:srgbClr val="B7B2D0">
+                  <a:alpha val="40000"/>
+                </a:srgbClr>
+              </a:solidFill>
+              <a:ln w="3316" cap="flat">
+                <a:solidFill>
+                  <a:srgbClr val="333333"/>
+                </a:solidFill>
+                <a:prstDash val="solid"/>
+                <a:miter/>
+              </a:ln>
+            </p:spPr>
+            <p:txBody>
+              <a:bodyPr rtlCol="0" anchor="ctr"/>
+              <a:lstStyle/>
+              <a:p>
+                <a:endParaRPr lang="en-US"/>
+              </a:p>
+            </p:txBody>
+          </p:sp>
+          <p:sp>
+            <p:nvSpPr>
+              <p:cNvPr id="1162" name="Freeform 1161">
+                <a:extLst>
+                  <a:ext uri="{FF2B5EF4-FFF2-40B4-BE49-F238E27FC236}">
+                    <a16:creationId xmlns:a16="http://schemas.microsoft.com/office/drawing/2014/main" id="{1DAAB18E-4204-D98E-B28E-DB05AEE6096D}"/>
+                  </a:ext>
+                </a:extLst>
+              </p:cNvPr>
+              <p:cNvSpPr/>
+              <p:nvPr/>
+            </p:nvSpPr>
+            <p:spPr>
+              <a:xfrm>
+                <a:off x="5983546" y="5091375"/>
+                <a:ext cx="144575" cy="73945"/>
+              </a:xfrm>
+              <a:custGeom>
+                <a:avLst/>
+                <a:gdLst>
+                  <a:gd name="connsiteX0" fmla="*/ 0 w 144575"/>
+                  <a:gd name="connsiteY0" fmla="*/ 0 h 73945"/>
+                  <a:gd name="connsiteX1" fmla="*/ 144576 w 144575"/>
+                  <a:gd name="connsiteY1" fmla="*/ 0 h 73945"/>
+                  <a:gd name="connsiteX2" fmla="*/ 144576 w 144575"/>
+                  <a:gd name="connsiteY2" fmla="*/ 73946 h 73945"/>
+                  <a:gd name="connsiteX3" fmla="*/ 0 w 144575"/>
+                  <a:gd name="connsiteY3" fmla="*/ 73946 h 73945"/>
+                </a:gdLst>
+                <a:ahLst/>
+                <a:cxnLst>
+                  <a:cxn ang="0">
+                    <a:pos x="connsiteX0" y="connsiteY0"/>
+                  </a:cxn>
+                  <a:cxn ang="0">
+                    <a:pos x="connsiteX1" y="connsiteY1"/>
+                  </a:cxn>
+                  <a:cxn ang="0">
+                    <a:pos x="connsiteX2" y="connsiteY2"/>
+                  </a:cxn>
+                  <a:cxn ang="0">
+                    <a:pos x="connsiteX3" y="connsiteY3"/>
+                  </a:cxn>
+                </a:cxnLst>
+                <a:rect l="l" t="t" r="r" b="b"/>
+                <a:pathLst>
+                  <a:path w="144575" h="73945">
+                    <a:moveTo>
+                      <a:pt x="0" y="0"/>
+                    </a:moveTo>
+                    <a:lnTo>
+                      <a:pt x="144576" y="0"/>
+                    </a:lnTo>
+                    <a:lnTo>
+                      <a:pt x="144576" y="73946"/>
+                    </a:lnTo>
+                    <a:lnTo>
+                      <a:pt x="0" y="73946"/>
+                    </a:lnTo>
+                    <a:close/>
+                  </a:path>
+                </a:pathLst>
+              </a:custGeom>
+              <a:solidFill>
+                <a:srgbClr val="B7B2D0">
+                  <a:alpha val="40000"/>
+                </a:srgbClr>
+              </a:solidFill>
+              <a:ln w="3316" cap="flat">
+                <a:solidFill>
+                  <a:srgbClr val="333333"/>
+                </a:solidFill>
+                <a:prstDash val="solid"/>
+                <a:miter/>
+              </a:ln>
+            </p:spPr>
+            <p:txBody>
+              <a:bodyPr rtlCol="0" anchor="ctr"/>
+              <a:lstStyle/>
+              <a:p>
+                <a:endParaRPr lang="en-US"/>
+              </a:p>
+            </p:txBody>
+          </p:sp>
+          <p:sp>
+            <p:nvSpPr>
+              <p:cNvPr id="1163" name="Freeform 1162">
+                <a:extLst>
+                  <a:ext uri="{FF2B5EF4-FFF2-40B4-BE49-F238E27FC236}">
+                    <a16:creationId xmlns:a16="http://schemas.microsoft.com/office/drawing/2014/main" id="{D4CDA1B6-3AC3-6CFB-2543-6358148E6B33}"/>
+                  </a:ext>
+                </a:extLst>
+              </p:cNvPr>
+              <p:cNvSpPr/>
+              <p:nvPr/>
+            </p:nvSpPr>
+            <p:spPr>
+              <a:xfrm>
+                <a:off x="5911219" y="5267256"/>
+                <a:ext cx="289151" cy="7710"/>
+              </a:xfrm>
+              <a:custGeom>
+                <a:avLst/>
+                <a:gdLst>
+                  <a:gd name="connsiteX0" fmla="*/ 0 w 289151"/>
+                  <a:gd name="connsiteY0" fmla="*/ 0 h 7710"/>
+                  <a:gd name="connsiteX1" fmla="*/ 289152 w 289151"/>
+                  <a:gd name="connsiteY1" fmla="*/ 0 h 7710"/>
+                </a:gdLst>
+                <a:ahLst/>
+                <a:cxnLst>
+                  <a:cxn ang="0">
+                    <a:pos x="connsiteX0" y="connsiteY0"/>
+                  </a:cxn>
+                  <a:cxn ang="0">
+                    <a:pos x="connsiteX1" y="connsiteY1"/>
+                  </a:cxn>
+                </a:cxnLst>
+                <a:rect l="l" t="t" r="r" b="b"/>
+                <a:pathLst>
+                  <a:path w="289151" h="7710">
+                    <a:moveTo>
+                      <a:pt x="0" y="0"/>
+                    </a:moveTo>
+                    <a:lnTo>
+                      <a:pt x="289152" y="0"/>
+                    </a:lnTo>
+                  </a:path>
+                </a:pathLst>
+              </a:custGeom>
+              <a:ln w="3316" cap="flat">
+                <a:solidFill>
+                  <a:srgbClr val="B7B2D0">
+                    <a:alpha val="40000"/>
+                  </a:srgbClr>
+                </a:solidFill>
+                <a:prstDash val="solid"/>
+                <a:round/>
+              </a:ln>
+            </p:spPr>
+            <p:txBody>
+              <a:bodyPr rtlCol="0" anchor="ctr"/>
+              <a:lstStyle/>
+              <a:p>
+                <a:endParaRPr lang="en-US"/>
+              </a:p>
+            </p:txBody>
+          </p:sp>
+        </p:grpSp>
+        <p:grpSp>
+          <p:nvGrpSpPr>
+            <p:cNvPr id="1427" name="Group 1426">
+              <a:extLst>
+                <a:ext uri="{FF2B5EF4-FFF2-40B4-BE49-F238E27FC236}">
+                  <a16:creationId xmlns:a16="http://schemas.microsoft.com/office/drawing/2014/main" id="{BFD75B1D-D68F-3CC7-537A-74331E8AD784}"/>
+                </a:ext>
+              </a:extLst>
+            </p:cNvPr>
+            <p:cNvGrpSpPr>
+              <a:grpSpLocks noChangeAspect="1"/>
+            </p:cNvGrpSpPr>
+            <p:nvPr/>
+          </p:nvGrpSpPr>
+          <p:grpSpPr>
+            <a:xfrm rot="5400000">
+              <a:off x="8579559" y="4468853"/>
+              <a:ext cx="535197" cy="257751"/>
+              <a:chOff x="6219648" y="5231864"/>
+              <a:chExt cx="289151" cy="139255"/>
+            </a:xfrm>
+          </p:grpSpPr>
+          <p:sp>
+            <p:nvSpPr>
+              <p:cNvPr id="1171" name="Freeform 1170">
+                <a:extLst>
+                  <a:ext uri="{FF2B5EF4-FFF2-40B4-BE49-F238E27FC236}">
+                    <a16:creationId xmlns:a16="http://schemas.microsoft.com/office/drawing/2014/main" id="{6DDBA92A-EBE6-D7A9-DEB8-E78981FFFFE3}"/>
+                  </a:ext>
+                </a:extLst>
+              </p:cNvPr>
+              <p:cNvSpPr/>
+              <p:nvPr/>
+            </p:nvSpPr>
+            <p:spPr>
+              <a:xfrm>
+                <a:off x="6291975" y="5367418"/>
+                <a:ext cx="144575" cy="3701"/>
+              </a:xfrm>
+              <a:custGeom>
+                <a:avLst/>
+                <a:gdLst>
+                  <a:gd name="connsiteX0" fmla="*/ 0 w 144575"/>
+                  <a:gd name="connsiteY0" fmla="*/ 0 h 3701"/>
+                  <a:gd name="connsiteX1" fmla="*/ 144576 w 144575"/>
+                  <a:gd name="connsiteY1" fmla="*/ 0 h 3701"/>
+                  <a:gd name="connsiteX2" fmla="*/ 144576 w 144575"/>
+                  <a:gd name="connsiteY2" fmla="*/ 3701 h 3701"/>
+                  <a:gd name="connsiteX3" fmla="*/ 0 w 144575"/>
+                  <a:gd name="connsiteY3" fmla="*/ 3701 h 3701"/>
+                </a:gdLst>
+                <a:ahLst/>
+                <a:cxnLst>
+                  <a:cxn ang="0">
+                    <a:pos x="connsiteX0" y="connsiteY0"/>
+                  </a:cxn>
+                  <a:cxn ang="0">
+                    <a:pos x="connsiteX1" y="connsiteY1"/>
+                  </a:cxn>
+                  <a:cxn ang="0">
+                    <a:pos x="connsiteX2" y="connsiteY2"/>
+                  </a:cxn>
+                  <a:cxn ang="0">
+                    <a:pos x="connsiteX3" y="connsiteY3"/>
+                  </a:cxn>
+                </a:cxnLst>
+                <a:rect l="l" t="t" r="r" b="b"/>
+                <a:pathLst>
+                  <a:path w="144575" h="3701">
+                    <a:moveTo>
+                      <a:pt x="0" y="0"/>
+                    </a:moveTo>
+                    <a:lnTo>
+                      <a:pt x="144576" y="0"/>
+                    </a:lnTo>
+                    <a:lnTo>
+                      <a:pt x="144576" y="3701"/>
+                    </a:lnTo>
+                    <a:lnTo>
+                      <a:pt x="0" y="3701"/>
+                    </a:lnTo>
+                    <a:close/>
+                  </a:path>
+                </a:pathLst>
+              </a:custGeom>
+              <a:solidFill>
+                <a:srgbClr val="7DA6C6">
+                  <a:alpha val="40000"/>
+                </a:srgbClr>
+              </a:solidFill>
+              <a:ln w="3316" cap="flat">
+                <a:solidFill>
+                  <a:srgbClr val="333333"/>
+                </a:solidFill>
+                <a:prstDash val="solid"/>
+                <a:miter/>
+              </a:ln>
+            </p:spPr>
+            <p:txBody>
+              <a:bodyPr rtlCol="0" anchor="ctr"/>
+              <a:lstStyle/>
+              <a:p>
+                <a:endParaRPr lang="en-US"/>
+              </a:p>
+            </p:txBody>
+          </p:sp>
+          <p:sp>
+            <p:nvSpPr>
+              <p:cNvPr id="1172" name="Freeform 1171">
+                <a:extLst>
+                  <a:ext uri="{FF2B5EF4-FFF2-40B4-BE49-F238E27FC236}">
+                    <a16:creationId xmlns:a16="http://schemas.microsoft.com/office/drawing/2014/main" id="{4BE49F43-5E78-2D94-A311-61D74A37541D}"/>
+                  </a:ext>
+                </a:extLst>
+              </p:cNvPr>
+              <p:cNvSpPr/>
+              <p:nvPr/>
+            </p:nvSpPr>
+            <p:spPr>
+              <a:xfrm>
+                <a:off x="6255811" y="5356932"/>
+                <a:ext cx="216902" cy="10486"/>
+              </a:xfrm>
+              <a:custGeom>
+                <a:avLst/>
+                <a:gdLst>
+                  <a:gd name="connsiteX0" fmla="*/ 0 w 216902"/>
+                  <a:gd name="connsiteY0" fmla="*/ 0 h 10486"/>
+                  <a:gd name="connsiteX1" fmla="*/ 216902 w 216902"/>
+                  <a:gd name="connsiteY1" fmla="*/ 0 h 10486"/>
+                  <a:gd name="connsiteX2" fmla="*/ 216902 w 216902"/>
+                  <a:gd name="connsiteY2" fmla="*/ 10487 h 10486"/>
+                  <a:gd name="connsiteX3" fmla="*/ 0 w 216902"/>
+                  <a:gd name="connsiteY3" fmla="*/ 10487 h 10486"/>
+                </a:gdLst>
+                <a:ahLst/>
+                <a:cxnLst>
+                  <a:cxn ang="0">
+                    <a:pos x="connsiteX0" y="connsiteY0"/>
+                  </a:cxn>
+                  <a:cxn ang="0">
+                    <a:pos x="connsiteX1" y="connsiteY1"/>
+                  </a:cxn>
+                  <a:cxn ang="0">
+                    <a:pos x="connsiteX2" y="connsiteY2"/>
+                  </a:cxn>
+                  <a:cxn ang="0">
+                    <a:pos x="connsiteX3" y="connsiteY3"/>
+                  </a:cxn>
+                </a:cxnLst>
+                <a:rect l="l" t="t" r="r" b="b"/>
+                <a:pathLst>
+                  <a:path w="216902" h="10486">
+                    <a:moveTo>
+                      <a:pt x="0" y="0"/>
+                    </a:moveTo>
+                    <a:lnTo>
+                      <a:pt x="216902" y="0"/>
+                    </a:lnTo>
+                    <a:lnTo>
+                      <a:pt x="216902" y="10487"/>
+                    </a:lnTo>
+                    <a:lnTo>
+                      <a:pt x="0" y="10487"/>
+                    </a:lnTo>
+                    <a:close/>
+                  </a:path>
+                </a:pathLst>
+              </a:custGeom>
+              <a:solidFill>
+                <a:srgbClr val="7DA6C6">
+                  <a:alpha val="40000"/>
+                </a:srgbClr>
+              </a:solidFill>
+              <a:ln w="3316" cap="flat">
+                <a:solidFill>
+                  <a:srgbClr val="333333"/>
+                </a:solidFill>
+                <a:prstDash val="solid"/>
+                <a:miter/>
+              </a:ln>
+            </p:spPr>
+            <p:txBody>
+              <a:bodyPr rtlCol="0" anchor="ctr"/>
+              <a:lstStyle/>
+              <a:p>
+                <a:endParaRPr lang="en-US"/>
+              </a:p>
+            </p:txBody>
+          </p:sp>
+          <p:sp>
+            <p:nvSpPr>
+              <p:cNvPr id="1173" name="Freeform 1172">
+                <a:extLst>
+                  <a:ext uri="{FF2B5EF4-FFF2-40B4-BE49-F238E27FC236}">
+                    <a16:creationId xmlns:a16="http://schemas.microsoft.com/office/drawing/2014/main" id="{636C1369-CDDE-4234-7BD8-AA211423FE9A}"/>
+                  </a:ext>
+                </a:extLst>
+              </p:cNvPr>
+              <p:cNvSpPr/>
+              <p:nvPr/>
+            </p:nvSpPr>
+            <p:spPr>
+              <a:xfrm>
+                <a:off x="6219648" y="5335419"/>
+                <a:ext cx="289151" cy="21435"/>
+              </a:xfrm>
+              <a:custGeom>
+                <a:avLst/>
+                <a:gdLst>
+                  <a:gd name="connsiteX0" fmla="*/ 0 w 289151"/>
+                  <a:gd name="connsiteY0" fmla="*/ 0 h 21435"/>
+                  <a:gd name="connsiteX1" fmla="*/ 289152 w 289151"/>
+                  <a:gd name="connsiteY1" fmla="*/ 0 h 21435"/>
+                  <a:gd name="connsiteX2" fmla="*/ 289152 w 289151"/>
+                  <a:gd name="connsiteY2" fmla="*/ 21436 h 21435"/>
+                  <a:gd name="connsiteX3" fmla="*/ 0 w 289151"/>
+                  <a:gd name="connsiteY3" fmla="*/ 21436 h 21435"/>
+                </a:gdLst>
+                <a:ahLst/>
+                <a:cxnLst>
+                  <a:cxn ang="0">
+                    <a:pos x="connsiteX0" y="connsiteY0"/>
+                  </a:cxn>
+                  <a:cxn ang="0">
+                    <a:pos x="connsiteX1" y="connsiteY1"/>
+                  </a:cxn>
+                  <a:cxn ang="0">
+                    <a:pos x="connsiteX2" y="connsiteY2"/>
+                  </a:cxn>
+                  <a:cxn ang="0">
+                    <a:pos x="connsiteX3" y="connsiteY3"/>
+                  </a:cxn>
+                </a:cxnLst>
+                <a:rect l="l" t="t" r="r" b="b"/>
+                <a:pathLst>
+                  <a:path w="289151" h="21435">
+                    <a:moveTo>
+                      <a:pt x="0" y="0"/>
+                    </a:moveTo>
+                    <a:lnTo>
+                      <a:pt x="289152" y="0"/>
+                    </a:lnTo>
+                    <a:lnTo>
+                      <a:pt x="289152" y="21436"/>
+                    </a:lnTo>
+                    <a:lnTo>
+                      <a:pt x="0" y="21436"/>
+                    </a:lnTo>
+                    <a:close/>
+                  </a:path>
+                </a:pathLst>
+              </a:custGeom>
+              <a:solidFill>
+                <a:srgbClr val="7DA6C6">
+                  <a:alpha val="40000"/>
+                </a:srgbClr>
+              </a:solidFill>
+              <a:ln w="3316" cap="flat">
+                <a:solidFill>
+                  <a:srgbClr val="333333"/>
+                </a:solidFill>
+                <a:prstDash val="solid"/>
+                <a:miter/>
+              </a:ln>
+            </p:spPr>
+            <p:txBody>
+              <a:bodyPr rtlCol="0" anchor="ctr"/>
+              <a:lstStyle/>
+              <a:p>
+                <a:endParaRPr lang="en-US"/>
+              </a:p>
+            </p:txBody>
+          </p:sp>
+          <p:sp>
+            <p:nvSpPr>
+              <p:cNvPr id="1174" name="Freeform 1173">
+                <a:extLst>
+                  <a:ext uri="{FF2B5EF4-FFF2-40B4-BE49-F238E27FC236}">
+                    <a16:creationId xmlns:a16="http://schemas.microsoft.com/office/drawing/2014/main" id="{26D8FDC8-5E3E-518D-7692-AA5040FE82B9}"/>
+                  </a:ext>
+                </a:extLst>
+              </p:cNvPr>
+              <p:cNvSpPr/>
+              <p:nvPr/>
+            </p:nvSpPr>
+            <p:spPr>
+              <a:xfrm>
+                <a:off x="6219648" y="5306735"/>
+                <a:ext cx="289151" cy="28683"/>
+              </a:xfrm>
+              <a:custGeom>
+                <a:avLst/>
+                <a:gdLst>
+                  <a:gd name="connsiteX0" fmla="*/ 0 w 289151"/>
+                  <a:gd name="connsiteY0" fmla="*/ 0 h 28683"/>
+                  <a:gd name="connsiteX1" fmla="*/ 289152 w 289151"/>
+                  <a:gd name="connsiteY1" fmla="*/ 0 h 28683"/>
+                  <a:gd name="connsiteX2" fmla="*/ 289152 w 289151"/>
+                  <a:gd name="connsiteY2" fmla="*/ 28684 h 28683"/>
+                  <a:gd name="connsiteX3" fmla="*/ 0 w 289151"/>
+                  <a:gd name="connsiteY3" fmla="*/ 28684 h 28683"/>
+                </a:gdLst>
+                <a:ahLst/>
+                <a:cxnLst>
+                  <a:cxn ang="0">
+                    <a:pos x="connsiteX0" y="connsiteY0"/>
+                  </a:cxn>
+                  <a:cxn ang="0">
+                    <a:pos x="connsiteX1" y="connsiteY1"/>
+                  </a:cxn>
+                  <a:cxn ang="0">
+                    <a:pos x="connsiteX2" y="connsiteY2"/>
+                  </a:cxn>
+                  <a:cxn ang="0">
+                    <a:pos x="connsiteX3" y="connsiteY3"/>
+                  </a:cxn>
+                </a:cxnLst>
+                <a:rect l="l" t="t" r="r" b="b"/>
+                <a:pathLst>
+                  <a:path w="289151" h="28683">
+                    <a:moveTo>
+                      <a:pt x="0" y="0"/>
+                    </a:moveTo>
+                    <a:lnTo>
+                      <a:pt x="289152" y="0"/>
+                    </a:lnTo>
+                    <a:lnTo>
+                      <a:pt x="289152" y="28684"/>
+                    </a:lnTo>
+                    <a:lnTo>
+                      <a:pt x="0" y="28684"/>
+                    </a:lnTo>
+                    <a:close/>
+                  </a:path>
+                </a:pathLst>
+              </a:custGeom>
+              <a:solidFill>
+                <a:srgbClr val="7DA6C6">
+                  <a:alpha val="40000"/>
+                </a:srgbClr>
+              </a:solidFill>
+              <a:ln w="3316" cap="flat">
+                <a:solidFill>
+                  <a:srgbClr val="333333"/>
+                </a:solidFill>
+                <a:prstDash val="solid"/>
+                <a:miter/>
+              </a:ln>
+            </p:spPr>
+            <p:txBody>
+              <a:bodyPr rtlCol="0" anchor="ctr"/>
+              <a:lstStyle/>
+              <a:p>
+                <a:endParaRPr lang="en-US"/>
+              </a:p>
+            </p:txBody>
+          </p:sp>
+          <p:sp>
+            <p:nvSpPr>
+              <p:cNvPr id="1175" name="Freeform 1174">
+                <a:extLst>
+                  <a:ext uri="{FF2B5EF4-FFF2-40B4-BE49-F238E27FC236}">
+                    <a16:creationId xmlns:a16="http://schemas.microsoft.com/office/drawing/2014/main" id="{F514E402-CDBA-1619-4254-72155D4F5A8B}"/>
+                  </a:ext>
+                </a:extLst>
+              </p:cNvPr>
+              <p:cNvSpPr/>
+              <p:nvPr/>
+            </p:nvSpPr>
+            <p:spPr>
+              <a:xfrm>
+                <a:off x="6255811" y="5272345"/>
+                <a:ext cx="216902" cy="34389"/>
+              </a:xfrm>
+              <a:custGeom>
+                <a:avLst/>
+                <a:gdLst>
+                  <a:gd name="connsiteX0" fmla="*/ 0 w 216902"/>
+                  <a:gd name="connsiteY0" fmla="*/ 0 h 34389"/>
+                  <a:gd name="connsiteX1" fmla="*/ 216902 w 216902"/>
+                  <a:gd name="connsiteY1" fmla="*/ 0 h 34389"/>
+                  <a:gd name="connsiteX2" fmla="*/ 216902 w 216902"/>
+                  <a:gd name="connsiteY2" fmla="*/ 34390 h 34389"/>
+                  <a:gd name="connsiteX3" fmla="*/ 0 w 216902"/>
+                  <a:gd name="connsiteY3" fmla="*/ 34390 h 34389"/>
+                </a:gdLst>
+                <a:ahLst/>
+                <a:cxnLst>
+                  <a:cxn ang="0">
+                    <a:pos x="connsiteX0" y="connsiteY0"/>
+                  </a:cxn>
+                  <a:cxn ang="0">
+                    <a:pos x="connsiteX1" y="connsiteY1"/>
+                  </a:cxn>
+                  <a:cxn ang="0">
+                    <a:pos x="connsiteX2" y="connsiteY2"/>
+                  </a:cxn>
+                  <a:cxn ang="0">
+                    <a:pos x="connsiteX3" y="connsiteY3"/>
+                  </a:cxn>
+                </a:cxnLst>
+                <a:rect l="l" t="t" r="r" b="b"/>
+                <a:pathLst>
+                  <a:path w="216902" h="34389">
+                    <a:moveTo>
+                      <a:pt x="0" y="0"/>
+                    </a:moveTo>
+                    <a:lnTo>
+                      <a:pt x="216902" y="0"/>
+                    </a:lnTo>
+                    <a:lnTo>
+                      <a:pt x="216902" y="34390"/>
+                    </a:lnTo>
+                    <a:lnTo>
+                      <a:pt x="0" y="34390"/>
+                    </a:lnTo>
+                    <a:close/>
+                  </a:path>
+                </a:pathLst>
+              </a:custGeom>
+              <a:solidFill>
+                <a:srgbClr val="7DA6C6">
+                  <a:alpha val="40000"/>
+                </a:srgbClr>
+              </a:solidFill>
+              <a:ln w="3316" cap="flat">
+                <a:solidFill>
+                  <a:srgbClr val="333333"/>
+                </a:solidFill>
+                <a:prstDash val="solid"/>
+                <a:miter/>
+              </a:ln>
+            </p:spPr>
+            <p:txBody>
+              <a:bodyPr rtlCol="0" anchor="ctr"/>
+              <a:lstStyle/>
+              <a:p>
+                <a:endParaRPr lang="en-US"/>
+              </a:p>
+            </p:txBody>
+          </p:sp>
+          <p:sp>
+            <p:nvSpPr>
+              <p:cNvPr id="1176" name="Freeform 1175">
+                <a:extLst>
+                  <a:ext uri="{FF2B5EF4-FFF2-40B4-BE49-F238E27FC236}">
+                    <a16:creationId xmlns:a16="http://schemas.microsoft.com/office/drawing/2014/main" id="{65AC4893-C561-F7D3-63F9-802AF491C2E9}"/>
+                  </a:ext>
+                </a:extLst>
+              </p:cNvPr>
+              <p:cNvSpPr/>
+              <p:nvPr/>
+            </p:nvSpPr>
+            <p:spPr>
+              <a:xfrm>
+                <a:off x="6291975" y="5231864"/>
+                <a:ext cx="144575" cy="40481"/>
+              </a:xfrm>
+              <a:custGeom>
+                <a:avLst/>
+                <a:gdLst>
+                  <a:gd name="connsiteX0" fmla="*/ 0 w 144575"/>
+                  <a:gd name="connsiteY0" fmla="*/ 0 h 40481"/>
+                  <a:gd name="connsiteX1" fmla="*/ 144576 w 144575"/>
+                  <a:gd name="connsiteY1" fmla="*/ 0 h 40481"/>
+                  <a:gd name="connsiteX2" fmla="*/ 144576 w 144575"/>
+                  <a:gd name="connsiteY2" fmla="*/ 40481 h 40481"/>
+                  <a:gd name="connsiteX3" fmla="*/ 0 w 144575"/>
+                  <a:gd name="connsiteY3" fmla="*/ 40481 h 40481"/>
+                </a:gdLst>
+                <a:ahLst/>
+                <a:cxnLst>
+                  <a:cxn ang="0">
+                    <a:pos x="connsiteX0" y="connsiteY0"/>
+                  </a:cxn>
+                  <a:cxn ang="0">
+                    <a:pos x="connsiteX1" y="connsiteY1"/>
+                  </a:cxn>
+                  <a:cxn ang="0">
+                    <a:pos x="connsiteX2" y="connsiteY2"/>
+                  </a:cxn>
+                  <a:cxn ang="0">
+                    <a:pos x="connsiteX3" y="connsiteY3"/>
+                  </a:cxn>
+                </a:cxnLst>
+                <a:rect l="l" t="t" r="r" b="b"/>
+                <a:pathLst>
+                  <a:path w="144575" h="40481">
+                    <a:moveTo>
+                      <a:pt x="0" y="0"/>
+                    </a:moveTo>
+                    <a:lnTo>
+                      <a:pt x="144576" y="0"/>
+                    </a:lnTo>
+                    <a:lnTo>
+                      <a:pt x="144576" y="40481"/>
+                    </a:lnTo>
+                    <a:lnTo>
+                      <a:pt x="0" y="40481"/>
+                    </a:lnTo>
+                    <a:close/>
+                  </a:path>
+                </a:pathLst>
+              </a:custGeom>
+              <a:solidFill>
+                <a:srgbClr val="7DA6C6">
+                  <a:alpha val="40000"/>
+                </a:srgbClr>
+              </a:solidFill>
+              <a:ln w="3316" cap="flat">
+                <a:solidFill>
+                  <a:srgbClr val="333333"/>
+                </a:solidFill>
+                <a:prstDash val="solid"/>
+                <a:miter/>
+              </a:ln>
+            </p:spPr>
+            <p:txBody>
+              <a:bodyPr rtlCol="0" anchor="ctr"/>
+              <a:lstStyle/>
+              <a:p>
+                <a:endParaRPr lang="en-US"/>
+              </a:p>
+            </p:txBody>
+          </p:sp>
+          <p:sp>
+            <p:nvSpPr>
+              <p:cNvPr id="1177" name="Freeform 1176">
+                <a:extLst>
+                  <a:ext uri="{FF2B5EF4-FFF2-40B4-BE49-F238E27FC236}">
+                    <a16:creationId xmlns:a16="http://schemas.microsoft.com/office/drawing/2014/main" id="{27368168-F7C4-0850-5C98-7FD884454475}"/>
+                  </a:ext>
+                </a:extLst>
+              </p:cNvPr>
+              <p:cNvSpPr/>
+              <p:nvPr/>
+            </p:nvSpPr>
+            <p:spPr>
+              <a:xfrm>
+                <a:off x="6219648" y="5335419"/>
+                <a:ext cx="289151" cy="7710"/>
+              </a:xfrm>
+              <a:custGeom>
+                <a:avLst/>
+                <a:gdLst>
+                  <a:gd name="connsiteX0" fmla="*/ 0 w 289151"/>
+                  <a:gd name="connsiteY0" fmla="*/ 0 h 7710"/>
+                  <a:gd name="connsiteX1" fmla="*/ 289152 w 289151"/>
+                  <a:gd name="connsiteY1" fmla="*/ 0 h 7710"/>
+                </a:gdLst>
+                <a:ahLst/>
+                <a:cxnLst>
+                  <a:cxn ang="0">
+                    <a:pos x="connsiteX0" y="connsiteY0"/>
+                  </a:cxn>
+                  <a:cxn ang="0">
+                    <a:pos x="connsiteX1" y="connsiteY1"/>
+                  </a:cxn>
+                </a:cxnLst>
+                <a:rect l="l" t="t" r="r" b="b"/>
+                <a:pathLst>
+                  <a:path w="289151" h="7710">
+                    <a:moveTo>
+                      <a:pt x="0" y="0"/>
+                    </a:moveTo>
+                    <a:lnTo>
+                      <a:pt x="289152" y="0"/>
+                    </a:lnTo>
+                  </a:path>
+                </a:pathLst>
+              </a:custGeom>
+              <a:ln w="3316" cap="flat">
+                <a:solidFill>
+                  <a:srgbClr val="7DA6C6">
+                    <a:alpha val="40000"/>
+                  </a:srgbClr>
+                </a:solidFill>
+                <a:prstDash val="solid"/>
+                <a:round/>
+              </a:ln>
+            </p:spPr>
+            <p:txBody>
+              <a:bodyPr rtlCol="0" anchor="ctr"/>
+              <a:lstStyle/>
+              <a:p>
+                <a:endParaRPr lang="en-US"/>
+              </a:p>
+            </p:txBody>
+          </p:sp>
+        </p:grpSp>
+        <p:grpSp>
+          <p:nvGrpSpPr>
+            <p:cNvPr id="1429" name="Group 1428">
+              <a:extLst>
+                <a:ext uri="{FF2B5EF4-FFF2-40B4-BE49-F238E27FC236}">
+                  <a16:creationId xmlns:a16="http://schemas.microsoft.com/office/drawing/2014/main" id="{AEB599E5-61FC-7125-EABF-800C0948FD93}"/>
+                </a:ext>
+              </a:extLst>
+            </p:cNvPr>
+            <p:cNvGrpSpPr>
+              <a:grpSpLocks noChangeAspect="1"/>
+            </p:cNvGrpSpPr>
+            <p:nvPr/>
+          </p:nvGrpSpPr>
+          <p:grpSpPr>
+            <a:xfrm rot="5400000">
+              <a:off x="8561259" y="5163497"/>
+              <a:ext cx="535197" cy="235995"/>
+              <a:chOff x="6528077" y="5245666"/>
+              <a:chExt cx="289228" cy="127535"/>
+            </a:xfrm>
+          </p:grpSpPr>
+          <p:sp>
+            <p:nvSpPr>
+              <p:cNvPr id="1187" name="Freeform 1186">
+                <a:extLst>
+                  <a:ext uri="{FF2B5EF4-FFF2-40B4-BE49-F238E27FC236}">
+                    <a16:creationId xmlns:a16="http://schemas.microsoft.com/office/drawing/2014/main" id="{8F241575-E971-35C9-A03B-56AEF3E38774}"/>
+                  </a:ext>
+                </a:extLst>
+              </p:cNvPr>
+              <p:cNvSpPr/>
+              <p:nvPr/>
+            </p:nvSpPr>
+            <p:spPr>
+              <a:xfrm>
+                <a:off x="6528077" y="5349684"/>
+                <a:ext cx="289151" cy="16115"/>
+              </a:xfrm>
+              <a:custGeom>
+                <a:avLst/>
+                <a:gdLst>
+                  <a:gd name="connsiteX0" fmla="*/ 0 w 289151"/>
+                  <a:gd name="connsiteY0" fmla="*/ 0 h 16115"/>
+                  <a:gd name="connsiteX1" fmla="*/ 289152 w 289151"/>
+                  <a:gd name="connsiteY1" fmla="*/ 0 h 16115"/>
+                  <a:gd name="connsiteX2" fmla="*/ 289152 w 289151"/>
+                  <a:gd name="connsiteY2" fmla="*/ 16115 h 16115"/>
+                  <a:gd name="connsiteX3" fmla="*/ 0 w 289151"/>
+                  <a:gd name="connsiteY3" fmla="*/ 16115 h 16115"/>
+                </a:gdLst>
+                <a:ahLst/>
+                <a:cxnLst>
+                  <a:cxn ang="0">
+                    <a:pos x="connsiteX0" y="connsiteY0"/>
+                  </a:cxn>
+                  <a:cxn ang="0">
+                    <a:pos x="connsiteX1" y="connsiteY1"/>
+                  </a:cxn>
+                  <a:cxn ang="0">
+                    <a:pos x="connsiteX2" y="connsiteY2"/>
+                  </a:cxn>
+                  <a:cxn ang="0">
+                    <a:pos x="connsiteX3" y="connsiteY3"/>
+                  </a:cxn>
+                </a:cxnLst>
+                <a:rect l="l" t="t" r="r" b="b"/>
+                <a:pathLst>
+                  <a:path w="289151" h="16115">
+                    <a:moveTo>
+                      <a:pt x="0" y="0"/>
+                    </a:moveTo>
+                    <a:lnTo>
+                      <a:pt x="289152" y="0"/>
+                    </a:lnTo>
+                    <a:lnTo>
+                      <a:pt x="289152" y="16115"/>
+                    </a:lnTo>
+                    <a:lnTo>
+                      <a:pt x="0" y="16115"/>
+                    </a:lnTo>
+                    <a:close/>
+                  </a:path>
+                </a:pathLst>
+              </a:custGeom>
+              <a:solidFill>
+                <a:srgbClr val="84C3B7">
+                  <a:alpha val="40000"/>
+                </a:srgbClr>
+              </a:solidFill>
+              <a:ln w="3316" cap="flat">
+                <a:solidFill>
+                  <a:srgbClr val="333333"/>
+                </a:solidFill>
+                <a:prstDash val="solid"/>
+                <a:miter/>
+              </a:ln>
+            </p:spPr>
+            <p:txBody>
+              <a:bodyPr rtlCol="0" anchor="ctr"/>
+              <a:lstStyle/>
+              <a:p>
+                <a:endParaRPr lang="en-US"/>
+              </a:p>
+            </p:txBody>
+          </p:sp>
+          <p:sp>
+            <p:nvSpPr>
+              <p:cNvPr id="1188" name="Freeform 1187">
+                <a:extLst>
+                  <a:ext uri="{FF2B5EF4-FFF2-40B4-BE49-F238E27FC236}">
+                    <a16:creationId xmlns:a16="http://schemas.microsoft.com/office/drawing/2014/main" id="{FAEA2A8B-5126-2025-D806-49792BBBFC3A}"/>
+                  </a:ext>
+                </a:extLst>
+              </p:cNvPr>
+              <p:cNvSpPr/>
+              <p:nvPr/>
+            </p:nvSpPr>
+            <p:spPr>
+              <a:xfrm>
+                <a:off x="6528077" y="5324392"/>
+                <a:ext cx="289151" cy="25214"/>
+              </a:xfrm>
+              <a:custGeom>
+                <a:avLst/>
+                <a:gdLst>
+                  <a:gd name="connsiteX0" fmla="*/ 0 w 289151"/>
+                  <a:gd name="connsiteY0" fmla="*/ 0 h 25214"/>
+                  <a:gd name="connsiteX1" fmla="*/ 289152 w 289151"/>
+                  <a:gd name="connsiteY1" fmla="*/ 0 h 25214"/>
+                  <a:gd name="connsiteX2" fmla="*/ 289152 w 289151"/>
+                  <a:gd name="connsiteY2" fmla="*/ 25214 h 25214"/>
+                  <a:gd name="connsiteX3" fmla="*/ 0 w 289151"/>
+                  <a:gd name="connsiteY3" fmla="*/ 25214 h 25214"/>
+                </a:gdLst>
+                <a:ahLst/>
+                <a:cxnLst>
+                  <a:cxn ang="0">
+                    <a:pos x="connsiteX0" y="connsiteY0"/>
+                  </a:cxn>
+                  <a:cxn ang="0">
+                    <a:pos x="connsiteX1" y="connsiteY1"/>
+                  </a:cxn>
+                  <a:cxn ang="0">
+                    <a:pos x="connsiteX2" y="connsiteY2"/>
+                  </a:cxn>
+                  <a:cxn ang="0">
+                    <a:pos x="connsiteX3" y="connsiteY3"/>
+                  </a:cxn>
+                </a:cxnLst>
+                <a:rect l="l" t="t" r="r" b="b"/>
+                <a:pathLst>
+                  <a:path w="289151" h="25214">
+                    <a:moveTo>
+                      <a:pt x="0" y="0"/>
+                    </a:moveTo>
+                    <a:lnTo>
+                      <a:pt x="289152" y="0"/>
+                    </a:lnTo>
+                    <a:lnTo>
+                      <a:pt x="289152" y="25214"/>
+                    </a:lnTo>
+                    <a:lnTo>
+                      <a:pt x="0" y="25214"/>
+                    </a:lnTo>
+                    <a:close/>
+                  </a:path>
+                </a:pathLst>
+              </a:custGeom>
+              <a:solidFill>
+                <a:srgbClr val="84C3B7">
+                  <a:alpha val="40000"/>
+                </a:srgbClr>
+              </a:solidFill>
+              <a:ln w="3316" cap="flat">
+                <a:solidFill>
+                  <a:srgbClr val="333333"/>
+                </a:solidFill>
+                <a:prstDash val="solid"/>
+                <a:miter/>
+              </a:ln>
+            </p:spPr>
+            <p:txBody>
+              <a:bodyPr rtlCol="0" anchor="ctr"/>
+              <a:lstStyle/>
+              <a:p>
+                <a:endParaRPr lang="en-US"/>
+              </a:p>
+            </p:txBody>
+          </p:sp>
+          <p:grpSp>
+            <p:nvGrpSpPr>
+              <p:cNvPr id="1428" name="Group 1427">
+                <a:extLst>
+                  <a:ext uri="{FF2B5EF4-FFF2-40B4-BE49-F238E27FC236}">
+                    <a16:creationId xmlns:a16="http://schemas.microsoft.com/office/drawing/2014/main" id="{DF734038-9622-5849-8F05-694FDDB07821}"/>
+                  </a:ext>
+                </a:extLst>
+              </p:cNvPr>
+              <p:cNvGrpSpPr/>
+              <p:nvPr/>
+            </p:nvGrpSpPr>
+            <p:grpSpPr>
+              <a:xfrm>
+                <a:off x="6564240" y="5245666"/>
+                <a:ext cx="216902" cy="127535"/>
+                <a:chOff x="6564240" y="5245666"/>
+                <a:chExt cx="216902" cy="127535"/>
+              </a:xfrm>
+            </p:grpSpPr>
+            <p:sp>
+              <p:nvSpPr>
+                <p:cNvPr id="1185" name="Freeform 1184">
+                  <a:extLst>
+                    <a:ext uri="{FF2B5EF4-FFF2-40B4-BE49-F238E27FC236}">
+                      <a16:creationId xmlns:a16="http://schemas.microsoft.com/office/drawing/2014/main" id="{467445F3-5970-215C-1EAC-90CF6D307C92}"/>
+                    </a:ext>
+                  </a:extLst>
+                </p:cNvPr>
+                <p:cNvSpPr/>
+                <p:nvPr/>
+              </p:nvSpPr>
+              <p:spPr>
+                <a:xfrm>
+                  <a:off x="6600403" y="5371197"/>
+                  <a:ext cx="144575" cy="2004"/>
+                </a:xfrm>
+                <a:custGeom>
+                  <a:avLst/>
+                  <a:gdLst>
+                    <a:gd name="connsiteX0" fmla="*/ 0 w 144575"/>
+                    <a:gd name="connsiteY0" fmla="*/ 0 h 2004"/>
+                    <a:gd name="connsiteX1" fmla="*/ 144576 w 144575"/>
+                    <a:gd name="connsiteY1" fmla="*/ 0 h 2004"/>
+                    <a:gd name="connsiteX2" fmla="*/ 144576 w 144575"/>
+                    <a:gd name="connsiteY2" fmla="*/ 2005 h 2004"/>
+                    <a:gd name="connsiteX3" fmla="*/ 0 w 144575"/>
+                    <a:gd name="connsiteY3" fmla="*/ 2005 h 2004"/>
+                  </a:gdLst>
+                  <a:ahLst/>
+                  <a:cxnLst>
+                    <a:cxn ang="0">
+                      <a:pos x="connsiteX0" y="connsiteY0"/>
+                    </a:cxn>
+                    <a:cxn ang="0">
+                      <a:pos x="connsiteX1" y="connsiteY1"/>
+                    </a:cxn>
+                    <a:cxn ang="0">
+                      <a:pos x="connsiteX2" y="connsiteY2"/>
+                    </a:cxn>
+                    <a:cxn ang="0">
+                      <a:pos x="connsiteX3" y="connsiteY3"/>
+                    </a:cxn>
+                  </a:cxnLst>
+                  <a:rect l="l" t="t" r="r" b="b"/>
+                  <a:pathLst>
+                    <a:path w="144575" h="2004">
+                      <a:moveTo>
+                        <a:pt x="0" y="0"/>
+                      </a:moveTo>
+                      <a:lnTo>
+                        <a:pt x="144576" y="0"/>
+                      </a:lnTo>
+                      <a:lnTo>
+                        <a:pt x="144576" y="2005"/>
+                      </a:lnTo>
+                      <a:lnTo>
+                        <a:pt x="0" y="2005"/>
+                      </a:lnTo>
+                      <a:close/>
+                    </a:path>
+                  </a:pathLst>
+                </a:custGeom>
+                <a:solidFill>
+                  <a:srgbClr val="84C3B7">
+                    <a:alpha val="40000"/>
+                  </a:srgbClr>
+                </a:solidFill>
+                <a:ln w="3316" cap="flat">
+                  <a:solidFill>
+                    <a:srgbClr val="333333"/>
+                  </a:solidFill>
+                  <a:prstDash val="solid"/>
+                  <a:miter/>
+                </a:ln>
+              </p:spPr>
+              <p:txBody>
+                <a:bodyPr rtlCol="0" anchor="ctr"/>
+                <a:lstStyle/>
+                <a:p>
+                  <a:endParaRPr lang="en-US"/>
+                </a:p>
+              </p:txBody>
+            </p:sp>
+            <p:sp>
+              <p:nvSpPr>
+                <p:cNvPr id="1186" name="Freeform 1185">
+                  <a:extLst>
+                    <a:ext uri="{FF2B5EF4-FFF2-40B4-BE49-F238E27FC236}">
+                      <a16:creationId xmlns:a16="http://schemas.microsoft.com/office/drawing/2014/main" id="{2FAC839F-7521-BA8D-E60A-0326853CDB64}"/>
+                    </a:ext>
+                  </a:extLst>
+                </p:cNvPr>
+                <p:cNvSpPr/>
+                <p:nvPr/>
+              </p:nvSpPr>
+              <p:spPr>
+                <a:xfrm>
+                  <a:off x="6564240" y="5365722"/>
+                  <a:ext cx="216902" cy="5474"/>
+                </a:xfrm>
+                <a:custGeom>
+                  <a:avLst/>
+                  <a:gdLst>
+                    <a:gd name="connsiteX0" fmla="*/ 0 w 216902"/>
+                    <a:gd name="connsiteY0" fmla="*/ 0 h 5474"/>
+                    <a:gd name="connsiteX1" fmla="*/ 216902 w 216902"/>
+                    <a:gd name="connsiteY1" fmla="*/ 0 h 5474"/>
+                    <a:gd name="connsiteX2" fmla="*/ 216902 w 216902"/>
+                    <a:gd name="connsiteY2" fmla="*/ 5475 h 5474"/>
+                    <a:gd name="connsiteX3" fmla="*/ 0 w 216902"/>
+                    <a:gd name="connsiteY3" fmla="*/ 5475 h 5474"/>
+                  </a:gdLst>
+                  <a:ahLst/>
+                  <a:cxnLst>
+                    <a:cxn ang="0">
+                      <a:pos x="connsiteX0" y="connsiteY0"/>
+                    </a:cxn>
+                    <a:cxn ang="0">
+                      <a:pos x="connsiteX1" y="connsiteY1"/>
+                    </a:cxn>
+                    <a:cxn ang="0">
+                      <a:pos x="connsiteX2" y="connsiteY2"/>
+                    </a:cxn>
+                    <a:cxn ang="0">
+                      <a:pos x="connsiteX3" y="connsiteY3"/>
+                    </a:cxn>
+                  </a:cxnLst>
+                  <a:rect l="l" t="t" r="r" b="b"/>
+                  <a:pathLst>
+                    <a:path w="216902" h="5474">
+                      <a:moveTo>
+                        <a:pt x="0" y="0"/>
+                      </a:moveTo>
+                      <a:lnTo>
+                        <a:pt x="216902" y="0"/>
+                      </a:lnTo>
+                      <a:lnTo>
+                        <a:pt x="216902" y="5475"/>
+                      </a:lnTo>
+                      <a:lnTo>
+                        <a:pt x="0" y="5475"/>
+                      </a:lnTo>
+                      <a:close/>
+                    </a:path>
+                  </a:pathLst>
+                </a:custGeom>
+                <a:solidFill>
+                  <a:srgbClr val="84C3B7">
+                    <a:alpha val="40000"/>
+                  </a:srgbClr>
+                </a:solidFill>
+                <a:ln w="3316" cap="flat">
+                  <a:solidFill>
+                    <a:srgbClr val="333333"/>
+                  </a:solidFill>
+                  <a:prstDash val="solid"/>
+                  <a:miter/>
+                </a:ln>
+              </p:spPr>
+              <p:txBody>
+                <a:bodyPr rtlCol="0" anchor="ctr"/>
+                <a:lstStyle/>
+                <a:p>
+                  <a:endParaRPr lang="en-US"/>
+                </a:p>
+              </p:txBody>
+            </p:sp>
+            <p:sp>
+              <p:nvSpPr>
+                <p:cNvPr id="1189" name="Freeform 1188">
+                  <a:extLst>
+                    <a:ext uri="{FF2B5EF4-FFF2-40B4-BE49-F238E27FC236}">
+                      <a16:creationId xmlns:a16="http://schemas.microsoft.com/office/drawing/2014/main" id="{CAFE1A1A-EC66-4293-0AA0-A53DFDD204FF}"/>
+                    </a:ext>
+                  </a:extLst>
+                </p:cNvPr>
+                <p:cNvSpPr/>
+                <p:nvPr/>
+              </p:nvSpPr>
+              <p:spPr>
+                <a:xfrm>
+                  <a:off x="6564240" y="5269415"/>
+                  <a:ext cx="216902" cy="54977"/>
+                </a:xfrm>
+                <a:custGeom>
+                  <a:avLst/>
+                  <a:gdLst>
+                    <a:gd name="connsiteX0" fmla="*/ 0 w 216902"/>
+                    <a:gd name="connsiteY0" fmla="*/ 0 h 54977"/>
+                    <a:gd name="connsiteX1" fmla="*/ 216902 w 216902"/>
+                    <a:gd name="connsiteY1" fmla="*/ 0 h 54977"/>
+                    <a:gd name="connsiteX2" fmla="*/ 216902 w 216902"/>
+                    <a:gd name="connsiteY2" fmla="*/ 54977 h 54977"/>
+                    <a:gd name="connsiteX3" fmla="*/ 0 w 216902"/>
+                    <a:gd name="connsiteY3" fmla="*/ 54977 h 54977"/>
+                  </a:gdLst>
+                  <a:ahLst/>
+                  <a:cxnLst>
+                    <a:cxn ang="0">
+                      <a:pos x="connsiteX0" y="connsiteY0"/>
+                    </a:cxn>
+                    <a:cxn ang="0">
+                      <a:pos x="connsiteX1" y="connsiteY1"/>
+                    </a:cxn>
+                    <a:cxn ang="0">
+                      <a:pos x="connsiteX2" y="connsiteY2"/>
+                    </a:cxn>
+                    <a:cxn ang="0">
+                      <a:pos x="connsiteX3" y="connsiteY3"/>
+                    </a:cxn>
+                  </a:cxnLst>
+                  <a:rect l="l" t="t" r="r" b="b"/>
+                  <a:pathLst>
+                    <a:path w="216902" h="54977">
+                      <a:moveTo>
+                        <a:pt x="0" y="0"/>
+                      </a:moveTo>
+                      <a:lnTo>
+                        <a:pt x="216902" y="0"/>
+                      </a:lnTo>
+                      <a:lnTo>
+                        <a:pt x="216902" y="54977"/>
+                      </a:lnTo>
+                      <a:lnTo>
+                        <a:pt x="0" y="54977"/>
+                      </a:lnTo>
+                      <a:close/>
+                    </a:path>
+                  </a:pathLst>
+                </a:custGeom>
+                <a:solidFill>
+                  <a:srgbClr val="84C3B7">
+                    <a:alpha val="40000"/>
+                  </a:srgbClr>
+                </a:solidFill>
+                <a:ln w="3316" cap="flat">
+                  <a:solidFill>
+                    <a:srgbClr val="333333"/>
+                  </a:solidFill>
+                  <a:prstDash val="solid"/>
+                  <a:miter/>
+                </a:ln>
+              </p:spPr>
+              <p:txBody>
+                <a:bodyPr rtlCol="0" anchor="ctr"/>
+                <a:lstStyle/>
+                <a:p>
+                  <a:endParaRPr lang="en-US"/>
+                </a:p>
+              </p:txBody>
+            </p:sp>
+            <p:sp>
+              <p:nvSpPr>
+                <p:cNvPr id="1190" name="Freeform 1189">
+                  <a:extLst>
+                    <a:ext uri="{FF2B5EF4-FFF2-40B4-BE49-F238E27FC236}">
+                      <a16:creationId xmlns:a16="http://schemas.microsoft.com/office/drawing/2014/main" id="{CAEDDCC7-8D05-4529-3677-86736D19007F}"/>
+                    </a:ext>
+                  </a:extLst>
+                </p:cNvPr>
+                <p:cNvSpPr/>
+                <p:nvPr/>
+              </p:nvSpPr>
+              <p:spPr>
+                <a:xfrm>
+                  <a:off x="6600403" y="5245666"/>
+                  <a:ext cx="144575" cy="23748"/>
+                </a:xfrm>
+                <a:custGeom>
+                  <a:avLst/>
+                  <a:gdLst>
+                    <a:gd name="connsiteX0" fmla="*/ 0 w 144575"/>
+                    <a:gd name="connsiteY0" fmla="*/ 0 h 23748"/>
+                    <a:gd name="connsiteX1" fmla="*/ 144576 w 144575"/>
+                    <a:gd name="connsiteY1" fmla="*/ 0 h 23748"/>
+                    <a:gd name="connsiteX2" fmla="*/ 144576 w 144575"/>
+                    <a:gd name="connsiteY2" fmla="*/ 23749 h 23748"/>
+                    <a:gd name="connsiteX3" fmla="*/ 0 w 144575"/>
+                    <a:gd name="connsiteY3" fmla="*/ 23749 h 23748"/>
+                  </a:gdLst>
+                  <a:ahLst/>
+                  <a:cxnLst>
+                    <a:cxn ang="0">
+                      <a:pos x="connsiteX0" y="connsiteY0"/>
+                    </a:cxn>
+                    <a:cxn ang="0">
+                      <a:pos x="connsiteX1" y="connsiteY1"/>
+                    </a:cxn>
+                    <a:cxn ang="0">
+                      <a:pos x="connsiteX2" y="connsiteY2"/>
+                    </a:cxn>
+                    <a:cxn ang="0">
+                      <a:pos x="connsiteX3" y="connsiteY3"/>
+                    </a:cxn>
+                  </a:cxnLst>
+                  <a:rect l="l" t="t" r="r" b="b"/>
+                  <a:pathLst>
+                    <a:path w="144575" h="23748">
+                      <a:moveTo>
+                        <a:pt x="0" y="0"/>
+                      </a:moveTo>
+                      <a:lnTo>
+                        <a:pt x="144576" y="0"/>
+                      </a:lnTo>
+                      <a:lnTo>
+                        <a:pt x="144576" y="23749"/>
+                      </a:lnTo>
+                      <a:lnTo>
+                        <a:pt x="0" y="23749"/>
+                      </a:lnTo>
+                      <a:close/>
+                    </a:path>
+                  </a:pathLst>
+                </a:custGeom>
+                <a:solidFill>
+                  <a:srgbClr val="84C3B7">
+                    <a:alpha val="40000"/>
+                  </a:srgbClr>
+                </a:solidFill>
+                <a:ln w="3316" cap="flat">
+                  <a:solidFill>
+                    <a:srgbClr val="333333"/>
+                  </a:solidFill>
+                  <a:prstDash val="solid"/>
+                  <a:miter/>
+                </a:ln>
+              </p:spPr>
+              <p:txBody>
+                <a:bodyPr rtlCol="0" anchor="ctr"/>
+                <a:lstStyle/>
+                <a:p>
+                  <a:endParaRPr lang="en-US"/>
+                </a:p>
+              </p:txBody>
+            </p:sp>
+          </p:grpSp>
+          <p:sp>
+            <p:nvSpPr>
+              <p:cNvPr id="1191" name="Freeform 1190">
+                <a:extLst>
+                  <a:ext uri="{FF2B5EF4-FFF2-40B4-BE49-F238E27FC236}">
+                    <a16:creationId xmlns:a16="http://schemas.microsoft.com/office/drawing/2014/main" id="{07EE19AB-FA6C-B5F7-7CB8-F4AAE17C8485}"/>
+                  </a:ext>
+                </a:extLst>
+              </p:cNvPr>
+              <p:cNvSpPr/>
+              <p:nvPr/>
+            </p:nvSpPr>
+            <p:spPr>
+              <a:xfrm>
+                <a:off x="6528077" y="5349684"/>
+                <a:ext cx="289228" cy="7710"/>
+              </a:xfrm>
+              <a:custGeom>
+                <a:avLst/>
+                <a:gdLst>
+                  <a:gd name="connsiteX0" fmla="*/ 0 w 289228"/>
+                  <a:gd name="connsiteY0" fmla="*/ 0 h 7710"/>
+                  <a:gd name="connsiteX1" fmla="*/ 289229 w 289228"/>
+                  <a:gd name="connsiteY1" fmla="*/ 0 h 7710"/>
+                </a:gdLst>
+                <a:ahLst/>
+                <a:cxnLst>
+                  <a:cxn ang="0">
+                    <a:pos x="connsiteX0" y="connsiteY0"/>
+                  </a:cxn>
+                  <a:cxn ang="0">
+                    <a:pos x="connsiteX1" y="connsiteY1"/>
+                  </a:cxn>
+                </a:cxnLst>
+                <a:rect l="l" t="t" r="r" b="b"/>
+                <a:pathLst>
+                  <a:path w="289228" h="7710">
+                    <a:moveTo>
+                      <a:pt x="0" y="0"/>
+                    </a:moveTo>
+                    <a:lnTo>
+                      <a:pt x="289229" y="0"/>
+                    </a:lnTo>
+                  </a:path>
+                </a:pathLst>
+              </a:custGeom>
+              <a:ln w="3316" cap="flat">
+                <a:solidFill>
+                  <a:srgbClr val="84C3B7">
+                    <a:alpha val="40000"/>
+                  </a:srgbClr>
+                </a:solidFill>
+                <a:prstDash val="solid"/>
+                <a:round/>
+              </a:ln>
+            </p:spPr>
+            <p:txBody>
+              <a:bodyPr rtlCol="0" anchor="ctr"/>
+              <a:lstStyle/>
+              <a:p>
+                <a:endParaRPr lang="en-US"/>
+              </a:p>
+            </p:txBody>
+          </p:sp>
+        </p:grpSp>
+        <p:cxnSp>
+          <p:nvCxnSpPr>
+            <p:cNvPr id="1431" name="Straight Arrow Connector 1430">
+              <a:extLst>
+                <a:ext uri="{FF2B5EF4-FFF2-40B4-BE49-F238E27FC236}">
+                  <a16:creationId xmlns:a16="http://schemas.microsoft.com/office/drawing/2014/main" id="{F745AAC9-6B67-2A3C-C545-622686EAE5EF}"/>
+                </a:ext>
+              </a:extLst>
+            </p:cNvPr>
+            <p:cNvCxnSpPr>
+              <a:cxnSpLocks/>
+            </p:cNvCxnSpPr>
+            <p:nvPr/>
+          </p:nvCxnSpPr>
+          <p:spPr>
+            <a:xfrm>
+              <a:off x="8639856" y="2303418"/>
+              <a:ext cx="2863034" cy="0"/>
+            </a:xfrm>
+            <a:prstGeom prst="straightConnector1">
+              <a:avLst/>
+            </a:prstGeom>
+            <a:ln>
+              <a:tailEnd type="triangle"/>
+            </a:ln>
+          </p:spPr>
+          <p:style>
+            <a:lnRef idx="2">
+              <a:schemeClr val="dk1"/>
+            </a:lnRef>
+            <a:fillRef idx="0">
+              <a:schemeClr val="dk1"/>
+            </a:fillRef>
+            <a:effectRef idx="1">
+              <a:schemeClr val="dk1"/>
+            </a:effectRef>
+            <a:fontRef idx="minor">
+              <a:schemeClr val="tx1"/>
+            </a:fontRef>
+          </p:style>
+        </p:cxnSp>
+        <p:cxnSp>
+          <p:nvCxnSpPr>
+            <p:cNvPr id="1432" name="Straight Arrow Connector 1431">
+              <a:extLst>
+                <a:ext uri="{FF2B5EF4-FFF2-40B4-BE49-F238E27FC236}">
+                  <a16:creationId xmlns:a16="http://schemas.microsoft.com/office/drawing/2014/main" id="{F549127B-792B-F72D-6AAB-754BD91762F3}"/>
+                </a:ext>
+              </a:extLst>
+            </p:cNvPr>
+            <p:cNvCxnSpPr>
+              <a:cxnSpLocks/>
+            </p:cNvCxnSpPr>
+            <p:nvPr/>
+          </p:nvCxnSpPr>
+          <p:spPr>
+            <a:xfrm>
+              <a:off x="8644256" y="2303418"/>
+              <a:ext cx="12572" cy="3563429"/>
+            </a:xfrm>
+            <a:prstGeom prst="straightConnector1">
+              <a:avLst/>
+            </a:prstGeom>
+            <a:ln>
+              <a:tailEnd type="triangle"/>
+            </a:ln>
+          </p:spPr>
+          <p:style>
+            <a:lnRef idx="2">
+              <a:schemeClr val="dk1"/>
+            </a:lnRef>
+            <a:fillRef idx="0">
+              <a:schemeClr val="dk1"/>
+            </a:fillRef>
+            <a:effectRef idx="1">
+              <a:schemeClr val="dk1"/>
+            </a:effectRef>
+            <a:fontRef idx="minor">
+              <a:schemeClr val="tx1"/>
+            </a:fontRef>
+          </p:style>
+        </p:cxnSp>
+        <p:sp>
+          <p:nvSpPr>
+            <p:cNvPr id="1469" name="TextBox 1468">
+              <a:extLst>
+                <a:ext uri="{FF2B5EF4-FFF2-40B4-BE49-F238E27FC236}">
+                  <a16:creationId xmlns:a16="http://schemas.microsoft.com/office/drawing/2014/main" id="{E84A8F91-6CF2-8040-8FD4-7C4E32B5CD03}"/>
+                </a:ext>
+              </a:extLst>
+            </p:cNvPr>
+            <p:cNvSpPr txBox="1"/>
+            <p:nvPr/>
+          </p:nvSpPr>
+          <p:spPr>
+            <a:xfrm>
+              <a:off x="9080140" y="1894442"/>
+              <a:ext cx="2141384" cy="416011"/>
+            </a:xfrm>
+            <a:prstGeom prst="rect">
+              <a:avLst/>
+            </a:prstGeom>
+            <a:noFill/>
+          </p:spPr>
+          <p:txBody>
+            <a:bodyPr wrap="square">
+              <a:spAutoFit/>
+            </a:bodyPr>
+            <a:lstStyle/>
+            <a:p>
+              <a:pPr algn="ctr">
+                <a:lnSpc>
+                  <a:spcPct val="150000"/>
+                </a:lnSpc>
+              </a:pPr>
+              <a:r>
+                <a:rPr lang="en-US" sz="1600" dirty="0">
+                  <a:latin typeface="Arial" panose="020B0604020202020204" pitchFamily="34" charset="0"/>
+                  <a:cs typeface="Arial" panose="020B0604020202020204" pitchFamily="34" charset="0"/>
+                </a:rPr>
+                <a:t>Error distribution</a:t>
+              </a:r>
+            </a:p>
+          </p:txBody>
+        </p:sp>
+        <p:cxnSp>
+          <p:nvCxnSpPr>
+            <p:cNvPr id="1503" name="Straight Connector 1502">
+              <a:extLst>
+                <a:ext uri="{FF2B5EF4-FFF2-40B4-BE49-F238E27FC236}">
+                  <a16:creationId xmlns:a16="http://schemas.microsoft.com/office/drawing/2014/main" id="{B4EC0CEE-07E2-06BE-5C5D-DF06EA54A332}"/>
+                </a:ext>
+              </a:extLst>
+            </p:cNvPr>
+            <p:cNvCxnSpPr>
+              <a:cxnSpLocks/>
+            </p:cNvCxnSpPr>
+            <p:nvPr/>
+          </p:nvCxnSpPr>
+          <p:spPr>
+            <a:xfrm>
+              <a:off x="8657672" y="4275262"/>
+              <a:ext cx="2863141" cy="0"/>
+            </a:xfrm>
+            <a:prstGeom prst="line">
+              <a:avLst/>
+            </a:prstGeom>
+            <a:ln>
+              <a:solidFill>
+                <a:srgbClr val="AEAEAE"/>
+              </a:solidFill>
+              <a:prstDash val="dash"/>
+            </a:ln>
+          </p:spPr>
+          <p:style>
+            <a:lnRef idx="2">
+              <a:schemeClr val="accent1"/>
+            </a:lnRef>
+            <a:fillRef idx="0">
+              <a:schemeClr val="accent1"/>
+            </a:fillRef>
+            <a:effectRef idx="1">
+              <a:schemeClr val="accent1"/>
+            </a:effectRef>
+            <a:fontRef idx="minor">
+              <a:schemeClr val="tx1"/>
+            </a:fontRef>
+          </p:style>
+        </p:cxnSp>
+        <p:sp>
+          <p:nvSpPr>
+            <p:cNvPr id="1518" name="Rectangle 1517">
+              <a:extLst>
+                <a:ext uri="{FF2B5EF4-FFF2-40B4-BE49-F238E27FC236}">
+                  <a16:creationId xmlns:a16="http://schemas.microsoft.com/office/drawing/2014/main" id="{5CFEA8D0-748F-830E-9E99-02A5D2356B9B}"/>
+                </a:ext>
+              </a:extLst>
+            </p:cNvPr>
+            <p:cNvSpPr/>
+            <p:nvPr/>
+          </p:nvSpPr>
+          <p:spPr>
+            <a:xfrm>
+              <a:off x="8205197" y="655423"/>
+              <a:ext cx="3744491" cy="5456192"/>
+            </a:xfrm>
+            <a:prstGeom prst="rect">
+              <a:avLst/>
+            </a:prstGeom>
+            <a:noFill/>
+            <a:ln w="28575">
+              <a:solidFill>
+                <a:srgbClr val="AEAEAE"/>
+              </a:solidFill>
+              <a:prstDash val="dash"/>
+            </a:ln>
+          </p:spPr>
+          <p:style>
+            <a:lnRef idx="2">
+              <a:schemeClr val="accent1">
+                <a:shade val="15000"/>
+              </a:schemeClr>
+            </a:lnRef>
+            <a:fillRef idx="1">
+              <a:schemeClr val="accent1"/>
+            </a:fillRef>
+            <a:effectRef idx="0">
+              <a:schemeClr val="accent1"/>
+            </a:effectRef>
+            <a:fontRef idx="minor">
+              <a:schemeClr val="lt1"/>
+            </a:fontRef>
+          </p:style>
+          <p:txBody>
+            <a:bodyPr rtlCol="0" anchor="ctr"/>
+            <a:lstStyle/>
+            <a:p>
+              <a:pPr algn="ctr"/>
+              <a:endParaRPr lang="en-US"/>
+            </a:p>
+          </p:txBody>
+        </p:sp>
+      </p:grpSp>
+      <p:sp>
+        <p:nvSpPr>
+          <p:cNvPr id="1519" name="TextBox 1518">
+            <a:extLst>
+              <a:ext uri="{FF2B5EF4-FFF2-40B4-BE49-F238E27FC236}">
+                <a16:creationId xmlns:a16="http://schemas.microsoft.com/office/drawing/2014/main" id="{AC4B8D94-D9EB-916B-1D6F-7B5FBCA99DB9}"/>
+              </a:ext>
+            </a:extLst>
+          </p:cNvPr>
+          <p:cNvSpPr txBox="1"/>
+          <p:nvPr/>
+        </p:nvSpPr>
+        <p:spPr>
+          <a:xfrm>
+            <a:off x="9071438" y="6203829"/>
+            <a:ext cx="2477467" cy="456535"/>
+          </a:xfrm>
+          <a:prstGeom prst="rect">
+            <a:avLst/>
+          </a:prstGeom>
+          <a:noFill/>
+        </p:spPr>
+        <p:txBody>
+          <a:bodyPr wrap="square">
+            <a:spAutoFit/>
+          </a:bodyPr>
+          <a:lstStyle/>
+          <a:p>
+            <a:pPr algn="ctr">
+              <a:lnSpc>
+                <a:spcPct val="150000"/>
+              </a:lnSpc>
+            </a:pPr>
+            <a:r>
+              <a:rPr lang="en-US" dirty="0">
+                <a:latin typeface="Arial" panose="020B0604020202020204" pitchFamily="34" charset="0"/>
+                <a:cs typeface="Arial" panose="020B0604020202020204" pitchFamily="34" charset="0"/>
+              </a:rPr>
+              <a:t>Policy implication</a:t>
+            </a:r>
+          </a:p>
+        </p:txBody>
+      </p:sp>
+    </p:spTree>
+    <p:extLst>
+      <p:ext uri="{BB962C8B-B14F-4D97-AF65-F5344CB8AC3E}">
+        <p14:creationId xmlns:p14="http://schemas.microsoft.com/office/powerpoint/2010/main" val="2486185566"/>
+      </p:ext>
+    </p:extLst>
+  </p:cSld>
+  <p:clrMapOvr>
+    <a:masterClrMapping/>
+  </p:clrMapOvr>
+</p:sld>
+</file>
+
+<file path=ppt/slides/slide2.xml><?xml version="1.0" encoding="utf-8"?>
+<p:sld xmlns:a="http://schemas.openxmlformats.org/drawingml/2006/main" xmlns:r="http://schemas.openxmlformats.org/officeDocument/2006/relationships" xmlns:p="http://schemas.openxmlformats.org/presentationml/2006/main">
+  <p:cSld>
+    <p:spTree>
+      <p:nvGrpSpPr>
+        <p:cNvPr id="1" name="">
+          <a:extLst>
+            <a:ext uri="{FF2B5EF4-FFF2-40B4-BE49-F238E27FC236}">
+              <a16:creationId xmlns:a16="http://schemas.microsoft.com/office/drawing/2014/main" id="{744A0C43-1615-FF91-9B5B-CD5B82959318}"/>
+            </a:ext>
+          </a:extLst>
+        </p:cNvPr>
+        <p:cNvGrpSpPr/>
+        <p:nvPr/>
+      </p:nvGrpSpPr>
+      <p:grpSpPr>
+        <a:xfrm>
+          <a:off x="0" y="0"/>
+          <a:ext cx="0" cy="0"/>
+          <a:chOff x="0" y="0"/>
+          <a:chExt cx="0" cy="0"/>
+        </a:xfrm>
+      </p:grpSpPr>
       <p:sp>
         <p:nvSpPr>
           <p:cNvPr id="14" name="TextBox 13">
             <a:extLst>
               <a:ext uri="{FF2B5EF4-FFF2-40B4-BE49-F238E27FC236}">
-                <a16:creationId xmlns:a16="http://schemas.microsoft.com/office/drawing/2014/main" id="{64DC5B0E-A474-4E38-EBF0-F626BAD2E6E9}"/>
+                <a16:creationId xmlns:a16="http://schemas.microsoft.com/office/drawing/2014/main" id="{5074B37B-AC75-0297-01C4-7DF60DC43D1F}"/>
               </a:ext>
             </a:extLst>
           </p:cNvPr>
@@ -3932,7 +8230,7 @@
           <p:cNvPr id="16" name="TextBox 15">
             <a:extLst>
               <a:ext uri="{FF2B5EF4-FFF2-40B4-BE49-F238E27FC236}">
-                <a16:creationId xmlns:a16="http://schemas.microsoft.com/office/drawing/2014/main" id="{166DB45E-72D5-B68B-DEA6-72EC3896B591}"/>
+                <a16:creationId xmlns:a16="http://schemas.microsoft.com/office/drawing/2014/main" id="{F8C8C2C4-13F5-27B6-605A-3664B750AA32}"/>
               </a:ext>
             </a:extLst>
           </p:cNvPr>
@@ -3961,7 +8259,7 @@
                 <a:latin typeface="Times New Roman" panose="02020603050405020304" pitchFamily="18" charset="0"/>
                 <a:cs typeface="Times New Roman" panose="02020603050405020304" pitchFamily="18" charset="0"/>
               </a:rPr>
-              <a:t>Temporal Resolution Matters</a:t>
+              <a:t>Temporal resolution matters</a:t>
             </a:r>
           </a:p>
         </p:txBody>
@@ -3971,7 +8269,7 @@
           <p:cNvPr id="29" name="Straight Arrow Connector 28">
             <a:extLst>
               <a:ext uri="{FF2B5EF4-FFF2-40B4-BE49-F238E27FC236}">
-                <a16:creationId xmlns:a16="http://schemas.microsoft.com/office/drawing/2014/main" id="{EFF6C400-779B-FD66-D682-C74319E24DC1}"/>
+                <a16:creationId xmlns:a16="http://schemas.microsoft.com/office/drawing/2014/main" id="{C27C3171-D9EF-37F1-5002-89615CE0694C}"/>
               </a:ext>
             </a:extLst>
           </p:cNvPr>
@@ -4013,7 +8311,7 @@
           <p:cNvPr id="34" name="Straight Arrow Connector 33">
             <a:extLst>
               <a:ext uri="{FF2B5EF4-FFF2-40B4-BE49-F238E27FC236}">
-                <a16:creationId xmlns:a16="http://schemas.microsoft.com/office/drawing/2014/main" id="{9E2B23F6-40CF-395A-3866-DD97430940E3}"/>
+                <a16:creationId xmlns:a16="http://schemas.microsoft.com/office/drawing/2014/main" id="{ADDABB04-A073-8DFE-D723-81ED80414DED}"/>
               </a:ext>
             </a:extLst>
           </p:cNvPr>
@@ -4055,7 +8353,7 @@
           <p:cNvPr id="35" name="Straight Arrow Connector 34">
             <a:extLst>
               <a:ext uri="{FF2B5EF4-FFF2-40B4-BE49-F238E27FC236}">
-                <a16:creationId xmlns:a16="http://schemas.microsoft.com/office/drawing/2014/main" id="{A32B7668-C935-2FB6-A0C5-3256C71C2265}"/>
+                <a16:creationId xmlns:a16="http://schemas.microsoft.com/office/drawing/2014/main" id="{8FED0A0C-D4FB-1429-61B9-4357732CA0E4}"/>
               </a:ext>
             </a:extLst>
           </p:cNvPr>
@@ -4097,7 +8395,7 @@
           <p:cNvPr id="39" name="Picture 5">
             <a:extLst>
               <a:ext uri="{FF2B5EF4-FFF2-40B4-BE49-F238E27FC236}">
-                <a16:creationId xmlns:a16="http://schemas.microsoft.com/office/drawing/2014/main" id="{AED96FE4-B496-F8C5-B34E-4C86FC8F065F}"/>
+                <a16:creationId xmlns:a16="http://schemas.microsoft.com/office/drawing/2014/main" id="{2409DE4A-95F1-7391-68BC-560CB7DB3C31}"/>
               </a:ext>
             </a:extLst>
           </p:cNvPr>
@@ -4144,7 +8442,7 @@
           <p:cNvPr id="1049" name="Group 1048">
             <a:extLst>
               <a:ext uri="{FF2B5EF4-FFF2-40B4-BE49-F238E27FC236}">
-                <a16:creationId xmlns:a16="http://schemas.microsoft.com/office/drawing/2014/main" id="{0AF7CF4A-D82C-AE0B-2D36-D78835893106}"/>
+                <a16:creationId xmlns:a16="http://schemas.microsoft.com/office/drawing/2014/main" id="{806412CA-59BB-21E5-E4B1-0EFEF7038233}"/>
               </a:ext>
             </a:extLst>
           </p:cNvPr>
@@ -4164,7 +8462,7 @@
             <p:cNvPr id="42" name="Freeform 41">
               <a:extLst>
                 <a:ext uri="{FF2B5EF4-FFF2-40B4-BE49-F238E27FC236}">
-                  <a16:creationId xmlns:a16="http://schemas.microsoft.com/office/drawing/2014/main" id="{DAB811A5-06AB-DD28-5F38-4FEE087AD89C}"/>
+                  <a16:creationId xmlns:a16="http://schemas.microsoft.com/office/drawing/2014/main" id="{043D641B-AEC1-62A1-C8E6-C2855F89F638}"/>
                 </a:ext>
               </a:extLst>
             </p:cNvPr>
@@ -4227,7 +8525,7 @@
             <p:cNvPr id="43" name="Freeform 42">
               <a:extLst>
                 <a:ext uri="{FF2B5EF4-FFF2-40B4-BE49-F238E27FC236}">
-                  <a16:creationId xmlns:a16="http://schemas.microsoft.com/office/drawing/2014/main" id="{DC6A9A6B-75CD-2168-A195-4369C4118835}"/>
+                  <a16:creationId xmlns:a16="http://schemas.microsoft.com/office/drawing/2014/main" id="{9AFB5D65-87D5-5C56-7F89-6245306DE423}"/>
                 </a:ext>
               </a:extLst>
             </p:cNvPr>
@@ -4290,7 +8588,7 @@
             <p:cNvPr id="44" name="Freeform 43">
               <a:extLst>
                 <a:ext uri="{FF2B5EF4-FFF2-40B4-BE49-F238E27FC236}">
-                  <a16:creationId xmlns:a16="http://schemas.microsoft.com/office/drawing/2014/main" id="{B34F9A91-9969-2C61-F40A-6275968AE7D8}"/>
+                  <a16:creationId xmlns:a16="http://schemas.microsoft.com/office/drawing/2014/main" id="{E1F10E57-6F5E-155E-ABE3-94FFED2C4C5A}"/>
                 </a:ext>
               </a:extLst>
             </p:cNvPr>
@@ -4353,7 +8651,7 @@
             <p:cNvPr id="45" name="Freeform 44">
               <a:extLst>
                 <a:ext uri="{FF2B5EF4-FFF2-40B4-BE49-F238E27FC236}">
-                  <a16:creationId xmlns:a16="http://schemas.microsoft.com/office/drawing/2014/main" id="{2086576B-B67C-5DF7-37A5-80016C0D7E3A}"/>
+                  <a16:creationId xmlns:a16="http://schemas.microsoft.com/office/drawing/2014/main" id="{54B8923D-9195-0B73-9B96-151F7D8FD076}"/>
                 </a:ext>
               </a:extLst>
             </p:cNvPr>
@@ -4416,7 +8714,7 @@
             <p:cNvPr id="46" name="Freeform 45">
               <a:extLst>
                 <a:ext uri="{FF2B5EF4-FFF2-40B4-BE49-F238E27FC236}">
-                  <a16:creationId xmlns:a16="http://schemas.microsoft.com/office/drawing/2014/main" id="{DDECDD9B-7833-57B8-D2BC-6F489CFEAE14}"/>
+                  <a16:creationId xmlns:a16="http://schemas.microsoft.com/office/drawing/2014/main" id="{5B676E69-1C1F-F6CE-B0A1-CB08895BF022}"/>
                 </a:ext>
               </a:extLst>
             </p:cNvPr>
@@ -4479,7 +8777,7 @@
             <p:cNvPr id="1036" name="Freeform 1035">
               <a:extLst>
                 <a:ext uri="{FF2B5EF4-FFF2-40B4-BE49-F238E27FC236}">
-                  <a16:creationId xmlns:a16="http://schemas.microsoft.com/office/drawing/2014/main" id="{6B03BCF9-D474-F393-8F8F-16048ADD7633}"/>
+                  <a16:creationId xmlns:a16="http://schemas.microsoft.com/office/drawing/2014/main" id="{85E9CAE4-86AE-1702-B8FE-016216372C69}"/>
                 </a:ext>
               </a:extLst>
             </p:cNvPr>
@@ -4559,7 +8857,7 @@
             <p:cNvPr id="1037" name="Freeform 1036">
               <a:extLst>
                 <a:ext uri="{FF2B5EF4-FFF2-40B4-BE49-F238E27FC236}">
-                  <a16:creationId xmlns:a16="http://schemas.microsoft.com/office/drawing/2014/main" id="{8B22F6D9-282E-7D12-2222-4D2BE93B6564}"/>
+                  <a16:creationId xmlns:a16="http://schemas.microsoft.com/office/drawing/2014/main" id="{5B66EB0D-1E8C-1AFD-029A-56C9E9500BFA}"/>
                 </a:ext>
               </a:extLst>
             </p:cNvPr>
@@ -8542,7 +12840,7 @@
             <p:cNvPr id="1038" name="Freeform 1037">
               <a:extLst>
                 <a:ext uri="{FF2B5EF4-FFF2-40B4-BE49-F238E27FC236}">
-                  <a16:creationId xmlns:a16="http://schemas.microsoft.com/office/drawing/2014/main" id="{C8E2B05B-1B6C-7508-3056-26AA89A21893}"/>
+                  <a16:creationId xmlns:a16="http://schemas.microsoft.com/office/drawing/2014/main" id="{62AC2D3E-FC8F-CAD1-6C9A-5290CD302D43}"/>
                 </a:ext>
               </a:extLst>
             </p:cNvPr>
@@ -8605,7 +12903,7 @@
             <p:cNvPr id="1041" name="Freeform 1040">
               <a:extLst>
                 <a:ext uri="{FF2B5EF4-FFF2-40B4-BE49-F238E27FC236}">
-                  <a16:creationId xmlns:a16="http://schemas.microsoft.com/office/drawing/2014/main" id="{BF26C1EF-D936-21F3-9A18-4B580D798D60}"/>
+                  <a16:creationId xmlns:a16="http://schemas.microsoft.com/office/drawing/2014/main" id="{48727A03-AFC9-87D4-83F6-EB3FBFF5E0E0}"/>
                 </a:ext>
               </a:extLst>
             </p:cNvPr>
@@ -12588,7 +16886,7 @@
             <p:cNvPr id="1042" name="Freeform 1041">
               <a:extLst>
                 <a:ext uri="{FF2B5EF4-FFF2-40B4-BE49-F238E27FC236}">
-                  <a16:creationId xmlns:a16="http://schemas.microsoft.com/office/drawing/2014/main" id="{75EDD52E-C96D-A9FC-7F9E-A6B64A93AE51}"/>
+                  <a16:creationId xmlns:a16="http://schemas.microsoft.com/office/drawing/2014/main" id="{D6DEA3B8-7A3C-0A01-B149-4EBA3D48E468}"/>
                 </a:ext>
               </a:extLst>
             </p:cNvPr>
@@ -12651,7 +16949,7 @@
             <p:cNvPr id="1043" name="Freeform 1042">
               <a:extLst>
                 <a:ext uri="{FF2B5EF4-FFF2-40B4-BE49-F238E27FC236}">
-                  <a16:creationId xmlns:a16="http://schemas.microsoft.com/office/drawing/2014/main" id="{4A260CAF-F36E-7949-C1F3-E118FCA049BA}"/>
+                  <a16:creationId xmlns:a16="http://schemas.microsoft.com/office/drawing/2014/main" id="{629DC464-BE53-B853-0C3B-D9DB410F33BD}"/>
                 </a:ext>
               </a:extLst>
             </p:cNvPr>
@@ -16634,7 +20932,7 @@
             <p:cNvPr id="1044" name="Freeform 1043">
               <a:extLst>
                 <a:ext uri="{FF2B5EF4-FFF2-40B4-BE49-F238E27FC236}">
-                  <a16:creationId xmlns:a16="http://schemas.microsoft.com/office/drawing/2014/main" id="{A4DBB187-9612-D6E9-6AF9-952746ECC108}"/>
+                  <a16:creationId xmlns:a16="http://schemas.microsoft.com/office/drawing/2014/main" id="{21C615A8-8BB9-B732-0ADC-A664EA4ECDF0}"/>
                 </a:ext>
               </a:extLst>
             </p:cNvPr>
@@ -16697,7 +20995,7 @@
             <p:cNvPr id="1045" name="Freeform 1044">
               <a:extLst>
                 <a:ext uri="{FF2B5EF4-FFF2-40B4-BE49-F238E27FC236}">
-                  <a16:creationId xmlns:a16="http://schemas.microsoft.com/office/drawing/2014/main" id="{99396E75-3505-2D1B-A73C-8C3FFCCC9B38}"/>
+                  <a16:creationId xmlns:a16="http://schemas.microsoft.com/office/drawing/2014/main" id="{7BAA7E73-D933-0CA6-2B75-AEE3C4DCBE64}"/>
                 </a:ext>
               </a:extLst>
             </p:cNvPr>
@@ -20684,7 +24982,7 @@
             <p:cNvPr id="1046" name="Freeform 1045">
               <a:extLst>
                 <a:ext uri="{FF2B5EF4-FFF2-40B4-BE49-F238E27FC236}">
-                  <a16:creationId xmlns:a16="http://schemas.microsoft.com/office/drawing/2014/main" id="{57AAC0E0-DF1B-8298-147D-2900D566E5DF}"/>
+                  <a16:creationId xmlns:a16="http://schemas.microsoft.com/office/drawing/2014/main" id="{BE66CF6C-596C-0D94-5FDA-B218F43ADA8D}"/>
                 </a:ext>
               </a:extLst>
             </p:cNvPr>
@@ -20747,7 +25045,7 @@
             <p:cNvPr id="1047" name="Freeform 1046">
               <a:extLst>
                 <a:ext uri="{FF2B5EF4-FFF2-40B4-BE49-F238E27FC236}">
-                  <a16:creationId xmlns:a16="http://schemas.microsoft.com/office/drawing/2014/main" id="{69676E5B-FD56-CA97-5524-37D70689909E}"/>
+                  <a16:creationId xmlns:a16="http://schemas.microsoft.com/office/drawing/2014/main" id="{93623D18-6F88-0574-D8BF-74AF5B5247CD}"/>
                 </a:ext>
               </a:extLst>
             </p:cNvPr>
@@ -24730,7 +29028,7 @@
             <p:cNvPr id="1048" name="Freeform 1047">
               <a:extLst>
                 <a:ext uri="{FF2B5EF4-FFF2-40B4-BE49-F238E27FC236}">
-                  <a16:creationId xmlns:a16="http://schemas.microsoft.com/office/drawing/2014/main" id="{8E3E2E0C-413C-4181-D324-8E0C80B60995}"/>
+                  <a16:creationId xmlns:a16="http://schemas.microsoft.com/office/drawing/2014/main" id="{28957CBC-18F6-1BE5-4F23-D75CEE520064}"/>
                 </a:ext>
               </a:extLst>
             </p:cNvPr>
@@ -24794,7 +29092,7 @@
           <p:cNvPr id="1080" name="Straight Arrow Connector 1079">
             <a:extLst>
               <a:ext uri="{FF2B5EF4-FFF2-40B4-BE49-F238E27FC236}">
-                <a16:creationId xmlns:a16="http://schemas.microsoft.com/office/drawing/2014/main" id="{C1C355C3-B0E0-A8A4-F6B0-D56B40F9E4B3}"/>
+                <a16:creationId xmlns:a16="http://schemas.microsoft.com/office/drawing/2014/main" id="{940A6ED8-0E4C-BEB3-5964-1B48FDF6B140}"/>
               </a:ext>
             </a:extLst>
           </p:cNvPr>
@@ -24836,7 +29134,7 @@
           <p:cNvPr id="1082" name="Straight Arrow Connector 1081">
             <a:extLst>
               <a:ext uri="{FF2B5EF4-FFF2-40B4-BE49-F238E27FC236}">
-                <a16:creationId xmlns:a16="http://schemas.microsoft.com/office/drawing/2014/main" id="{9EFBD35E-0988-6EFD-6849-971E0BBCDBCB}"/>
+                <a16:creationId xmlns:a16="http://schemas.microsoft.com/office/drawing/2014/main" id="{FA242398-30C3-1607-9436-686F89605500}"/>
               </a:ext>
             </a:extLst>
           </p:cNvPr>
@@ -24878,7 +29176,7 @@
           <p:cNvPr id="1090" name="Straight Arrow Connector 1089">
             <a:extLst>
               <a:ext uri="{FF2B5EF4-FFF2-40B4-BE49-F238E27FC236}">
-                <a16:creationId xmlns:a16="http://schemas.microsoft.com/office/drawing/2014/main" id="{330B1616-2B02-867F-9DE5-F45954AD3CAA}"/>
+                <a16:creationId xmlns:a16="http://schemas.microsoft.com/office/drawing/2014/main" id="{F18BD78D-964E-18F3-5DA1-2A2E37FD0633}"/>
               </a:ext>
             </a:extLst>
           </p:cNvPr>
@@ -24920,7 +29218,7 @@
           <p:cNvPr id="6" name="TextBox 5">
             <a:extLst>
               <a:ext uri="{FF2B5EF4-FFF2-40B4-BE49-F238E27FC236}">
-                <a16:creationId xmlns:a16="http://schemas.microsoft.com/office/drawing/2014/main" id="{F63A8924-9BD8-A65D-C2D7-0454A8D58257}"/>
+                <a16:creationId xmlns:a16="http://schemas.microsoft.com/office/drawing/2014/main" id="{3EEA80FA-0174-4A8F-FE8A-8C1E970B072E}"/>
               </a:ext>
             </a:extLst>
           </p:cNvPr>
@@ -24963,7 +29261,7 @@
           <p:cNvPr id="7" name="Picture 2" descr="solar energy icon logo vector illustration. solar panels symbol ...">
             <a:extLst>
               <a:ext uri="{FF2B5EF4-FFF2-40B4-BE49-F238E27FC236}">
-                <a16:creationId xmlns:a16="http://schemas.microsoft.com/office/drawing/2014/main" id="{E41EFA98-DF70-ABEB-DD57-7973D17707B4}"/>
+                <a16:creationId xmlns:a16="http://schemas.microsoft.com/office/drawing/2014/main" id="{BC19A211-176E-DC16-7AE6-395AC5B57DC5}"/>
               </a:ext>
             </a:extLst>
           </p:cNvPr>
@@ -25020,7 +29318,7 @@
           <p:cNvPr id="8" name="TextBox 7">
             <a:extLst>
               <a:ext uri="{FF2B5EF4-FFF2-40B4-BE49-F238E27FC236}">
-                <a16:creationId xmlns:a16="http://schemas.microsoft.com/office/drawing/2014/main" id="{9CF33595-C387-C961-76A8-2E0AC93A87CF}"/>
+                <a16:creationId xmlns:a16="http://schemas.microsoft.com/office/drawing/2014/main" id="{774CD47E-417C-1869-6026-A4E03DECA355}"/>
               </a:ext>
             </a:extLst>
           </p:cNvPr>
@@ -25063,7 +29361,7 @@
           <p:cNvPr id="51" name="Picture 2">
             <a:extLst>
               <a:ext uri="{FF2B5EF4-FFF2-40B4-BE49-F238E27FC236}">
-                <a16:creationId xmlns:a16="http://schemas.microsoft.com/office/drawing/2014/main" id="{090AD3AA-827F-5E3B-35F4-C40CA89B0998}"/>
+                <a16:creationId xmlns:a16="http://schemas.microsoft.com/office/drawing/2014/main" id="{67CDD79E-5FF5-E4CD-B724-06CDBA850154}"/>
               </a:ext>
             </a:extLst>
           </p:cNvPr>
@@ -25101,7 +29399,7 @@
         </p:blipFill>
         <p:spPr bwMode="auto">
           <a:xfrm>
-            <a:off x="689927" y="2868826"/>
+            <a:off x="689927" y="2897144"/>
             <a:ext cx="5294259" cy="3763536"/>
           </a:xfrm>
           <a:prstGeom prst="rect">
@@ -25124,7 +29422,7 @@
           <p:cNvPr id="52" name="Picture 4">
             <a:extLst>
               <a:ext uri="{FF2B5EF4-FFF2-40B4-BE49-F238E27FC236}">
-                <a16:creationId xmlns:a16="http://schemas.microsoft.com/office/drawing/2014/main" id="{486C646E-5E27-B5CD-8934-94ED5B3DEA12}"/>
+                <a16:creationId xmlns:a16="http://schemas.microsoft.com/office/drawing/2014/main" id="{8B134383-1F99-C832-A502-43DB95DC7E6B}"/>
               </a:ext>
             </a:extLst>
           </p:cNvPr>
@@ -25199,7 +29497,7 @@
           <p:cNvPr id="53" name="Picture 4">
             <a:extLst>
               <a:ext uri="{FF2B5EF4-FFF2-40B4-BE49-F238E27FC236}">
-                <a16:creationId xmlns:a16="http://schemas.microsoft.com/office/drawing/2014/main" id="{C4AC6C9D-920D-BEA8-F549-FF5A9F8A070B}"/>
+                <a16:creationId xmlns:a16="http://schemas.microsoft.com/office/drawing/2014/main" id="{9627AA94-700C-E948-8A73-A42CB5FE956E}"/>
               </a:ext>
             </a:extLst>
           </p:cNvPr>
@@ -25265,7 +29563,7 @@
         </p:blipFill>
         <p:spPr bwMode="auto">
           <a:xfrm>
-            <a:off x="4333577" y="4049467"/>
+            <a:off x="4333577" y="4077785"/>
             <a:ext cx="1168867" cy="938727"/>
           </a:xfrm>
           <a:prstGeom prst="rect">
@@ -25288,7 +29586,7 @@
           <p:cNvPr id="54" name="Picture 4">
             <a:extLst>
               <a:ext uri="{FF2B5EF4-FFF2-40B4-BE49-F238E27FC236}">
-                <a16:creationId xmlns:a16="http://schemas.microsoft.com/office/drawing/2014/main" id="{559C3ED2-9BF4-8384-0090-FED13B4EC30B}"/>
+                <a16:creationId xmlns:a16="http://schemas.microsoft.com/office/drawing/2014/main" id="{B755674D-F05A-D095-9F1A-BF3C746A835F}"/>
               </a:ext>
             </a:extLst>
           </p:cNvPr>
@@ -25339,7 +29637,7 @@
         </p:blipFill>
         <p:spPr bwMode="auto">
           <a:xfrm>
-            <a:off x="2295197" y="5228572"/>
+            <a:off x="2295197" y="5256890"/>
             <a:ext cx="1368664" cy="1399173"/>
           </a:xfrm>
           <a:prstGeom prst="rect">
@@ -25362,7 +29660,7 @@
           <p:cNvPr id="33" name="Group 32">
             <a:extLst>
               <a:ext uri="{FF2B5EF4-FFF2-40B4-BE49-F238E27FC236}">
-                <a16:creationId xmlns:a16="http://schemas.microsoft.com/office/drawing/2014/main" id="{731D8716-A697-8A1E-347D-61F2D6A8FD5D}"/>
+                <a16:creationId xmlns:a16="http://schemas.microsoft.com/office/drawing/2014/main" id="{0FBE539A-169A-CE7D-3BD1-EA4864151E41}"/>
               </a:ext>
             </a:extLst>
           </p:cNvPr>
@@ -25382,7 +29680,7 @@
             <p:cNvPr id="49" name="Picture 5">
               <a:extLst>
                 <a:ext uri="{FF2B5EF4-FFF2-40B4-BE49-F238E27FC236}">
-                  <a16:creationId xmlns:a16="http://schemas.microsoft.com/office/drawing/2014/main" id="{A7D501B2-6705-DF49-171E-A018ED309F8C}"/>
+                  <a16:creationId xmlns:a16="http://schemas.microsoft.com/office/drawing/2014/main" id="{186AE2CD-2418-4252-E984-558D940884D1}"/>
                 </a:ext>
               </a:extLst>
             </p:cNvPr>
@@ -25429,7 +29727,7 @@
             <p:cNvPr id="50" name="Picture 2" descr="solar energy icon logo vector illustration. solar panels symbol ...">
               <a:extLst>
                 <a:ext uri="{FF2B5EF4-FFF2-40B4-BE49-F238E27FC236}">
-                  <a16:creationId xmlns:a16="http://schemas.microsoft.com/office/drawing/2014/main" id="{5328724F-5CD4-C8AB-7321-A0B3CB3E3EDB}"/>
+                  <a16:creationId xmlns:a16="http://schemas.microsoft.com/office/drawing/2014/main" id="{467D5B3B-42FE-98D2-7D06-C924217A38A9}"/>
                 </a:ext>
               </a:extLst>
             </p:cNvPr>
@@ -25513,7 +29811,7 @@
           <p:cNvPr id="36" name="Group 35">
             <a:extLst>
               <a:ext uri="{FF2B5EF4-FFF2-40B4-BE49-F238E27FC236}">
-                <a16:creationId xmlns:a16="http://schemas.microsoft.com/office/drawing/2014/main" id="{7D1CAB4D-F681-0D40-FDF8-981C0AE9BC9A}"/>
+                <a16:creationId xmlns:a16="http://schemas.microsoft.com/office/drawing/2014/main" id="{B8E6601A-A5E0-2CAC-3A9B-D1E17D689268}"/>
               </a:ext>
             </a:extLst>
           </p:cNvPr>
@@ -25533,7 +29831,7 @@
             <p:cNvPr id="47" name="Picture 5">
               <a:extLst>
                 <a:ext uri="{FF2B5EF4-FFF2-40B4-BE49-F238E27FC236}">
-                  <a16:creationId xmlns:a16="http://schemas.microsoft.com/office/drawing/2014/main" id="{63A4EBF5-A0C5-3B99-1F2C-4E1318591672}"/>
+                  <a16:creationId xmlns:a16="http://schemas.microsoft.com/office/drawing/2014/main" id="{C9F1D799-2050-BD1B-9C82-7FF5BE5B1EB3}"/>
                 </a:ext>
               </a:extLst>
             </p:cNvPr>
@@ -25580,7 +29878,7 @@
             <p:cNvPr id="48" name="Picture 2" descr="solar energy icon logo vector illustration. solar panels symbol ...">
               <a:extLst>
                 <a:ext uri="{FF2B5EF4-FFF2-40B4-BE49-F238E27FC236}">
-                  <a16:creationId xmlns:a16="http://schemas.microsoft.com/office/drawing/2014/main" id="{D4726B13-CAAB-F6C5-0D20-A53E5DD3AFEB}"/>
+                  <a16:creationId xmlns:a16="http://schemas.microsoft.com/office/drawing/2014/main" id="{D6B43A11-E003-18FF-DC72-F3FDA29DB3C8}"/>
                 </a:ext>
               </a:extLst>
             </p:cNvPr>
@@ -25664,7 +29962,7 @@
           <p:cNvPr id="37" name="Group 36">
             <a:extLst>
               <a:ext uri="{FF2B5EF4-FFF2-40B4-BE49-F238E27FC236}">
-                <a16:creationId xmlns:a16="http://schemas.microsoft.com/office/drawing/2014/main" id="{43E7B9A4-4FBA-0EC5-0C5B-45FD8FBFA579}"/>
+                <a16:creationId xmlns:a16="http://schemas.microsoft.com/office/drawing/2014/main" id="{D04224C2-0715-2061-08BA-02F0195E72F2}"/>
               </a:ext>
             </a:extLst>
           </p:cNvPr>
@@ -25684,7 +29982,7 @@
             <p:cNvPr id="40" name="Picture 5">
               <a:extLst>
                 <a:ext uri="{FF2B5EF4-FFF2-40B4-BE49-F238E27FC236}">
-                  <a16:creationId xmlns:a16="http://schemas.microsoft.com/office/drawing/2014/main" id="{6167ACA3-B189-E30D-72B9-FF64B0A58266}"/>
+                  <a16:creationId xmlns:a16="http://schemas.microsoft.com/office/drawing/2014/main" id="{5A1E6D25-03DC-64A9-C9D0-97F129901013}"/>
                 </a:ext>
               </a:extLst>
             </p:cNvPr>
@@ -25731,7 +30029,7 @@
             <p:cNvPr id="41" name="Picture 2" descr="solar energy icon logo vector illustration. solar panels symbol ...">
               <a:extLst>
                 <a:ext uri="{FF2B5EF4-FFF2-40B4-BE49-F238E27FC236}">
-                  <a16:creationId xmlns:a16="http://schemas.microsoft.com/office/drawing/2014/main" id="{12E54575-8A86-EB76-386A-FE0E04325FA9}"/>
+                  <a16:creationId xmlns:a16="http://schemas.microsoft.com/office/drawing/2014/main" id="{1B23A625-BB6B-AEB0-FE9B-DA0D3519BB81}"/>
                 </a:ext>
               </a:extLst>
             </p:cNvPr>
@@ -25815,7 +30113,7 @@
           <p:cNvPr id="12" name="TextBox 11">
             <a:extLst>
               <a:ext uri="{FF2B5EF4-FFF2-40B4-BE49-F238E27FC236}">
-                <a16:creationId xmlns:a16="http://schemas.microsoft.com/office/drawing/2014/main" id="{D2CA779B-885B-947A-02C9-5B5C161B3AD7}"/>
+                <a16:creationId xmlns:a16="http://schemas.microsoft.com/office/drawing/2014/main" id="{11903AD4-5E56-53BD-0890-DD31A79F62D5}"/>
               </a:ext>
             </a:extLst>
           </p:cNvPr>
@@ -25939,7 +30237,7 @@
           <p:cNvPr id="1050" name="TextBox 1049">
             <a:extLst>
               <a:ext uri="{FF2B5EF4-FFF2-40B4-BE49-F238E27FC236}">
-                <a16:creationId xmlns:a16="http://schemas.microsoft.com/office/drawing/2014/main" id="{4F6961DB-5844-297C-D26B-A3D2FC934C83}"/>
+                <a16:creationId xmlns:a16="http://schemas.microsoft.com/office/drawing/2014/main" id="{46A19A3A-5DC5-E57E-ABC6-EC9EBB875837}"/>
               </a:ext>
             </a:extLst>
           </p:cNvPr>
@@ -25980,7 +30278,7 @@
     </p:spTree>
     <p:extLst>
       <p:ext uri="{BB962C8B-B14F-4D97-AF65-F5344CB8AC3E}">
-        <p14:creationId xmlns:p14="http://schemas.microsoft.com/office/powerpoint/2010/main" val="2486185566"/>
+        <p14:creationId xmlns:p14="http://schemas.microsoft.com/office/powerpoint/2010/main" val="1890473575"/>
       </p:ext>
     </p:extLst>
   </p:cSld>
@@ -25990,7 +30288,7 @@
 </p:sld>
 </file>
 
-<file path=ppt/slides/slide2.xml><?xml version="1.0" encoding="utf-8"?>
+<file path=ppt/slides/slide3.xml><?xml version="1.0" encoding="utf-8"?>
 <p:sld xmlns:a="http://schemas.openxmlformats.org/drawingml/2006/main" xmlns:r="http://schemas.openxmlformats.org/officeDocument/2006/relationships" xmlns:p="http://schemas.openxmlformats.org/presentationml/2006/main">
   <p:cSld>
     <p:spTree>
@@ -26028,7 +30326,7 @@
         <p:spPr>
           <a:xfrm>
             <a:off x="136798" y="3209569"/>
-            <a:ext cx="5530075" cy="456535"/>
+            <a:ext cx="6120874" cy="456535"/>
           </a:xfrm>
           <a:prstGeom prst="rect">
             <a:avLst/>
@@ -26051,7 +30349,7 @@
                 <a:latin typeface="Arial" panose="020B0604020202020204" pitchFamily="34" charset="0"/>
                 <a:cs typeface="Arial" panose="020B0604020202020204" pitchFamily="34" charset="0"/>
               </a:rPr>
-              <a:t>2. Grid emissions rate (Cambium 2024)</a:t>
+              <a:t>2. Grid emission factors (Cambium 2024)</a:t>
             </a:r>
           </a:p>
         </p:txBody>
@@ -26680,7 +30978,7 @@
                   <a:latin typeface="Arial" panose="020B0604020202020204" pitchFamily="34" charset="0"/>
                   <a:cs typeface="Arial" panose="020B0604020202020204" pitchFamily="34" charset="0"/>
                 </a:rPr>
-                <a:t>Emissions factors</a:t>
+                <a:t>Emission factors</a:t>
               </a:r>
             </a:p>
           </p:txBody>
@@ -27221,11 +31519,18 @@
               <a:buChar char="•"/>
             </a:pPr>
             <a:r>
+              <a:rPr lang="en-US" sz="1400">
+                <a:latin typeface="Arial" panose="020B0604020202020204" pitchFamily="34" charset="0"/>
+                <a:cs typeface="Arial" panose="020B0604020202020204" pitchFamily="34" charset="0"/>
+              </a:rPr>
+              <a:t>639 </a:t>
+            </a:r>
+            <a:r>
               <a:rPr lang="en-US" sz="1400" dirty="0">
                 <a:latin typeface="Arial" panose="020B0604020202020204" pitchFamily="34" charset="0"/>
                 <a:cs typeface="Arial" panose="020B0604020202020204" pitchFamily="34" charset="0"/>
               </a:rPr>
-              <a:t>600 buildings</a:t>
+              <a:t>buildings</a:t>
             </a:r>
           </a:p>
           <a:p>
@@ -35305,7 +39610,7 @@
                 <a:latin typeface="Times New Roman" panose="02020603050405020304" pitchFamily="18" charset="0"/>
                 <a:cs typeface="Times New Roman" panose="02020603050405020304" pitchFamily="18" charset="0"/>
               </a:rPr>
-              <a:t>(e.g., error distribution of emissions accounting using annual avg. emissions factor)</a:t>
+              <a:t>(e.g., error distribution of emissions accounting using annual avg. emission factor)</a:t>
             </a:r>
           </a:p>
         </p:txBody>
